--- a/IntelligenceStack_Executive_Deck.pptx
+++ b/IntelligenceStack_Executive_Deck.pptx
@@ -17,9 +17,10 @@
     <p:sldId id="265" r:id="rId11"/>
     <p:sldId id="266" r:id="rId12"/>
     <p:sldId id="267" r:id="rId13"/>
+    <p:sldId id="268" r:id="rId14"/>
   </p:sldIdLst>
   <p:notesMasterIdLst>
-    <p:notesMasterId r:id="rId14"/>
+    <p:notesMasterId r:id="rId15"/>
   </p:notesMasterIdLst>
   <p:sldSz cx="12191695" cy="6858000"/>
   <p:notesSz cx="6858000" cy="12191695"/>
@@ -514,7 +515,7 @@
             <a:r>
               <a:rPr lang="en-US" dirty="0"/>
               <a:t>Opening line: 'Every enterprise wants to point AI at its private data. The reason they hesitate is the same one every time — the moment an LLM can see the data, it can leak it or be tricked into destroying it. IntelligenceStack is a working answer to that, not a concept.'
-Set expectations: ~8 minutes of story, then a live demo you can poke at. The whole thing runs on a laptop and computes real answers from real data — nothing on these slides is mocked.
+Set expectations: ~10 minutes of story, then a live demo you can poke at. The whole thing runs on a laptop and computes real answers from real data — nothing on these slides is mocked.
 Demo is already running: FastAPI backend on :8000, Streamlit control plane on :8501.</a:t>
             </a:r>
             <a:endParaRPr lang="en-US" dirty="0"/>
@@ -603,9 +604,9 @@
           <a:p>
             <a:r>
               <a:rPr lang="en-US" dirty="0"/>
-              <a:t>Don't read all five — that's death by list. Name the two seats that are actually in the room and let the rest sit as evidence of breadth.
-The meta-point: this isn't a security project OR a productivity project OR a cost project. It's one architecture where each stakeholder gets a different win from the same build. That's what makes it fundable — the cost is shared across five value cases.
-Use this slide to hand off to whoever owns the next step: 'Whichever of these is your priority, the pilot looks the same.'</a:t>
+              <a:t>Pivot in tone here — you're done with how it works, now it's what it's worth. Four outcomes, each mapped to a number or a one-word promise the audience can repeat later.
+Lead with the one that matters most to THIS room. For a CFO, cost. For a CISO, unblocked adoption. For a business unit, days-to-seconds. Read the room and reorder verbally.
+The strongest strategic argument is the second tile: most enterprise GenAI initiatives don't fail on capability, they stall in security review. This architecture is what gets them unstuck — that's the real ROI, and it's larger than any single use case.</a:t>
             </a:r>
             <a:endParaRPr lang="en-US" dirty="0"/>
           </a:p>
@@ -693,9 +694,9 @@
           <a:p>
             <a:r>
               <a:rPr lang="en-US" dirty="0"/>
-              <a:t>The objection this slide kills: 'nice demo, but it's a toy — production is a rewrite.' No. The seams are deliberate and each is a one-line swap with an identical contract.
-Concretely: the local engine and the Serverless SQL Warehouse serve the same function signature; the in-code allowlist maps directly to Unity Catalog grants; the planner is already wired to Model Serving behind an env-var switch.
-So the pilot isn't 'rebuild for prod' — it's 'repoint at the workspace.' That collapses the usual gap between a promising demo and a fundable pilot, which is exactly what a leadership audience is deciding about.</a:t>
+              <a:t>Don't read all five — that's death by list. Name the two seats that are actually in the room and let the rest sit as evidence of breadth.
+The meta-point: this isn't a security project OR a productivity project OR a cost project. It's one architecture where each stakeholder gets a different win from the same build. That's what makes it fundable — the cost is shared across five value cases.
+Use this slide to hand off to whoever owns the next step: 'Whichever of these is your priority, the pilot looks the same.'</a:t>
             </a:r>
             <a:endParaRPr lang="en-US" dirty="0"/>
           </a:p>
@@ -783,9 +784,9 @@
           <a:p>
             <a:r>
               <a:rPr lang="en-US" dirty="0"/>
-              <a:t>Land the plane on one sentence: the choice between AI capability and data governance was always a false one, and here's the proof running on a laptop.
-Then make the ask concrete with the three NEXT options — pick the one that matches who you're talking to and propose it as the immediate next step. Don't leave the meeting without agreeing which dataset a pilot would point at.
-Invite them to break it: the repo is public and runs in four commands. An architecture you're willing to hand over and say 'try to get past the boundary' is a very different pitch from a slideware promise.</a:t>
+              <a:t>The objection this slide kills: 'nice demo, but it's a toy — production is a rewrite.' No. The seams are deliberate and each is a one-line swap with an identical contract.
+Row two is new and worth calling out: the retrieval index is the same story as the SQL engine. The sandbox embeds passages with TF-IDF and ranks them with in-engine cosine similarity; production embeds them with bge-large and serves them from Mosaic AI Vector Search. Same storage layout, same query contract, same citations — only the embedding changes.
+So the pilot isn't 'rebuild for prod' — it's 'repoint at the workspace.'</a:t>
             </a:r>
             <a:endParaRPr lang="en-US" dirty="0"/>
           </a:p>
@@ -809,6 +810,96 @@
             <a:fld id="{F7021451-1387-4CA6-816F-3879F97B5CBC}" type="slidenum">
               <a:rPr lang="en-US"/>
               <a:t>12</a:t>
+            </a:fld>
+            <a:endParaRPr lang="en-US"/>
+          </a:p>
+        </p:txBody>
+      </p:sp>
+    </p:spTree>
+    <p:extLst>
+      <p:ext uri="{BB962C8B-B14F-4D97-AF65-F5344CB8AC3E}">
+        <p14:creationId xmlns:p14="http://schemas.microsoft.com/office/powerpoint/2010/main" val="1024086991"/>
+      </p:ext>
+    </p:extLst>
+  </p:cSld>
+  <p:clrMapOvr>
+    <a:masterClrMapping/>
+  </p:clrMapOvr>
+</p:notes>
+</file>
+
+<file path=ppt/notesSlides/notesSlide13.xml><?xml version="1.0" encoding="utf-8"?>
+<p:notes xmlns:a="http://schemas.openxmlformats.org/drawingml/2006/main" xmlns:r="http://schemas.openxmlformats.org/officeDocument/2006/relationships" xmlns:p="http://schemas.openxmlformats.org/presentationml/2006/main">
+  <p:cSld>
+    <p:spTree>
+      <p:nvGrpSpPr>
+        <p:cNvPr id="1" name=""/>
+        <p:cNvGrpSpPr/>
+        <p:nvPr/>
+      </p:nvGrpSpPr>
+      <p:grpSpPr>
+        <a:xfrm>
+          <a:off x="0" y="0"/>
+          <a:ext cx="0" cy="0"/>
+          <a:chOff x="0" y="0"/>
+          <a:chExt cx="0" cy="0"/>
+        </a:xfrm>
+      </p:grpSpPr>
+      <p:sp>
+        <p:nvSpPr>
+          <p:cNvPr id="2" name="Slide Image Placeholder 1"/>
+          <p:cNvSpPr>
+            <a:spLocks noGrp="1" noRot="1" noChangeAspect="1"/>
+          </p:cNvSpPr>
+          <p:nvPr>
+            <p:ph type="sldImg"/>
+          </p:nvPr>
+        </p:nvSpPr>
+        <p:spPr/>
+      </p:sp>
+      <p:sp>
+        <p:nvSpPr>
+          <p:cNvPr id="3" name="Notes Placeholder 2"/>
+          <p:cNvSpPr>
+            <a:spLocks noGrp="1"/>
+          </p:cNvSpPr>
+          <p:nvPr>
+            <p:ph type="body" idx="1"/>
+          </p:nvPr>
+        </p:nvSpPr>
+        <p:spPr/>
+        <p:txBody>
+          <a:bodyPr/>
+          <a:lstStyle/>
+          <a:p>
+            <a:r>
+              <a:rPr lang="en-US" dirty="0"/>
+              <a:t>Land the plane on one sentence: the choice between AI capability and data governance was always a false one, and here's the proof running on a laptop.
+Then make the ask concrete with the three NEXT options — pick the one that matches who you're talking to. Don't leave the meeting without agreeing which dataset a pilot would point at.
+Invite them to break it: the repo is public and runs in four commands. An architecture you're willing to hand over and say 'try to get past the boundary' is a very different pitch from a slideware promise.</a:t>
+            </a:r>
+            <a:endParaRPr lang="en-US" dirty="0"/>
+          </a:p>
+        </p:txBody>
+      </p:sp>
+      <p:sp>
+        <p:nvSpPr>
+          <p:cNvPr id="4" name="Slide Number Placeholder 3"/>
+          <p:cNvSpPr>
+            <a:spLocks noGrp="1"/>
+          </p:cNvSpPr>
+          <p:nvPr>
+            <p:ph type="sldNum" sz="quarter" idx="10"/>
+          </p:nvPr>
+        </p:nvSpPr>
+        <p:spPr/>
+        <p:txBody>
+          <a:bodyPr/>
+          <a:lstStyle/>
+          <a:p>
+            <a:fld id="{F7021451-1387-4CA6-816F-3879F97B5CBC}" type="slidenum">
+              <a:rPr lang="en-US"/>
+              <a:t>13</a:t>
             </a:fld>
             <a:endParaRPr lang="en-US"/>
           </a:p>
@@ -1054,8 +1145,8 @@
             <a:r>
               <a:rPr lang="en-US" dirty="0"/>
               <a:t>Walk the diagram left to right, but keep it to one sentence per numbered item — executives don't need the plumbing, they need to see there IS plumbing.
-The one line to land: the boundary sits between the agent and the data. The agent never touches tables directly; it can only ask the catalog to run a named, pre-approved function. Everything else on this slide is supporting detail.
-If someone asks 'is this really Databricks?' — yes: DLT, Unity Catalog, Liquid Clustering, Model Serving, Mosaic AI Vector Search. The sandbox swaps each for a local stand-in with the same contract (covered on the sandbox-to-production slide).</a:t>
+The one line to land: the boundary sits between the agent and the data. The agent never touches tables directly; it can only ask the catalog to run a named, pre-approved function. Item 4 extends that same rule to unstructured knowledge — retrieval is a governed tool like any other.
+If someone asks 'is this really Databricks?' — yes: DLT, Unity Catalog, Liquid Clustering, Model Serving, Mosaic AI Vector Search. The sandbox swaps each for a local stand-in with the same contract.</a:t>
             </a:r>
             <a:endParaRPr lang="en-US" dirty="0"/>
           </a:p>
@@ -1144,9 +1235,9 @@
             <a:r>
               <a:rPr lang="en-US" dirty="0"/>
               <a:t>This is the switch-to-live-app slide. Leave it up while you alt-tab to the control plane at localhost:8501.
-Run order matters: lead with value (move 1) so the room sees the point before the security theatre. Then move 2 and 3 answer 'but is it safe?' in the most visceral way possible — by trying to break it in front of them.
-For each move, read the trace panel aloud: the app shows Intent Resolution → Governance Boundary Check → Execution. That live trace is the proof that the story on the prior slides is real.
-If the live app misbehaves, the next three slides carry the exact same content as static backup — just present those.</a:t>
+Run order matters: lead with value (moves 1 and 2) so the room sees the point before the security material. Then 3, 4 and 5 answer 'but can I trust it?' — by trying to break it in front of them.
+For each move, read the trace panel aloud: Intent Resolution → Governance Boundary Check → Execution. Move 2 is the one to linger on — the trace shows TWO governance checks, one per tool.
+If the live app misbehaves, slides 6 through 9 carry the same content as static backup — just present those.</a:t>
             </a:r>
             <a:endParaRPr lang="en-US" dirty="0"/>
           </a:p>
@@ -1236,7 +1327,7 @@
               <a:rPr lang="en-US" dirty="0"/>
               <a:t>The headline: the agent did not retrieve a canned sentence. It called the anomaly function, got rows back, and phrased them. The chart is the same data, drawn independently — three biased-cohort customers separate cleanly from ~57 normal ones.
 The stat tiles are the 'so what': 82% of this customer's traffic is anomalous, at 6x normal latency. That is an actionable finding a business owner can act on today.
-The italic line is the credibility close: because both the dashboard and the agent read the same gold table, there is no room for a demo to lie. Swap CUST_404 for CUST_405 live and watch it drop to 0% — that improvisation always convinces the skeptic.</a:t>
+Swap CUST_404 for CUST_405 live and watch it drop to 0% — that improvisation always convinces the skeptic.</a:t>
             </a:r>
             <a:endParaRPr lang="en-US" dirty="0"/>
           </a:p>
@@ -1324,10 +1415,9 @@
           <a:p>
             <a:r>
               <a:rPr lang="en-US" dirty="0"/>
-              <a:t>This is the slide that wins the security review. Two attacks the audience will recognise, both defeated by construction rather than by a filter that has to guess.
-Move 2 point: the agent doesn't 'refuse to answer' the way a chatbot dodges a question — there is a hard control (FUNCTION_GRANT) that stops execution, and it writes an audit record. Auditors love that a block is evidence.
-Move 3 point: notice it did NOT just reject the whole prompt. It extracted the legitimate part (CUST_404), discarded the SQL, and answered safely. That's the difference between a brittle blocklist and a real boundary. And underneath, the query uses bound parameters, so even if a bad value slipped through it would match zero rows instead of changing the query.
-If asked 'what if the model is jailbroken?' — the boundary is downstream of the model. A fully compromised model still can't call a function that isn't on the allowlist.</a:t>
+              <a:t>This is the slide that shows the architecture has matured beyond 'query a table'. A real operational question needs two different kinds of knowledge — a measurement and a procedure — and until now those lived in two different systems with two different access models.
+The key governance point, and say it explicitly: retrieval did not get a special exemption. It is a registered function on the same allowlist, its question is passed as a bound value, and it produced its OWN governance check. In the live trace the room can count two 'Granted' entries.
+The closing line is the one to land: the number is from the lakehouse, the recommendation is from an approved document, and the model authored neither. It orchestrated. That is the whole thesis, demonstrated on one question.</a:t>
             </a:r>
             <a:endParaRPr lang="en-US" dirty="0"/>
           </a:p>
@@ -1415,9 +1505,10 @@
           <a:p>
             <a:r>
               <a:rPr lang="en-US" dirty="0"/>
-              <a:t>For the technical people in the room. The histogram shows why the anomaly call is trustworthy: normal traffic clusters near 66ms, the 3σ line sits at 310ms, and the anomaly cohort lives in the far right tail. Nobody picked 310 — it's three standard deviations of the actual data.
-The three bullets are the engineering credibility: statistical definition, bound parameters, full tracing. If a CTO or architect is evaluating this, these are the words that tell them it was built by someone who has shipped production data systems.
-Close on the tests: this isn't a demo held together with tape — the three claims on this slide each have an automated test that fails loudly if they regress.</a:t>
+              <a:t>This slide is aimed squarely at anyone who has been burned by a RAG pilot. Every one of them has seen a demo where the system cheerfully cites an irrelevant document, and it is the reason many of those pilots never shipped.
+Walk the chart left to right. The left panel is the trap: if you rank purely by similarity — which is what most RAG implementations do — the off-topic question WINS. That is measured on this corpus, not hypothetical.
+The right panel is the fix: require that the question's vocabulary is actually covered by the corpus. Off-topic falls below the line and the system declines.
+The engineering maturity signal here is knowing that a retrieval system needs an abstention policy at all. Most teams discover this in production, after a bad answer reaches a customer.</a:t>
             </a:r>
             <a:endParaRPr lang="en-US" dirty="0"/>
           </a:p>
@@ -1505,9 +1596,9 @@
           <a:p>
             <a:r>
               <a:rPr lang="en-US" dirty="0"/>
-              <a:t>Pivot in tone here — you're done with how it works, now it's what it's worth. Four outcomes, each mapped to a number or a one-word promise the audience can repeat later.
-Lead with the one that matters most to THIS room. For a CFO, cost. For a CISO, unblocked adoption. For a business unit, days-to-seconds. Read the room and reorder verbally.
-The strongest strategic argument is the second tile: most enterprise GenAI initiatives don't fail on capability, they stall in security review. This architecture is the thing that gets them unstuck — that's the real ROI, and it's larger than any single use case.</a:t>
+              <a:t>For the technical people in the room. The histogram shows why the anomaly call is trustworthy: normal traffic clusters near 66ms, the 3σ line sits at 310ms, and the anomaly cohort lives in the far right tail. Nobody picked 310 — it's three standard deviations of the actual data.
+The three bullets are the engineering credibility: statistical definition, bound parameters, full tracing. If a CTO or architect is evaluating this, these are the words that say it was built by someone who has shipped production data systems.
+Close on the tests: each claim on these slides has an automated test that fails loudly if it regresses.</a:t>
             </a:r>
             <a:endParaRPr lang="en-US" dirty="0"/>
           </a:p>
@@ -2215,6 +2306,830 @@
     <p:bg>
       <p:bgPr>
         <a:solidFill>
+          <a:srgbClr val="0E1621"/>
+        </a:solidFill>
+      </p:bgPr>
+    </p:bg>
+    <p:spTree>
+      <p:nvGrpSpPr>
+        <p:cNvPr id="1" name=""/>
+        <p:cNvGrpSpPr/>
+        <p:nvPr/>
+      </p:nvGrpSpPr>
+      <p:grpSpPr>
+        <a:xfrm>
+          <a:off x="0" y="0"/>
+          <a:ext cx="0" cy="0"/>
+          <a:chOff x="0" y="0"/>
+          <a:chExt cx="0" cy="0"/>
+        </a:xfrm>
+      </p:grpSpPr>
+      <p:sp>
+        <p:nvSpPr>
+          <p:cNvPr id="2" name="Shape 0"/>
+          <p:cNvSpPr/>
+          <p:nvPr/>
+        </p:nvSpPr>
+        <p:spPr>
+          <a:xfrm>
+            <a:off x="640080" y="566928"/>
+            <a:ext cx="146304" cy="146304"/>
+          </a:xfrm>
+          <a:prstGeom prst="ellipse">
+            <a:avLst/>
+          </a:prstGeom>
+          <a:solidFill>
+            <a:srgbClr val="FF6C00"/>
+          </a:solidFill>
+          <a:ln/>
+        </p:spPr>
+      </p:sp>
+      <p:sp>
+        <p:nvSpPr>
+          <p:cNvPr id="3" name="Text 1"/>
+          <p:cNvSpPr/>
+          <p:nvPr/>
+        </p:nvSpPr>
+        <p:spPr>
+          <a:xfrm>
+            <a:off x="896112" y="457200"/>
+            <a:ext cx="9144000" cy="365760"/>
+          </a:xfrm>
+          <a:prstGeom prst="rect">
+            <a:avLst/>
+          </a:prstGeom>
+          <a:noFill/>
+          <a:ln/>
+        </p:spPr>
+        <p:txBody>
+          <a:bodyPr wrap="square" lIns="0" tIns="0" rIns="0" bIns="0" rtlCol="0" anchor="ctr"/>
+          <a:lstStyle/>
+          <a:p>
+            <a:pPr indent="0" marL="0">
+              <a:buNone/>
+            </a:pPr>
+            <a:r>
+              <a:rPr lang="en-US" sz="1200" b="1" spc="200" kern="0" dirty="0">
+                <a:solidFill>
+                  <a:srgbClr val="FF8A3D"/>
+                </a:solidFill>
+                <a:latin typeface="Calibri" pitchFamily="34" charset="0"/>
+                <a:ea typeface="Calibri" pitchFamily="34" charset="-122"/>
+                <a:cs typeface="Calibri" pitchFamily="34" charset="-120"/>
+              </a:rPr>
+              <a:t>WHY IT MATTERS</a:t>
+            </a:r>
+            <a:endParaRPr lang="en-US" sz="1200" dirty="0"/>
+          </a:p>
+        </p:txBody>
+      </p:sp>
+      <p:sp>
+        <p:nvSpPr>
+          <p:cNvPr id="4" name="Text 2"/>
+          <p:cNvSpPr/>
+          <p:nvPr/>
+        </p:nvSpPr>
+        <p:spPr>
+          <a:xfrm>
+            <a:off x="640080" y="841248"/>
+            <a:ext cx="10881360" cy="914400"/>
+          </a:xfrm>
+          <a:prstGeom prst="rect">
+            <a:avLst/>
+          </a:prstGeom>
+          <a:noFill/>
+          <a:ln/>
+        </p:spPr>
+        <p:txBody>
+          <a:bodyPr wrap="square" lIns="0" tIns="0" rIns="0" bIns="0" rtlCol="0" anchor="t"/>
+          <a:lstStyle/>
+          <a:p>
+            <a:pPr indent="0" marL="0">
+              <a:buNone/>
+            </a:pPr>
+            <a:r>
+              <a:rPr lang="en-US" sz="3200" b="1" dirty="0">
+                <a:solidFill>
+                  <a:srgbClr val="E9EEF3"/>
+                </a:solidFill>
+                <a:latin typeface="Cambria" pitchFamily="34" charset="0"/>
+                <a:ea typeface="Cambria" pitchFamily="34" charset="-122"/>
+                <a:cs typeface="Cambria" pitchFamily="34" charset="-120"/>
+              </a:rPr>
+              <a:t>Business impact</a:t>
+            </a:r>
+            <a:endParaRPr lang="en-US" sz="3200" dirty="0"/>
+          </a:p>
+        </p:txBody>
+      </p:sp>
+      <p:sp>
+        <p:nvSpPr>
+          <p:cNvPr id="5" name="Shape 3"/>
+          <p:cNvSpPr/>
+          <p:nvPr/>
+        </p:nvSpPr>
+        <p:spPr>
+          <a:xfrm>
+            <a:off x="640080" y="1828800"/>
+            <a:ext cx="5257800" cy="1755648"/>
+          </a:xfrm>
+          <a:prstGeom prst="roundRect">
+            <a:avLst>
+              <a:gd name="adj" fmla="val 4688"/>
+            </a:avLst>
+          </a:prstGeom>
+          <a:solidFill>
+            <a:srgbClr val="18232F"/>
+          </a:solidFill>
+          <a:ln w="12700">
+            <a:solidFill>
+              <a:srgbClr val="2A3745"/>
+            </a:solidFill>
+            <a:prstDash val="solid"/>
+          </a:ln>
+          <a:effectLst>
+            <a:outerShdw sx="100000" sy="100000" kx="0" ky="0" algn="bl" rotWithShape="0" blurRad="114300" dist="38100" dir="5400000">
+              <a:srgbClr val="000000">
+                <a:alpha val="28000"/>
+              </a:srgbClr>
+            </a:outerShdw>
+          </a:effectLst>
+        </p:spPr>
+      </p:sp>
+      <p:sp>
+        <p:nvSpPr>
+          <p:cNvPr id="6" name="Text 4"/>
+          <p:cNvSpPr/>
+          <p:nvPr/>
+        </p:nvSpPr>
+        <p:spPr>
+          <a:xfrm>
+            <a:off x="960120" y="2066544"/>
+            <a:ext cx="4617720" cy="502920"/>
+          </a:xfrm>
+          <a:prstGeom prst="rect">
+            <a:avLst/>
+          </a:prstGeom>
+          <a:noFill/>
+          <a:ln/>
+        </p:spPr>
+        <p:txBody>
+          <a:bodyPr wrap="square" lIns="0" tIns="0" rIns="0" bIns="0" rtlCol="0" anchor="ctr"/>
+          <a:lstStyle/>
+          <a:p>
+            <a:pPr indent="0" marL="0">
+              <a:buNone/>
+            </a:pPr>
+            <a:r>
+              <a:rPr lang="en-US" sz="2600" b="1" dirty="0">
+                <a:solidFill>
+                  <a:srgbClr val="FF8A3D"/>
+                </a:solidFill>
+                <a:latin typeface="Cambria" pitchFamily="34" charset="0"/>
+                <a:ea typeface="Cambria" pitchFamily="34" charset="-122"/>
+                <a:cs typeface="Cambria" pitchFamily="34" charset="-120"/>
+              </a:rPr>
+              <a:t>Days → seconds</a:t>
+            </a:r>
+            <a:endParaRPr lang="en-US" sz="2600" dirty="0"/>
+          </a:p>
+        </p:txBody>
+      </p:sp>
+      <p:sp>
+        <p:nvSpPr>
+          <p:cNvPr id="7" name="Text 5"/>
+          <p:cNvSpPr/>
+          <p:nvPr/>
+        </p:nvSpPr>
+        <p:spPr>
+          <a:xfrm>
+            <a:off x="960120" y="2578608"/>
+            <a:ext cx="4617720" cy="292608"/>
+          </a:xfrm>
+          <a:prstGeom prst="rect">
+            <a:avLst/>
+          </a:prstGeom>
+          <a:noFill/>
+          <a:ln/>
+        </p:spPr>
+        <p:txBody>
+          <a:bodyPr wrap="square" lIns="0" tIns="0" rIns="0" bIns="0" rtlCol="0" anchor="ctr"/>
+          <a:lstStyle/>
+          <a:p>
+            <a:pPr indent="0" marL="0">
+              <a:buNone/>
+            </a:pPr>
+            <a:r>
+              <a:rPr lang="en-US" sz="1200" b="1" spc="150" kern="0" dirty="0">
+                <a:solidFill>
+                  <a:srgbClr val="E9EEF3"/>
+                </a:solidFill>
+                <a:latin typeface="Calibri" pitchFamily="34" charset="0"/>
+                <a:ea typeface="Calibri" pitchFamily="34" charset="-122"/>
+                <a:cs typeface="Calibri" pitchFamily="34" charset="-120"/>
+              </a:rPr>
+              <a:t>TIME TO INSIGHT</a:t>
+            </a:r>
+            <a:endParaRPr lang="en-US" sz="1200" dirty="0"/>
+          </a:p>
+        </p:txBody>
+      </p:sp>
+      <p:sp>
+        <p:nvSpPr>
+          <p:cNvPr id="8" name="Text 6"/>
+          <p:cNvSpPr/>
+          <p:nvPr/>
+        </p:nvSpPr>
+        <p:spPr>
+          <a:xfrm>
+            <a:off x="960120" y="2871216"/>
+            <a:ext cx="4709160" cy="658368"/>
+          </a:xfrm>
+          <a:prstGeom prst="rect">
+            <a:avLst/>
+          </a:prstGeom>
+          <a:noFill/>
+          <a:ln/>
+        </p:spPr>
+        <p:txBody>
+          <a:bodyPr wrap="square" lIns="0" tIns="0" rIns="0" bIns="0" rtlCol="0" anchor="ctr"/>
+          <a:lstStyle/>
+          <a:p>
+            <a:pPr indent="0" marL="0">
+              <a:lnSpc>
+                <a:spcPct val="108000"/>
+              </a:lnSpc>
+              <a:buNone/>
+            </a:pPr>
+            <a:r>
+              <a:rPr lang="en-US" sz="1250" dirty="0">
+                <a:solidFill>
+                  <a:srgbClr val="93A1AF"/>
+                </a:solidFill>
+                <a:latin typeface="Calibri" pitchFamily="34" charset="0"/>
+                <a:ea typeface="Calibri" pitchFamily="34" charset="-122"/>
+                <a:cs typeface="Calibri" pitchFamily="34" charset="-120"/>
+              </a:rPr>
+              <a:t>A business owner asks in plain language and gets a governed answer immediately — no analyst ticket queue in between.</a:t>
+            </a:r>
+            <a:endParaRPr lang="en-US" sz="1250" dirty="0"/>
+          </a:p>
+        </p:txBody>
+      </p:sp>
+      <p:sp>
+        <p:nvSpPr>
+          <p:cNvPr id="9" name="Shape 7"/>
+          <p:cNvSpPr/>
+          <p:nvPr/>
+        </p:nvSpPr>
+        <p:spPr>
+          <a:xfrm>
+            <a:off x="6217920" y="1828800"/>
+            <a:ext cx="5257800" cy="1755648"/>
+          </a:xfrm>
+          <a:prstGeom prst="roundRect">
+            <a:avLst>
+              <a:gd name="adj" fmla="val 4688"/>
+            </a:avLst>
+          </a:prstGeom>
+          <a:solidFill>
+            <a:srgbClr val="18232F"/>
+          </a:solidFill>
+          <a:ln w="12700">
+            <a:solidFill>
+              <a:srgbClr val="2A3745"/>
+            </a:solidFill>
+            <a:prstDash val="solid"/>
+          </a:ln>
+          <a:effectLst>
+            <a:outerShdw sx="100000" sy="100000" kx="0" ky="0" algn="bl" rotWithShape="0" blurRad="114300" dist="38100" dir="5400000">
+              <a:srgbClr val="000000">
+                <a:alpha val="28000"/>
+              </a:srgbClr>
+            </a:outerShdw>
+          </a:effectLst>
+        </p:spPr>
+      </p:sp>
+      <p:sp>
+        <p:nvSpPr>
+          <p:cNvPr id="10" name="Text 8"/>
+          <p:cNvSpPr/>
+          <p:nvPr/>
+        </p:nvSpPr>
+        <p:spPr>
+          <a:xfrm>
+            <a:off x="6537960" y="2066544"/>
+            <a:ext cx="4617720" cy="502920"/>
+          </a:xfrm>
+          <a:prstGeom prst="rect">
+            <a:avLst/>
+          </a:prstGeom>
+          <a:noFill/>
+          <a:ln/>
+        </p:spPr>
+        <p:txBody>
+          <a:bodyPr wrap="square" lIns="0" tIns="0" rIns="0" bIns="0" rtlCol="0" anchor="ctr"/>
+          <a:lstStyle/>
+          <a:p>
+            <a:pPr indent="0" marL="0">
+              <a:buNone/>
+            </a:pPr>
+            <a:r>
+              <a:rPr lang="en-US" sz="2600" b="1" dirty="0">
+                <a:solidFill>
+                  <a:srgbClr val="FF8A3D"/>
+                </a:solidFill>
+                <a:latin typeface="Cambria" pitchFamily="34" charset="0"/>
+                <a:ea typeface="Cambria" pitchFamily="34" charset="-122"/>
+                <a:cs typeface="Cambria" pitchFamily="34" charset="-120"/>
+              </a:rPr>
+              <a:t>Unblocked</a:t>
+            </a:r>
+            <a:endParaRPr lang="en-US" sz="2600" dirty="0"/>
+          </a:p>
+        </p:txBody>
+      </p:sp>
+      <p:sp>
+        <p:nvSpPr>
+          <p:cNvPr id="11" name="Text 9"/>
+          <p:cNvSpPr/>
+          <p:nvPr/>
+        </p:nvSpPr>
+        <p:spPr>
+          <a:xfrm>
+            <a:off x="6537960" y="2578608"/>
+            <a:ext cx="4617720" cy="292608"/>
+          </a:xfrm>
+          <a:prstGeom prst="rect">
+            <a:avLst/>
+          </a:prstGeom>
+          <a:noFill/>
+          <a:ln/>
+        </p:spPr>
+        <p:txBody>
+          <a:bodyPr wrap="square" lIns="0" tIns="0" rIns="0" bIns="0" rtlCol="0" anchor="ctr"/>
+          <a:lstStyle/>
+          <a:p>
+            <a:pPr indent="0" marL="0">
+              <a:buNone/>
+            </a:pPr>
+            <a:r>
+              <a:rPr lang="en-US" sz="1200" b="1" spc="150" kern="0" dirty="0">
+                <a:solidFill>
+                  <a:srgbClr val="E9EEF3"/>
+                </a:solidFill>
+                <a:latin typeface="Calibri" pitchFamily="34" charset="0"/>
+                <a:ea typeface="Calibri" pitchFamily="34" charset="-122"/>
+                <a:cs typeface="Calibri" pitchFamily="34" charset="-120"/>
+              </a:rPr>
+              <a:t>AI ADOPTION</a:t>
+            </a:r>
+            <a:endParaRPr lang="en-US" sz="1200" dirty="0"/>
+          </a:p>
+        </p:txBody>
+      </p:sp>
+      <p:sp>
+        <p:nvSpPr>
+          <p:cNvPr id="12" name="Text 10"/>
+          <p:cNvSpPr/>
+          <p:nvPr/>
+        </p:nvSpPr>
+        <p:spPr>
+          <a:xfrm>
+            <a:off x="6537960" y="2871216"/>
+            <a:ext cx="4709160" cy="658368"/>
+          </a:xfrm>
+          <a:prstGeom prst="rect">
+            <a:avLst/>
+          </a:prstGeom>
+          <a:noFill/>
+          <a:ln/>
+        </p:spPr>
+        <p:txBody>
+          <a:bodyPr wrap="square" lIns="0" tIns="0" rIns="0" bIns="0" rtlCol="0" anchor="ctr"/>
+          <a:lstStyle/>
+          <a:p>
+            <a:pPr indent="0" marL="0">
+              <a:lnSpc>
+                <a:spcPct val="108000"/>
+              </a:lnSpc>
+              <a:buNone/>
+            </a:pPr>
+            <a:r>
+              <a:rPr lang="en-US" sz="1250" dirty="0">
+                <a:solidFill>
+                  <a:srgbClr val="93A1AF"/>
+                </a:solidFill>
+                <a:latin typeface="Calibri" pitchFamily="34" charset="0"/>
+                <a:ea typeface="Calibri" pitchFamily="34" charset="-122"/>
+                <a:cs typeface="Calibri" pitchFamily="34" charset="-120"/>
+              </a:rPr>
+              <a:t>Risk stops being open-ended. Security reviews a bounded allowlist instead of debating 'the model can see everything.'</a:t>
+            </a:r>
+            <a:endParaRPr lang="en-US" sz="1250" dirty="0"/>
+          </a:p>
+        </p:txBody>
+      </p:sp>
+      <p:sp>
+        <p:nvSpPr>
+          <p:cNvPr id="13" name="Shape 11"/>
+          <p:cNvSpPr/>
+          <p:nvPr/>
+        </p:nvSpPr>
+        <p:spPr>
+          <a:xfrm>
+            <a:off x="640080" y="3858768"/>
+            <a:ext cx="5257800" cy="1755648"/>
+          </a:xfrm>
+          <a:prstGeom prst="roundRect">
+            <a:avLst>
+              <a:gd name="adj" fmla="val 4688"/>
+            </a:avLst>
+          </a:prstGeom>
+          <a:solidFill>
+            <a:srgbClr val="18232F"/>
+          </a:solidFill>
+          <a:ln w="12700">
+            <a:solidFill>
+              <a:srgbClr val="2A3745"/>
+            </a:solidFill>
+            <a:prstDash val="solid"/>
+          </a:ln>
+          <a:effectLst>
+            <a:outerShdw sx="100000" sy="100000" kx="0" ky="0" algn="bl" rotWithShape="0" blurRad="114300" dist="38100" dir="5400000">
+              <a:srgbClr val="000000">
+                <a:alpha val="28000"/>
+              </a:srgbClr>
+            </a:outerShdw>
+          </a:effectLst>
+        </p:spPr>
+      </p:sp>
+      <p:sp>
+        <p:nvSpPr>
+          <p:cNvPr id="14" name="Text 12"/>
+          <p:cNvSpPr/>
+          <p:nvPr/>
+        </p:nvSpPr>
+        <p:spPr>
+          <a:xfrm>
+            <a:off x="960120" y="4096512"/>
+            <a:ext cx="4617720" cy="502920"/>
+          </a:xfrm>
+          <a:prstGeom prst="rect">
+            <a:avLst/>
+          </a:prstGeom>
+          <a:noFill/>
+          <a:ln/>
+        </p:spPr>
+        <p:txBody>
+          <a:bodyPr wrap="square" lIns="0" tIns="0" rIns="0" bIns="0" rtlCol="0" anchor="ctr"/>
+          <a:lstStyle/>
+          <a:p>
+            <a:pPr indent="0" marL="0">
+              <a:buNone/>
+            </a:pPr>
+            <a:r>
+              <a:rPr lang="en-US" sz="2600" b="1" dirty="0">
+                <a:solidFill>
+                  <a:srgbClr val="FF8A3D"/>
+                </a:solidFill>
+                <a:latin typeface="Cambria" pitchFamily="34" charset="0"/>
+                <a:ea typeface="Cambria" pitchFamily="34" charset="-122"/>
+                <a:cs typeface="Cambria" pitchFamily="34" charset="-120"/>
+              </a:rPr>
+              <a:t>Provable</a:t>
+            </a:r>
+            <a:endParaRPr lang="en-US" sz="2600" dirty="0"/>
+          </a:p>
+        </p:txBody>
+      </p:sp>
+      <p:sp>
+        <p:nvSpPr>
+          <p:cNvPr id="15" name="Text 13"/>
+          <p:cNvSpPr/>
+          <p:nvPr/>
+        </p:nvSpPr>
+        <p:spPr>
+          <a:xfrm>
+            <a:off x="960120" y="4608576"/>
+            <a:ext cx="4617720" cy="292608"/>
+          </a:xfrm>
+          <a:prstGeom prst="rect">
+            <a:avLst/>
+          </a:prstGeom>
+          <a:noFill/>
+          <a:ln/>
+        </p:spPr>
+        <p:txBody>
+          <a:bodyPr wrap="square" lIns="0" tIns="0" rIns="0" bIns="0" rtlCol="0" anchor="ctr"/>
+          <a:lstStyle/>
+          <a:p>
+            <a:pPr indent="0" marL="0">
+              <a:buNone/>
+            </a:pPr>
+            <a:r>
+              <a:rPr lang="en-US" sz="1200" b="1" spc="150" kern="0" dirty="0">
+                <a:solidFill>
+                  <a:srgbClr val="E9EEF3"/>
+                </a:solidFill>
+                <a:latin typeface="Calibri" pitchFamily="34" charset="0"/>
+                <a:ea typeface="Calibri" pitchFamily="34" charset="-122"/>
+                <a:cs typeface="Calibri" pitchFamily="34" charset="-120"/>
+              </a:rPr>
+              <a:t>COMPLIANCE POSTURE</a:t>
+            </a:r>
+            <a:endParaRPr lang="en-US" sz="1200" dirty="0"/>
+          </a:p>
+        </p:txBody>
+      </p:sp>
+      <p:sp>
+        <p:nvSpPr>
+          <p:cNvPr id="16" name="Text 14"/>
+          <p:cNvSpPr/>
+          <p:nvPr/>
+        </p:nvSpPr>
+        <p:spPr>
+          <a:xfrm>
+            <a:off x="960120" y="4901184"/>
+            <a:ext cx="4709160" cy="658368"/>
+          </a:xfrm>
+          <a:prstGeom prst="rect">
+            <a:avLst/>
+          </a:prstGeom>
+          <a:noFill/>
+          <a:ln/>
+        </p:spPr>
+        <p:txBody>
+          <a:bodyPr wrap="square" lIns="0" tIns="0" rIns="0" bIns="0" rtlCol="0" anchor="ctr"/>
+          <a:lstStyle/>
+          <a:p>
+            <a:pPr indent="0" marL="0">
+              <a:lnSpc>
+                <a:spcPct val="108000"/>
+              </a:lnSpc>
+              <a:buNone/>
+            </a:pPr>
+            <a:r>
+              <a:rPr lang="en-US" sz="1250" dirty="0">
+                <a:solidFill>
+                  <a:srgbClr val="93A1AF"/>
+                </a:solidFill>
+                <a:latin typeface="Calibri" pitchFamily="34" charset="0"/>
+                <a:ea typeface="Calibri" pitchFamily="34" charset="-122"/>
+                <a:cs typeface="Calibri" pitchFamily="34" charset="-120"/>
+              </a:rPr>
+              <a:t>PII hashed at ingestion, no raw-row exfiltration, per-action audit trail — controls you can demonstrate, not just promise.</a:t>
+            </a:r>
+            <a:endParaRPr lang="en-US" sz="1250" dirty="0"/>
+          </a:p>
+        </p:txBody>
+      </p:sp>
+      <p:sp>
+        <p:nvSpPr>
+          <p:cNvPr id="17" name="Shape 15"/>
+          <p:cNvSpPr/>
+          <p:nvPr/>
+        </p:nvSpPr>
+        <p:spPr>
+          <a:xfrm>
+            <a:off x="6217920" y="3858768"/>
+            <a:ext cx="5257800" cy="1755648"/>
+          </a:xfrm>
+          <a:prstGeom prst="roundRect">
+            <a:avLst>
+              <a:gd name="adj" fmla="val 4688"/>
+            </a:avLst>
+          </a:prstGeom>
+          <a:solidFill>
+            <a:srgbClr val="18232F"/>
+          </a:solidFill>
+          <a:ln w="12700">
+            <a:solidFill>
+              <a:srgbClr val="2A3745"/>
+            </a:solidFill>
+            <a:prstDash val="solid"/>
+          </a:ln>
+          <a:effectLst>
+            <a:outerShdw sx="100000" sy="100000" kx="0" ky="0" algn="bl" rotWithShape="0" blurRad="114300" dist="38100" dir="5400000">
+              <a:srgbClr val="000000">
+                <a:alpha val="28000"/>
+              </a:srgbClr>
+            </a:outerShdw>
+          </a:effectLst>
+        </p:spPr>
+      </p:sp>
+      <p:sp>
+        <p:nvSpPr>
+          <p:cNvPr id="18" name="Text 16"/>
+          <p:cNvSpPr/>
+          <p:nvPr/>
+        </p:nvSpPr>
+        <p:spPr>
+          <a:xfrm>
+            <a:off x="6537960" y="4096512"/>
+            <a:ext cx="4617720" cy="502920"/>
+          </a:xfrm>
+          <a:prstGeom prst="rect">
+            <a:avLst/>
+          </a:prstGeom>
+          <a:noFill/>
+          <a:ln/>
+        </p:spPr>
+        <p:txBody>
+          <a:bodyPr wrap="square" lIns="0" tIns="0" rIns="0" bIns="0" rtlCol="0" anchor="ctr"/>
+          <a:lstStyle/>
+          <a:p>
+            <a:pPr indent="0" marL="0">
+              <a:buNone/>
+            </a:pPr>
+            <a:r>
+              <a:rPr lang="en-US" sz="2600" b="1" dirty="0">
+                <a:solidFill>
+                  <a:srgbClr val="FF8A3D"/>
+                </a:solidFill>
+                <a:latin typeface="Cambria" pitchFamily="34" charset="0"/>
+                <a:ea typeface="Cambria" pitchFamily="34" charset="-122"/>
+                <a:cs typeface="Cambria" pitchFamily="34" charset="-120"/>
+              </a:rPr>
+              <a:t>Bounded</a:t>
+            </a:r>
+            <a:endParaRPr lang="en-US" sz="2600" dirty="0"/>
+          </a:p>
+        </p:txBody>
+      </p:sp>
+      <p:sp>
+        <p:nvSpPr>
+          <p:cNvPr id="19" name="Text 17"/>
+          <p:cNvSpPr/>
+          <p:nvPr/>
+        </p:nvSpPr>
+        <p:spPr>
+          <a:xfrm>
+            <a:off x="6537960" y="4608576"/>
+            <a:ext cx="4617720" cy="292608"/>
+          </a:xfrm>
+          <a:prstGeom prst="rect">
+            <a:avLst/>
+          </a:prstGeom>
+          <a:noFill/>
+          <a:ln/>
+        </p:spPr>
+        <p:txBody>
+          <a:bodyPr wrap="square" lIns="0" tIns="0" rIns="0" bIns="0" rtlCol="0" anchor="ctr"/>
+          <a:lstStyle/>
+          <a:p>
+            <a:pPr indent="0" marL="0">
+              <a:buNone/>
+            </a:pPr>
+            <a:r>
+              <a:rPr lang="en-US" sz="1200" b="1" spc="150" kern="0" dirty="0">
+                <a:solidFill>
+                  <a:srgbClr val="E9EEF3"/>
+                </a:solidFill>
+                <a:latin typeface="Calibri" pitchFamily="34" charset="0"/>
+                <a:ea typeface="Calibri" pitchFamily="34" charset="-122"/>
+                <a:cs typeface="Calibri" pitchFamily="34" charset="-120"/>
+              </a:rPr>
+              <a:t>TOTAL COST OF OWNERSHIP</a:t>
+            </a:r>
+            <a:endParaRPr lang="en-US" sz="1200" dirty="0"/>
+          </a:p>
+        </p:txBody>
+      </p:sp>
+      <p:sp>
+        <p:nvSpPr>
+          <p:cNvPr id="20" name="Text 18"/>
+          <p:cNvSpPr/>
+          <p:nvPr/>
+        </p:nvSpPr>
+        <p:spPr>
+          <a:xfrm>
+            <a:off x="6537960" y="4901184"/>
+            <a:ext cx="4709160" cy="658368"/>
+          </a:xfrm>
+          <a:prstGeom prst="rect">
+            <a:avLst/>
+          </a:prstGeom>
+          <a:noFill/>
+          <a:ln/>
+        </p:spPr>
+        <p:txBody>
+          <a:bodyPr wrap="square" lIns="0" tIns="0" rIns="0" bIns="0" rtlCol="0" anchor="ctr"/>
+          <a:lstStyle/>
+          <a:p>
+            <a:pPr indent="0" marL="0">
+              <a:lnSpc>
+                <a:spcPct val="108000"/>
+              </a:lnSpc>
+              <a:buNone/>
+            </a:pPr>
+            <a:r>
+              <a:rPr lang="en-US" sz="1250" dirty="0">
+                <a:solidFill>
+                  <a:srgbClr val="93A1AF"/>
+                </a:solidFill>
+                <a:latin typeface="Calibri" pitchFamily="34" charset="0"/>
+                <a:ea typeface="Calibri" pitchFamily="34" charset="-122"/>
+                <a:cs typeface="Calibri" pitchFamily="34" charset="-120"/>
+              </a:rPr>
+              <a:t>No egress, no duplicate copies, no third-party inference on proprietary data. Cost scales with data scanned, not data stored.</a:t>
+            </a:r>
+            <a:endParaRPr lang="en-US" sz="1250" dirty="0"/>
+          </a:p>
+        </p:txBody>
+      </p:sp>
+      <p:sp>
+        <p:nvSpPr>
+          <p:cNvPr id="21" name="Text 19"/>
+          <p:cNvSpPr/>
+          <p:nvPr/>
+        </p:nvSpPr>
+        <p:spPr>
+          <a:xfrm>
+            <a:off x="11277295" y="6400800"/>
+            <a:ext cx="548640" cy="274320"/>
+          </a:xfrm>
+          <a:prstGeom prst="rect">
+            <a:avLst/>
+          </a:prstGeom>
+          <a:noFill/>
+          <a:ln/>
+        </p:spPr>
+        <p:txBody>
+          <a:bodyPr wrap="square" lIns="0" tIns="0" rIns="0" bIns="0" rtlCol="0" anchor="ctr"/>
+          <a:lstStyle/>
+          <a:p>
+            <a:pPr algn="r" indent="0" marL="0">
+              <a:buNone/>
+            </a:pPr>
+            <a:r>
+              <a:rPr lang="en-US" sz="1000" dirty="0">
+                <a:solidFill>
+                  <a:srgbClr val="6C7C8A"/>
+                </a:solidFill>
+                <a:latin typeface="Calibri" pitchFamily="34" charset="0"/>
+                <a:ea typeface="Calibri" pitchFamily="34" charset="-122"/>
+                <a:cs typeface="Calibri" pitchFamily="34" charset="-120"/>
+              </a:rPr>
+              <a:t>10</a:t>
+            </a:r>
+            <a:endParaRPr lang="en-US" sz="1000" dirty="0"/>
+          </a:p>
+        </p:txBody>
+      </p:sp>
+      <p:sp>
+        <p:nvSpPr>
+          <p:cNvPr id="22" name="Text 20"/>
+          <p:cNvSpPr/>
+          <p:nvPr/>
+        </p:nvSpPr>
+        <p:spPr>
+          <a:xfrm>
+            <a:off x="640080" y="6400800"/>
+            <a:ext cx="3657600" cy="274320"/>
+          </a:xfrm>
+          <a:prstGeom prst="rect">
+            <a:avLst/>
+          </a:prstGeom>
+          <a:noFill/>
+          <a:ln/>
+        </p:spPr>
+        <p:txBody>
+          <a:bodyPr wrap="square" lIns="0" tIns="0" rIns="0" bIns="0" rtlCol="0" anchor="ctr"/>
+          <a:lstStyle/>
+          <a:p>
+            <a:pPr indent="0" marL="0">
+              <a:buNone/>
+            </a:pPr>
+            <a:r>
+              <a:rPr lang="en-US" sz="1000" dirty="0">
+                <a:solidFill>
+                  <a:srgbClr val="6C7C8A"/>
+                </a:solidFill>
+                <a:latin typeface="Calibri" pitchFamily="34" charset="0"/>
+                <a:ea typeface="Calibri" pitchFamily="34" charset="-122"/>
+                <a:cs typeface="Calibri" pitchFamily="34" charset="-120"/>
+              </a:rPr>
+              <a:t>IntelligenceStack</a:t>
+            </a:r>
+            <a:endParaRPr lang="en-US" sz="1000" dirty="0"/>
+          </a:p>
+        </p:txBody>
+      </p:sp>
+    </p:spTree>
+  </p:cSld>
+  <p:clrMapOvr>
+    <a:masterClrMapping/>
+  </p:clrMapOvr>
+</p:sld>
+</file>
+
+<file path=ppt/slides/slide11.xml><?xml version="1.0" encoding="utf-8"?>
+<p:sld xmlns:a="http://schemas.openxmlformats.org/drawingml/2006/main" xmlns:r="http://schemas.openxmlformats.org/officeDocument/2006/relationships" xmlns:p="http://schemas.openxmlformats.org/presentationml/2006/main">
+  <p:cSld name="Slide 11">
+    <p:bg>
+      <p:bgPr>
+        <a:solidFill>
           <a:srgbClr val="0B121B"/>
         </a:solidFill>
       </p:bgPr>
@@ -2274,7 +3189,7 @@
           <a:bodyPr wrap="square" lIns="0" tIns="0" rIns="0" bIns="0" rtlCol="0" anchor="ctr"/>
           <a:lstStyle/>
           <a:p>
-            <a:pPr algn="l" indent="0" marL="0">
+            <a:pPr indent="0" marL="0">
               <a:buNone/>
             </a:pPr>
             <a:r>
@@ -2313,7 +3228,7 @@
           <a:bodyPr wrap="square" lIns="0" tIns="0" rIns="0" bIns="0" rtlCol="0" anchor="t"/>
           <a:lstStyle/>
           <a:p>
-            <a:pPr algn="l" indent="0" marL="0">
+            <a:pPr indent="0" marL="0">
               <a:buNone/>
             </a:pPr>
             <a:r>
@@ -3164,7 +4079,7 @@
                 <a:ea typeface="Calibri" pitchFamily="34" charset="-122"/>
                 <a:cs typeface="Calibri" pitchFamily="34" charset="-120"/>
               </a:rPr>
-              <a:t>10</a:t>
+              <a:t>11</a:t>
             </a:r>
             <a:endParaRPr lang="en-US" sz="1000" dirty="0"/>
           </a:p>
@@ -3191,7 +4106,7 @@
           <a:bodyPr wrap="square" lIns="0" tIns="0" rIns="0" bIns="0" rtlCol="0" anchor="ctr"/>
           <a:lstStyle/>
           <a:p>
-            <a:pPr algn="l" indent="0" marL="0">
+            <a:pPr indent="0" marL="0">
               <a:buNone/>
             </a:pPr>
             <a:r>
@@ -3217,9 +4132,9 @@
 </p:sld>
 </file>
 
-<file path=ppt/slides/slide11.xml><?xml version="1.0" encoding="utf-8"?>
+<file path=ppt/slides/slide12.xml><?xml version="1.0" encoding="utf-8"?>
 <p:sld xmlns:a="http://schemas.openxmlformats.org/drawingml/2006/main" xmlns:r="http://schemas.openxmlformats.org/officeDocument/2006/relationships" xmlns:p="http://schemas.openxmlformats.org/presentationml/2006/main">
-  <p:cSld name="Slide 11">
+  <p:cSld name="Slide 12">
     <p:bg>
       <p:bgPr>
         <a:solidFill>
@@ -3282,7 +4197,7 @@
           <a:bodyPr wrap="square" lIns="0" tIns="0" rIns="0" bIns="0" rtlCol="0" anchor="ctr"/>
           <a:lstStyle/>
           <a:p>
-            <a:pPr algn="l" indent="0" marL="0">
+            <a:pPr indent="0" marL="0">
               <a:buNone/>
             </a:pPr>
             <a:r>
@@ -3321,7 +4236,7 @@
           <a:bodyPr wrap="square" lIns="0" tIns="0" rIns="0" bIns="0" rtlCol="0" anchor="t"/>
           <a:lstStyle/>
           <a:p>
-            <a:pPr algn="l" indent="0" marL="0">
+            <a:pPr indent="0" marL="0">
               <a:buNone/>
             </a:pPr>
             <a:r>
@@ -3389,7 +4304,7 @@
         </p:nvSpPr>
         <p:spPr>
           <a:xfrm>
-            <a:off x="777240" y="2587752"/>
+            <a:off x="777240" y="2404872"/>
             <a:ext cx="4480560" cy="320040"/>
           </a:xfrm>
           <a:prstGeom prst="rect">
@@ -3428,7 +4343,7 @@
         </p:nvSpPr>
         <p:spPr>
           <a:xfrm>
-            <a:off x="5623560" y="2587752"/>
+            <a:off x="5623560" y="2404872"/>
             <a:ext cx="6080760" cy="320040"/>
           </a:xfrm>
           <a:prstGeom prst="rect">
@@ -3467,12 +4382,12 @@
         </p:nvSpPr>
         <p:spPr>
           <a:xfrm>
-            <a:off x="640080" y="2971800"/>
-            <a:ext cx="4480560" cy="603504"/>
+            <a:off x="640080" y="2788920"/>
+            <a:ext cx="4480560" cy="566928"/>
           </a:xfrm>
           <a:prstGeom prst="roundRect">
             <a:avLst>
-              <a:gd name="adj" fmla="val 13636"/>
+              <a:gd name="adj" fmla="val 14516"/>
             </a:avLst>
           </a:prstGeom>
           <a:solidFill>
@@ -3501,24 +4416,24 @@
         </p:nvSpPr>
         <p:spPr>
           <a:xfrm>
-            <a:off x="914400" y="2971800"/>
-            <a:ext cx="4023360" cy="603504"/>
-          </a:xfrm>
-          <a:prstGeom prst="rect">
-            <a:avLst/>
-          </a:prstGeom>
-          <a:noFill/>
-          <a:ln/>
-        </p:spPr>
-        <p:txBody>
-          <a:bodyPr wrap="square" lIns="0" tIns="0" rIns="0" bIns="0" rtlCol="0" anchor="ctr"/>
-          <a:lstStyle/>
-          <a:p>
-            <a:pPr indent="0" marL="0">
-              <a:buNone/>
-            </a:pPr>
-            <a:r>
-              <a:rPr lang="en-US" sz="1350" dirty="0">
+            <a:off x="914400" y="2788920"/>
+            <a:ext cx="4023360" cy="566928"/>
+          </a:xfrm>
+          <a:prstGeom prst="rect">
+            <a:avLst/>
+          </a:prstGeom>
+          <a:noFill/>
+          <a:ln/>
+        </p:spPr>
+        <p:txBody>
+          <a:bodyPr wrap="square" lIns="0" tIns="0" rIns="0" bIns="0" rtlCol="0" anchor="ctr"/>
+          <a:lstStyle/>
+          <a:p>
+            <a:pPr indent="0" marL="0">
+              <a:buNone/>
+            </a:pPr>
+            <a:r>
+              <a:rPr lang="en-US" sz="1300" dirty="0">
                 <a:solidFill>
                   <a:srgbClr val="E9EEF3"/>
                 </a:solidFill>
@@ -3528,7 +4443,7 @@
               </a:rPr>
               <a:t>DuckDB medallion engine</a:t>
             </a:r>
-            <a:endParaRPr lang="en-US" sz="1350" dirty="0"/>
+            <a:endParaRPr lang="en-US" sz="1300" dirty="0"/>
           </a:p>
         </p:txBody>
       </p:sp>
@@ -3540,8 +4455,8 @@
         </p:nvSpPr>
         <p:spPr>
           <a:xfrm>
-            <a:off x="5175504" y="3172968"/>
-            <a:ext cx="256032" cy="201168"/>
+            <a:off x="5175504" y="2980944"/>
+            <a:ext cx="256032" cy="182880"/>
           </a:xfrm>
           <a:prstGeom prst="rightArrow">
             <a:avLst/>
@@ -3560,12 +4475,12 @@
         </p:nvSpPr>
         <p:spPr>
           <a:xfrm>
-            <a:off x="5486400" y="2971800"/>
-            <a:ext cx="6080760" cy="603504"/>
+            <a:off x="5486400" y="2788920"/>
+            <a:ext cx="6080760" cy="566928"/>
           </a:xfrm>
           <a:prstGeom prst="roundRect">
             <a:avLst>
-              <a:gd name="adj" fmla="val 13636"/>
+              <a:gd name="adj" fmla="val 14516"/>
             </a:avLst>
           </a:prstGeom>
           <a:solidFill>
@@ -3594,24 +4509,24 @@
         </p:nvSpPr>
         <p:spPr>
           <a:xfrm>
-            <a:off x="5760720" y="2971800"/>
-            <a:ext cx="5623560" cy="603504"/>
-          </a:xfrm>
-          <a:prstGeom prst="rect">
-            <a:avLst/>
-          </a:prstGeom>
-          <a:noFill/>
-          <a:ln/>
-        </p:spPr>
-        <p:txBody>
-          <a:bodyPr wrap="square" lIns="0" tIns="0" rIns="0" bIns="0" rtlCol="0" anchor="ctr"/>
-          <a:lstStyle/>
-          <a:p>
-            <a:pPr indent="0" marL="0">
-              <a:buNone/>
-            </a:pPr>
-            <a:r>
-              <a:rPr lang="en-US" sz="1350" dirty="0">
+            <a:off x="5760720" y="2788920"/>
+            <a:ext cx="5623560" cy="566928"/>
+          </a:xfrm>
+          <a:prstGeom prst="rect">
+            <a:avLst/>
+          </a:prstGeom>
+          <a:noFill/>
+          <a:ln/>
+        </p:spPr>
+        <p:txBody>
+          <a:bodyPr wrap="square" lIns="0" tIns="0" rIns="0" bIns="0" rtlCol="0" anchor="ctr"/>
+          <a:lstStyle/>
+          <a:p>
+            <a:pPr indent="0" marL="0">
+              <a:buNone/>
+            </a:pPr>
+            <a:r>
+              <a:rPr lang="en-US" sz="1300" dirty="0">
                 <a:solidFill>
                   <a:srgbClr val="E9EEF3"/>
                 </a:solidFill>
@@ -3621,7 +4536,7 @@
               </a:rPr>
               <a:t>Serverless SQL Warehouse over Delta + Unity Catalog</a:t>
             </a:r>
-            <a:endParaRPr lang="en-US" sz="1350" dirty="0"/>
+            <a:endParaRPr lang="en-US" sz="1300" dirty="0"/>
           </a:p>
         </p:txBody>
       </p:sp>
@@ -3633,12 +4548,12 @@
         </p:nvSpPr>
         <p:spPr>
           <a:xfrm>
-            <a:off x="640080" y="3685032"/>
-            <a:ext cx="4480560" cy="603504"/>
+            <a:off x="640080" y="3447288"/>
+            <a:ext cx="4480560" cy="566928"/>
           </a:xfrm>
           <a:prstGeom prst="roundRect">
             <a:avLst>
-              <a:gd name="adj" fmla="val 13636"/>
+              <a:gd name="adj" fmla="val 14516"/>
             </a:avLst>
           </a:prstGeom>
           <a:solidFill>
@@ -3667,24 +4582,24 @@
         </p:nvSpPr>
         <p:spPr>
           <a:xfrm>
-            <a:off x="914400" y="3685032"/>
-            <a:ext cx="4023360" cy="603504"/>
-          </a:xfrm>
-          <a:prstGeom prst="rect">
-            <a:avLst/>
-          </a:prstGeom>
-          <a:noFill/>
-          <a:ln/>
-        </p:spPr>
-        <p:txBody>
-          <a:bodyPr wrap="square" lIns="0" tIns="0" rIns="0" bIns="0" rtlCol="0" anchor="ctr"/>
-          <a:lstStyle/>
-          <a:p>
-            <a:pPr indent="0" marL="0">
-              <a:buNone/>
-            </a:pPr>
-            <a:r>
-              <a:rPr lang="en-US" sz="1350" dirty="0">
+            <a:off x="914400" y="3447288"/>
+            <a:ext cx="4023360" cy="566928"/>
+          </a:xfrm>
+          <a:prstGeom prst="rect">
+            <a:avLst/>
+          </a:prstGeom>
+          <a:noFill/>
+          <a:ln/>
+        </p:spPr>
+        <p:txBody>
+          <a:bodyPr wrap="square" lIns="0" tIns="0" rIns="0" bIns="0" rtlCol="0" anchor="ctr"/>
+          <a:lstStyle/>
+          <a:p>
+            <a:pPr indent="0" marL="0">
+              <a:buNone/>
+            </a:pPr>
+            <a:r>
+              <a:rPr lang="en-US" sz="1300" dirty="0">
                 <a:solidFill>
                   <a:srgbClr val="E9EEF3"/>
                 </a:solidFill>
@@ -3692,9 +4607,9 @@
                 <a:ea typeface="Calibri" pitchFamily="34" charset="-122"/>
                 <a:cs typeface="Calibri" pitchFamily="34" charset="-120"/>
               </a:rPr>
-              <a:t>In-code governance allowlist</a:t>
-            </a:r>
-            <a:endParaRPr lang="en-US" sz="1350" dirty="0"/>
+              <a:t>TF-IDF vector index</a:t>
+            </a:r>
+            <a:endParaRPr lang="en-US" sz="1300" dirty="0"/>
           </a:p>
         </p:txBody>
       </p:sp>
@@ -3706,8 +4621,8 @@
         </p:nvSpPr>
         <p:spPr>
           <a:xfrm>
-            <a:off x="5175504" y="3886200"/>
-            <a:ext cx="256032" cy="201168"/>
+            <a:off x="5175504" y="3639312"/>
+            <a:ext cx="256032" cy="182880"/>
           </a:xfrm>
           <a:prstGeom prst="rightArrow">
             <a:avLst/>
@@ -3726,12 +4641,12 @@
         </p:nvSpPr>
         <p:spPr>
           <a:xfrm>
-            <a:off x="5486400" y="3685032"/>
-            <a:ext cx="6080760" cy="603504"/>
+            <a:off x="5486400" y="3447288"/>
+            <a:ext cx="6080760" cy="566928"/>
           </a:xfrm>
           <a:prstGeom prst="roundRect">
             <a:avLst>
-              <a:gd name="adj" fmla="val 13636"/>
+              <a:gd name="adj" fmla="val 14516"/>
             </a:avLst>
           </a:prstGeom>
           <a:solidFill>
@@ -3760,24 +4675,24 @@
         </p:nvSpPr>
         <p:spPr>
           <a:xfrm>
-            <a:off x="5760720" y="3685032"/>
-            <a:ext cx="5623560" cy="603504"/>
-          </a:xfrm>
-          <a:prstGeom prst="rect">
-            <a:avLst/>
-          </a:prstGeom>
-          <a:noFill/>
-          <a:ln/>
-        </p:spPr>
-        <p:txBody>
-          <a:bodyPr wrap="square" lIns="0" tIns="0" rIns="0" bIns="0" rtlCol="0" anchor="ctr"/>
-          <a:lstStyle/>
-          <a:p>
-            <a:pPr indent="0" marL="0">
-              <a:buNone/>
-            </a:pPr>
-            <a:r>
-              <a:rPr lang="en-US" sz="1350" dirty="0">
+            <a:off x="5760720" y="3447288"/>
+            <a:ext cx="5623560" cy="566928"/>
+          </a:xfrm>
+          <a:prstGeom prst="rect">
+            <a:avLst/>
+          </a:prstGeom>
+          <a:noFill/>
+          <a:ln/>
+        </p:spPr>
+        <p:txBody>
+          <a:bodyPr wrap="square" lIns="0" tIns="0" rIns="0" bIns="0" rtlCol="0" anchor="ctr"/>
+          <a:lstStyle/>
+          <a:p>
+            <a:pPr indent="0" marL="0">
+              <a:buNone/>
+            </a:pPr>
+            <a:r>
+              <a:rPr lang="en-US" sz="1300" dirty="0">
                 <a:solidFill>
                   <a:srgbClr val="E9EEF3"/>
                 </a:solidFill>
@@ -3785,9 +4700,9 @@
                 <a:ea typeface="Calibri" pitchFamily="34" charset="-122"/>
                 <a:cs typeface="Calibri" pitchFamily="34" charset="-120"/>
               </a:rPr>
-              <a:t>GRANT EXECUTE ON FUNCTION + row/column-level security</a:t>
-            </a:r>
-            <a:endParaRPr lang="en-US" sz="1350" dirty="0"/>
+              <a:t>Mosaic AI Vector Search (bge-large embeddings)</a:t>
+            </a:r>
+            <a:endParaRPr lang="en-US" sz="1300" dirty="0"/>
           </a:p>
         </p:txBody>
       </p:sp>
@@ -3799,12 +4714,12 @@
         </p:nvSpPr>
         <p:spPr>
           <a:xfrm>
-            <a:off x="640080" y="4398264"/>
-            <a:ext cx="4480560" cy="603504"/>
+            <a:off x="640080" y="4105656"/>
+            <a:ext cx="4480560" cy="566928"/>
           </a:xfrm>
           <a:prstGeom prst="roundRect">
             <a:avLst>
-              <a:gd name="adj" fmla="val 13636"/>
+              <a:gd name="adj" fmla="val 14516"/>
             </a:avLst>
           </a:prstGeom>
           <a:solidFill>
@@ -3833,24 +4748,24 @@
         </p:nvSpPr>
         <p:spPr>
           <a:xfrm>
-            <a:off x="914400" y="4398264"/>
-            <a:ext cx="4023360" cy="603504"/>
-          </a:xfrm>
-          <a:prstGeom prst="rect">
-            <a:avLst/>
-          </a:prstGeom>
-          <a:noFill/>
-          <a:ln/>
-        </p:spPr>
-        <p:txBody>
-          <a:bodyPr wrap="square" lIns="0" tIns="0" rIns="0" bIns="0" rtlCol="0" anchor="ctr"/>
-          <a:lstStyle/>
-          <a:p>
-            <a:pPr indent="0" marL="0">
-              <a:buNone/>
-            </a:pPr>
-            <a:r>
-              <a:rPr lang="en-US" sz="1350" dirty="0">
+            <a:off x="914400" y="4105656"/>
+            <a:ext cx="4023360" cy="566928"/>
+          </a:xfrm>
+          <a:prstGeom prst="rect">
+            <a:avLst/>
+          </a:prstGeom>
+          <a:noFill/>
+          <a:ln/>
+        </p:spPr>
+        <p:txBody>
+          <a:bodyPr wrap="square" lIns="0" tIns="0" rIns="0" bIns="0" rtlCol="0" anchor="ctr"/>
+          <a:lstStyle/>
+          <a:p>
+            <a:pPr indent="0" marL="0">
+              <a:buNone/>
+            </a:pPr>
+            <a:r>
+              <a:rPr lang="en-US" sz="1300" dirty="0">
                 <a:solidFill>
                   <a:srgbClr val="E9EEF3"/>
                 </a:solidFill>
@@ -3858,9 +4773,9 @@
                 <a:ea typeface="Calibri" pitchFamily="34" charset="-122"/>
                 <a:cs typeface="Calibri" pitchFamily="34" charset="-120"/>
               </a:rPr>
-              <a:t>Local deterministic planner</a:t>
-            </a:r>
-            <a:endParaRPr lang="en-US" sz="1350" dirty="0"/>
+              <a:t>In-code governance allowlist</a:t>
+            </a:r>
+            <a:endParaRPr lang="en-US" sz="1300" dirty="0"/>
           </a:p>
         </p:txBody>
       </p:sp>
@@ -3872,8 +4787,8 @@
         </p:nvSpPr>
         <p:spPr>
           <a:xfrm>
-            <a:off x="5175504" y="4599432"/>
-            <a:ext cx="256032" cy="201168"/>
+            <a:off x="5175504" y="4297680"/>
+            <a:ext cx="256032" cy="182880"/>
           </a:xfrm>
           <a:prstGeom prst="rightArrow">
             <a:avLst/>
@@ -3892,12 +4807,12 @@
         </p:nvSpPr>
         <p:spPr>
           <a:xfrm>
-            <a:off x="5486400" y="4398264"/>
-            <a:ext cx="6080760" cy="603504"/>
+            <a:off x="5486400" y="4105656"/>
+            <a:ext cx="6080760" cy="566928"/>
           </a:xfrm>
           <a:prstGeom prst="roundRect">
             <a:avLst>
-              <a:gd name="adj" fmla="val 13636"/>
+              <a:gd name="adj" fmla="val 14516"/>
             </a:avLst>
           </a:prstGeom>
           <a:solidFill>
@@ -3926,24 +4841,24 @@
         </p:nvSpPr>
         <p:spPr>
           <a:xfrm>
-            <a:off x="5760720" y="4398264"/>
-            <a:ext cx="5623560" cy="603504"/>
-          </a:xfrm>
-          <a:prstGeom prst="rect">
-            <a:avLst/>
-          </a:prstGeom>
-          <a:noFill/>
-          <a:ln/>
-        </p:spPr>
-        <p:txBody>
-          <a:bodyPr wrap="square" lIns="0" tIns="0" rIns="0" bIns="0" rtlCol="0" anchor="ctr"/>
-          <a:lstStyle/>
-          <a:p>
-            <a:pPr indent="0" marL="0">
-              <a:buNone/>
-            </a:pPr>
-            <a:r>
-              <a:rPr lang="en-US" sz="1350" dirty="0">
+            <a:off x="5760720" y="4105656"/>
+            <a:ext cx="5623560" cy="566928"/>
+          </a:xfrm>
+          <a:prstGeom prst="rect">
+            <a:avLst/>
+          </a:prstGeom>
+          <a:noFill/>
+          <a:ln/>
+        </p:spPr>
+        <p:txBody>
+          <a:bodyPr wrap="square" lIns="0" tIns="0" rIns="0" bIns="0" rtlCol="0" anchor="ctr"/>
+          <a:lstStyle/>
+          <a:p>
+            <a:pPr indent="0" marL="0">
+              <a:buNone/>
+            </a:pPr>
+            <a:r>
+              <a:rPr lang="en-US" sz="1300" dirty="0">
                 <a:solidFill>
                   <a:srgbClr val="E9EEF3"/>
                 </a:solidFill>
@@ -3951,9 +4866,9 @@
                 <a:ea typeface="Calibri" pitchFamily="34" charset="-122"/>
                 <a:cs typeface="Calibri" pitchFamily="34" charset="-120"/>
               </a:rPr>
-              <a:t>Databricks Model Serving (Llama 3 / DBRX) in your VPC</a:t>
-            </a:r>
-            <a:endParaRPr lang="en-US" sz="1350" dirty="0"/>
+              <a:t>GRANT EXECUTE ON FUNCTION + row/column-level security</a:t>
+            </a:r>
+            <a:endParaRPr lang="en-US" sz="1300" dirty="0"/>
           </a:p>
         </p:txBody>
       </p:sp>
@@ -3965,12 +4880,12 @@
         </p:nvSpPr>
         <p:spPr>
           <a:xfrm>
-            <a:off x="640080" y="5111496"/>
-            <a:ext cx="4480560" cy="603504"/>
+            <a:off x="640080" y="4764024"/>
+            <a:ext cx="4480560" cy="566928"/>
           </a:xfrm>
           <a:prstGeom prst="roundRect">
             <a:avLst>
-              <a:gd name="adj" fmla="val 13636"/>
+              <a:gd name="adj" fmla="val 14516"/>
             </a:avLst>
           </a:prstGeom>
           <a:solidFill>
@@ -3999,24 +4914,24 @@
         </p:nvSpPr>
         <p:spPr>
           <a:xfrm>
-            <a:off x="914400" y="5111496"/>
-            <a:ext cx="4023360" cy="603504"/>
-          </a:xfrm>
-          <a:prstGeom prst="rect">
-            <a:avLst/>
-          </a:prstGeom>
-          <a:noFill/>
-          <a:ln/>
-        </p:spPr>
-        <p:txBody>
-          <a:bodyPr wrap="square" lIns="0" tIns="0" rIns="0" bIns="0" rtlCol="0" anchor="ctr"/>
-          <a:lstStyle/>
-          <a:p>
-            <a:pPr indent="0" marL="0">
-              <a:buNone/>
-            </a:pPr>
-            <a:r>
-              <a:rPr lang="en-US" sz="1350" dirty="0">
+            <a:off x="914400" y="4764024"/>
+            <a:ext cx="4023360" cy="566928"/>
+          </a:xfrm>
+          <a:prstGeom prst="rect">
+            <a:avLst/>
+          </a:prstGeom>
+          <a:noFill/>
+          <a:ln/>
+        </p:spPr>
+        <p:txBody>
+          <a:bodyPr wrap="square" lIns="0" tIns="0" rIns="0" bIns="0" rtlCol="0" anchor="ctr"/>
+          <a:lstStyle/>
+          <a:p>
+            <a:pPr indent="0" marL="0">
+              <a:buNone/>
+            </a:pPr>
+            <a:r>
+              <a:rPr lang="en-US" sz="1300" dirty="0">
                 <a:solidFill>
                   <a:srgbClr val="E9EEF3"/>
                 </a:solidFill>
@@ -4024,9 +4939,9 @@
                 <a:ea typeface="Calibri" pitchFamily="34" charset="-122"/>
                 <a:cs typeface="Calibri" pitchFamily="34" charset="-120"/>
               </a:rPr>
-              <a:t>Synthetic JSON generator</a:t>
-            </a:r>
-            <a:endParaRPr lang="en-US" sz="1350" dirty="0"/>
+              <a:t>Local deterministic planner</a:t>
+            </a:r>
+            <a:endParaRPr lang="en-US" sz="1300" dirty="0"/>
           </a:p>
         </p:txBody>
       </p:sp>
@@ -4038,8 +4953,8 @@
         </p:nvSpPr>
         <p:spPr>
           <a:xfrm>
-            <a:off x="5175504" y="5312664"/>
-            <a:ext cx="256032" cy="201168"/>
+            <a:off x="5175504" y="4956048"/>
+            <a:ext cx="256032" cy="182880"/>
           </a:xfrm>
           <a:prstGeom prst="rightArrow">
             <a:avLst/>
@@ -4058,12 +4973,12 @@
         </p:nvSpPr>
         <p:spPr>
           <a:xfrm>
-            <a:off x="5486400" y="5111496"/>
-            <a:ext cx="6080760" cy="603504"/>
+            <a:off x="5486400" y="4764024"/>
+            <a:ext cx="6080760" cy="566928"/>
           </a:xfrm>
           <a:prstGeom prst="roundRect">
             <a:avLst>
-              <a:gd name="adj" fmla="val 13636"/>
+              <a:gd name="adj" fmla="val 14516"/>
             </a:avLst>
           </a:prstGeom>
           <a:solidFill>
@@ -4092,24 +5007,24 @@
         </p:nvSpPr>
         <p:spPr>
           <a:xfrm>
-            <a:off x="5760720" y="5111496"/>
-            <a:ext cx="5623560" cy="603504"/>
-          </a:xfrm>
-          <a:prstGeom prst="rect">
-            <a:avLst/>
-          </a:prstGeom>
-          <a:noFill/>
-          <a:ln/>
-        </p:spPr>
-        <p:txBody>
-          <a:bodyPr wrap="square" lIns="0" tIns="0" rIns="0" bIns="0" rtlCol="0" anchor="ctr"/>
-          <a:lstStyle/>
-          <a:p>
-            <a:pPr indent="0" marL="0">
-              <a:buNone/>
-            </a:pPr>
-            <a:r>
-              <a:rPr lang="en-US" sz="1350" dirty="0">
+            <a:off x="5760720" y="4764024"/>
+            <a:ext cx="5623560" cy="566928"/>
+          </a:xfrm>
+          <a:prstGeom prst="rect">
+            <a:avLst/>
+          </a:prstGeom>
+          <a:noFill/>
+          <a:ln/>
+        </p:spPr>
+        <p:txBody>
+          <a:bodyPr wrap="square" lIns="0" tIns="0" rIns="0" bIns="0" rtlCol="0" anchor="ctr"/>
+          <a:lstStyle/>
+          <a:p>
+            <a:pPr indent="0" marL="0">
+              <a:buNone/>
+            </a:pPr>
+            <a:r>
+              <a:rPr lang="en-US" sz="1300" dirty="0">
                 <a:solidFill>
                   <a:srgbClr val="E9EEF3"/>
                 </a:solidFill>
@@ -4117,21 +5032,187 @@
                 <a:ea typeface="Calibri" pitchFamily="34" charset="-122"/>
                 <a:cs typeface="Calibri" pitchFamily="34" charset="-120"/>
               </a:rPr>
+              <a:t>Databricks Model Serving (Llama 3 / DBRX) in your VPC</a:t>
+            </a:r>
+            <a:endParaRPr lang="en-US" sz="1300" dirty="0"/>
+          </a:p>
+        </p:txBody>
+      </p:sp>
+      <p:sp>
+        <p:nvSpPr>
+          <p:cNvPr id="28" name="Shape 26"/>
+          <p:cNvSpPr/>
+          <p:nvPr/>
+        </p:nvSpPr>
+        <p:spPr>
+          <a:xfrm>
+            <a:off x="640080" y="5422392"/>
+            <a:ext cx="4480560" cy="566928"/>
+          </a:xfrm>
+          <a:prstGeom prst="roundRect">
+            <a:avLst>
+              <a:gd name="adj" fmla="val 14516"/>
+            </a:avLst>
+          </a:prstGeom>
+          <a:solidFill>
+            <a:srgbClr val="18232F"/>
+          </a:solidFill>
+          <a:ln w="12700">
+            <a:solidFill>
+              <a:srgbClr val="2A3745"/>
+            </a:solidFill>
+            <a:prstDash val="solid"/>
+          </a:ln>
+          <a:effectLst>
+            <a:outerShdw sx="100000" sy="100000" kx="0" ky="0" algn="bl" rotWithShape="0" blurRad="114300" dist="38100" dir="5400000">
+              <a:srgbClr val="000000">
+                <a:alpha val="28000"/>
+              </a:srgbClr>
+            </a:outerShdw>
+          </a:effectLst>
+        </p:spPr>
+      </p:sp>
+      <p:sp>
+        <p:nvSpPr>
+          <p:cNvPr id="29" name="Text 27"/>
+          <p:cNvSpPr/>
+          <p:nvPr/>
+        </p:nvSpPr>
+        <p:spPr>
+          <a:xfrm>
+            <a:off x="914400" y="5422392"/>
+            <a:ext cx="4023360" cy="566928"/>
+          </a:xfrm>
+          <a:prstGeom prst="rect">
+            <a:avLst/>
+          </a:prstGeom>
+          <a:noFill/>
+          <a:ln/>
+        </p:spPr>
+        <p:txBody>
+          <a:bodyPr wrap="square" lIns="0" tIns="0" rIns="0" bIns="0" rtlCol="0" anchor="ctr"/>
+          <a:lstStyle/>
+          <a:p>
+            <a:pPr indent="0" marL="0">
+              <a:buNone/>
+            </a:pPr>
+            <a:r>
+              <a:rPr lang="en-US" sz="1300" dirty="0">
+                <a:solidFill>
+                  <a:srgbClr val="E9EEF3"/>
+                </a:solidFill>
+                <a:latin typeface="Calibri" pitchFamily="34" charset="0"/>
+                <a:ea typeface="Calibri" pitchFamily="34" charset="-122"/>
+                <a:cs typeface="Calibri" pitchFamily="34" charset="-120"/>
+              </a:rPr>
+              <a:t>Synthetic JSON generator</a:t>
+            </a:r>
+            <a:endParaRPr lang="en-US" sz="1300" dirty="0"/>
+          </a:p>
+        </p:txBody>
+      </p:sp>
+      <p:sp>
+        <p:nvSpPr>
+          <p:cNvPr id="30" name="Shape 28"/>
+          <p:cNvSpPr/>
+          <p:nvPr/>
+        </p:nvSpPr>
+        <p:spPr>
+          <a:xfrm>
+            <a:off x="5175504" y="5614416"/>
+            <a:ext cx="256032" cy="182880"/>
+          </a:xfrm>
+          <a:prstGeom prst="rightArrow">
+            <a:avLst/>
+          </a:prstGeom>
+          <a:solidFill>
+            <a:srgbClr val="FF6C00"/>
+          </a:solidFill>
+          <a:ln/>
+        </p:spPr>
+      </p:sp>
+      <p:sp>
+        <p:nvSpPr>
+          <p:cNvPr id="31" name="Shape 29"/>
+          <p:cNvSpPr/>
+          <p:nvPr/>
+        </p:nvSpPr>
+        <p:spPr>
+          <a:xfrm>
+            <a:off x="5486400" y="5422392"/>
+            <a:ext cx="6080760" cy="566928"/>
+          </a:xfrm>
+          <a:prstGeom prst="roundRect">
+            <a:avLst>
+              <a:gd name="adj" fmla="val 14516"/>
+            </a:avLst>
+          </a:prstGeom>
+          <a:solidFill>
+            <a:srgbClr val="18232F"/>
+          </a:solidFill>
+          <a:ln w="12700">
+            <a:solidFill>
+              <a:srgbClr val="2A3745"/>
+            </a:solidFill>
+            <a:prstDash val="solid"/>
+          </a:ln>
+          <a:effectLst>
+            <a:outerShdw sx="100000" sy="100000" kx="0" ky="0" algn="bl" rotWithShape="0" blurRad="114300" dist="38100" dir="5400000">
+              <a:srgbClr val="000000">
+                <a:alpha val="28000"/>
+              </a:srgbClr>
+            </a:outerShdw>
+          </a:effectLst>
+        </p:spPr>
+      </p:sp>
+      <p:sp>
+        <p:nvSpPr>
+          <p:cNvPr id="32" name="Text 30"/>
+          <p:cNvSpPr/>
+          <p:nvPr/>
+        </p:nvSpPr>
+        <p:spPr>
+          <a:xfrm>
+            <a:off x="5760720" y="5422392"/>
+            <a:ext cx="5623560" cy="566928"/>
+          </a:xfrm>
+          <a:prstGeom prst="rect">
+            <a:avLst/>
+          </a:prstGeom>
+          <a:noFill/>
+          <a:ln/>
+        </p:spPr>
+        <p:txBody>
+          <a:bodyPr wrap="square" lIns="0" tIns="0" rIns="0" bIns="0" rtlCol="0" anchor="ctr"/>
+          <a:lstStyle/>
+          <a:p>
+            <a:pPr indent="0" marL="0">
+              <a:buNone/>
+            </a:pPr>
+            <a:r>
+              <a:rPr lang="en-US" sz="1300" dirty="0">
+                <a:solidFill>
+                  <a:srgbClr val="E9EEF3"/>
+                </a:solidFill>
+                <a:latin typeface="Calibri" pitchFamily="34" charset="0"/>
+                <a:ea typeface="Calibri" pitchFamily="34" charset="-122"/>
+                <a:cs typeface="Calibri" pitchFamily="34" charset="-120"/>
+              </a:rPr>
               <a:t>Kafka streams / cloud storage via Auto Loader</a:t>
             </a:r>
-            <a:endParaRPr lang="en-US" sz="1350" dirty="0"/>
-          </a:p>
-        </p:txBody>
-      </p:sp>
-      <p:sp>
-        <p:nvSpPr>
-          <p:cNvPr id="28" name="Text 26"/>
-          <p:cNvSpPr/>
-          <p:nvPr/>
-        </p:nvSpPr>
-        <p:spPr>
-          <a:xfrm>
-            <a:off x="640080" y="6053328"/>
+            <a:endParaRPr lang="en-US" sz="1300" dirty="0"/>
+          </a:p>
+        </p:txBody>
+      </p:sp>
+      <p:sp>
+        <p:nvSpPr>
+          <p:cNvPr id="33" name="Text 31"/>
+          <p:cNvSpPr/>
+          <p:nvPr/>
+        </p:nvSpPr>
+        <p:spPr>
+          <a:xfrm>
+            <a:off x="640080" y="6172200"/>
             <a:ext cx="10881360" cy="365760"/>
           </a:xfrm>
           <a:prstGeom prst="rect">
@@ -4148,7 +5229,7 @@
               <a:buNone/>
             </a:pPr>
             <a:r>
-              <a:rPr lang="en-US" sz="1350" i="1" dirty="0">
+              <a:rPr lang="en-US" sz="1300" i="1" dirty="0">
                 <a:solidFill>
                   <a:srgbClr val="93A1AF"/>
                 </a:solidFill>
@@ -4158,13 +5239,13 @@
               </a:rPr>
               <a:t>Point DATABRICKS_HOST / DATABRICKS_TOKEN at a workspace and the same call path routes to the served model.</a:t>
             </a:r>
-            <a:endParaRPr lang="en-US" sz="1350" dirty="0"/>
-          </a:p>
-        </p:txBody>
-      </p:sp>
-      <p:sp>
-        <p:nvSpPr>
-          <p:cNvPr id="29" name="Text 27"/>
+            <a:endParaRPr lang="en-US" sz="1300" dirty="0"/>
+          </a:p>
+        </p:txBody>
+      </p:sp>
+      <p:sp>
+        <p:nvSpPr>
+          <p:cNvPr id="34" name="Text 32"/>
           <p:cNvSpPr/>
           <p:nvPr/>
         </p:nvSpPr>
@@ -4195,7 +5276,7 @@
                 <a:ea typeface="Calibri" pitchFamily="34" charset="-122"/>
                 <a:cs typeface="Calibri" pitchFamily="34" charset="-120"/>
               </a:rPr>
-              <a:t>11</a:t>
+              <a:t>12</a:t>
             </a:r>
             <a:endParaRPr lang="en-US" sz="1000" dirty="0"/>
           </a:p>
@@ -4203,7 +5284,7 @@
       </p:sp>
       <p:sp>
         <p:nvSpPr>
-          <p:cNvPr id="30" name="Text 28"/>
+          <p:cNvPr id="35" name="Text 33"/>
           <p:cNvSpPr/>
           <p:nvPr/>
         </p:nvSpPr>
@@ -4222,7 +5303,7 @@
           <a:bodyPr wrap="square" lIns="0" tIns="0" rIns="0" bIns="0" rtlCol="0" anchor="ctr"/>
           <a:lstStyle/>
           <a:p>
-            <a:pPr algn="l" indent="0" marL="0">
+            <a:pPr indent="0" marL="0">
               <a:buNone/>
             </a:pPr>
             <a:r>
@@ -4248,9 +5329,9 @@
 </p:sld>
 </file>
 
-<file path=ppt/slides/slide12.xml><?xml version="1.0" encoding="utf-8"?>
+<file path=ppt/slides/slide13.xml><?xml version="1.0" encoding="utf-8"?>
 <p:sld xmlns:a="http://schemas.openxmlformats.org/drawingml/2006/main" xmlns:r="http://schemas.openxmlformats.org/officeDocument/2006/relationships" xmlns:p="http://schemas.openxmlformats.org/presentationml/2006/main">
-  <p:cSld name="Slide 12">
+  <p:cSld name="Slide 13">
     <p:bg>
       <p:bgPr>
         <a:solidFill>
@@ -4475,7 +5556,7 @@
                 <a:ea typeface="Calibri" pitchFamily="34" charset="-122"/>
                 <a:cs typeface="Calibri" pitchFamily="34" charset="-120"/>
               </a:rPr>
-              <a:t>IntelligenceStack proves it with running code — real answers, an enforced boundary, and a clean path to production.</a:t>
+              <a:t>IntelligenceStack proves it with running code — real answers, cited guidance, an enforced boundary, and a clean path to production.</a:t>
             </a:r>
             <a:endParaRPr lang="en-US" sz="1700" dirty="0"/>
           </a:p>
@@ -4859,7 +5940,7 @@
           <a:bodyPr wrap="square" lIns="0" tIns="0" rIns="0" bIns="0" rtlCol="0" anchor="ctr"/>
           <a:lstStyle/>
           <a:p>
-            <a:pPr algn="l" indent="0" marL="0">
+            <a:pPr indent="0" marL="0">
               <a:buNone/>
             </a:pPr>
             <a:r>
@@ -4898,7 +5979,7 @@
           <a:bodyPr wrap="square" lIns="0" tIns="0" rIns="0" bIns="0" rtlCol="0" anchor="t"/>
           <a:lstStyle/>
           <a:p>
-            <a:pPr algn="l" indent="0" marL="0">
+            <a:pPr indent="0" marL="0">
               <a:buNone/>
             </a:pPr>
             <a:r>
@@ -5594,7 +6675,7 @@
           <a:bodyPr wrap="square" lIns="0" tIns="0" rIns="0" bIns="0" rtlCol="0" anchor="ctr"/>
           <a:lstStyle/>
           <a:p>
-            <a:pPr algn="l" indent="0" marL="0">
+            <a:pPr indent="0" marL="0">
               <a:buNone/>
             </a:pPr>
             <a:r>
@@ -5685,7 +6766,7 @@
           <a:bodyPr wrap="square" lIns="0" tIns="0" rIns="0" bIns="0" rtlCol="0" anchor="ctr"/>
           <a:lstStyle/>
           <a:p>
-            <a:pPr algn="l" indent="0" marL="0">
+            <a:pPr indent="0" marL="0">
               <a:buNone/>
             </a:pPr>
             <a:r>
@@ -5724,7 +6805,7 @@
           <a:bodyPr wrap="square" lIns="0" tIns="0" rIns="0" bIns="0" rtlCol="0" anchor="t"/>
           <a:lstStyle/>
           <a:p>
-            <a:pPr algn="l" indent="0" marL="0">
+            <a:pPr indent="0" marL="0">
               <a:buNone/>
             </a:pPr>
             <a:r>
@@ -6599,7 +7680,7 @@
           <a:bodyPr wrap="square" lIns="0" tIns="0" rIns="0" bIns="0" rtlCol="0" anchor="ctr"/>
           <a:lstStyle/>
           <a:p>
-            <a:pPr algn="l" indent="0" marL="0">
+            <a:pPr indent="0" marL="0">
               <a:buNone/>
             </a:pPr>
             <a:r>
@@ -6690,7 +7771,7 @@
           <a:bodyPr wrap="square" lIns="0" tIns="0" rIns="0" bIns="0" rtlCol="0" anchor="ctr"/>
           <a:lstStyle/>
           <a:p>
-            <a:pPr algn="l" indent="0" marL="0">
+            <a:pPr indent="0" marL="0">
               <a:buNone/>
             </a:pPr>
             <a:r>
@@ -6729,7 +7810,7 @@
           <a:bodyPr wrap="square" lIns="0" tIns="0" rIns="0" bIns="0" rtlCol="0" anchor="t"/>
           <a:lstStyle/>
           <a:p>
-            <a:pPr algn="l" indent="0" marL="0">
+            <a:pPr indent="0" marL="0">
               <a:buNone/>
             </a:pPr>
             <a:r>
@@ -6779,8 +7860,8 @@
         </p:nvSpPr>
         <p:spPr>
           <a:xfrm>
-            <a:off x="5760720" y="1865376"/>
-            <a:ext cx="402336" cy="402336"/>
+            <a:off x="5760720" y="1828800"/>
+            <a:ext cx="365760" cy="365760"/>
           </a:xfrm>
           <a:prstGeom prst="ellipse">
             <a:avLst/>
@@ -6804,8 +7885,8 @@
         </p:nvSpPr>
         <p:spPr>
           <a:xfrm>
-            <a:off x="5760720" y="1865376"/>
-            <a:ext cx="402336" cy="402336"/>
+            <a:off x="5760720" y="1828800"/>
+            <a:ext cx="365760" cy="365760"/>
           </a:xfrm>
           <a:prstGeom prst="rect">
             <a:avLst/>
@@ -6821,7 +7902,7 @@
               <a:buNone/>
             </a:pPr>
             <a:r>
-              <a:rPr lang="en-US" sz="1600" b="1" dirty="0">
+              <a:rPr lang="en-US" sz="1500" b="1" dirty="0">
                 <a:solidFill>
                   <a:srgbClr val="FF8A3D"/>
                 </a:solidFill>
@@ -6831,7 +7912,7 @@
               </a:rPr>
               <a:t>1</a:t>
             </a:r>
-            <a:endParaRPr lang="en-US" sz="1600" dirty="0"/>
+            <a:endParaRPr lang="en-US" sz="1500" dirty="0"/>
           </a:p>
         </p:txBody>
       </p:sp>
@@ -6843,24 +7924,24 @@
         </p:nvSpPr>
         <p:spPr>
           <a:xfrm>
-            <a:off x="6327648" y="1773936"/>
-            <a:ext cx="5193792" cy="365760"/>
-          </a:xfrm>
-          <a:prstGeom prst="rect">
-            <a:avLst/>
-          </a:prstGeom>
-          <a:noFill/>
-          <a:ln/>
-        </p:spPr>
-        <p:txBody>
-          <a:bodyPr wrap="square" lIns="0" tIns="0" rIns="0" bIns="0" rtlCol="0" anchor="ctr"/>
-          <a:lstStyle/>
-          <a:p>
-            <a:pPr indent="0" marL="0">
-              <a:buNone/>
-            </a:pPr>
-            <a:r>
-              <a:rPr lang="en-US" sz="1600" b="1" dirty="0">
+            <a:off x="6291072" y="1755648"/>
+            <a:ext cx="5230368" cy="329184"/>
+          </a:xfrm>
+          <a:prstGeom prst="rect">
+            <a:avLst/>
+          </a:prstGeom>
+          <a:noFill/>
+          <a:ln/>
+        </p:spPr>
+        <p:txBody>
+          <a:bodyPr wrap="square" lIns="0" tIns="0" rIns="0" bIns="0" rtlCol="0" anchor="ctr"/>
+          <a:lstStyle/>
+          <a:p>
+            <a:pPr indent="0" marL="0">
+              <a:buNone/>
+            </a:pPr>
+            <a:r>
+              <a:rPr lang="en-US" sz="1500" b="1" dirty="0">
                 <a:solidFill>
                   <a:srgbClr val="E9EEF3"/>
                 </a:solidFill>
@@ -6870,7 +7951,7 @@
               </a:rPr>
               <a:t>Streaming ingestion</a:t>
             </a:r>
-            <a:endParaRPr lang="en-US" sz="1600" dirty="0"/>
+            <a:endParaRPr lang="en-US" sz="1500" dirty="0"/>
           </a:p>
         </p:txBody>
       </p:sp>
@@ -6882,8 +7963,8 @@
         </p:nvSpPr>
         <p:spPr>
           <a:xfrm>
-            <a:off x="6327648" y="2121408"/>
-            <a:ext cx="5193792" cy="749808"/>
+            <a:off x="6291072" y="2066544"/>
+            <a:ext cx="5230368" cy="640080"/>
           </a:xfrm>
           <a:prstGeom prst="rect">
             <a:avLst/>
@@ -6897,12 +7978,12 @@
           <a:p>
             <a:pPr indent="0" marL="0">
               <a:lnSpc>
-                <a:spcPct val="108000"/>
+                <a:spcPct val="105000"/>
               </a:lnSpc>
               <a:buNone/>
             </a:pPr>
             <a:r>
-              <a:rPr lang="en-US" sz="1250" dirty="0">
+              <a:rPr lang="en-US" sz="1150" dirty="0">
                 <a:solidFill>
                   <a:srgbClr val="93A1AF"/>
                 </a:solidFill>
@@ -6912,7 +7993,7 @@
               </a:rPr>
               <a:t>Auto Loader + Delta Live Tables land events through a bronze → silver → gold medallion, enforcing data quality and hashing PII on the way in.</a:t>
             </a:r>
-            <a:endParaRPr lang="en-US" sz="1250" dirty="0"/>
+            <a:endParaRPr lang="en-US" sz="1150" dirty="0"/>
           </a:p>
         </p:txBody>
       </p:sp>
@@ -6924,8 +8005,8 @@
         </p:nvSpPr>
         <p:spPr>
           <a:xfrm>
-            <a:off x="5760720" y="2944368"/>
-            <a:ext cx="402336" cy="402336"/>
+            <a:off x="5760720" y="2715768"/>
+            <a:ext cx="365760" cy="365760"/>
           </a:xfrm>
           <a:prstGeom prst="ellipse">
             <a:avLst/>
@@ -6949,8 +8030,8 @@
         </p:nvSpPr>
         <p:spPr>
           <a:xfrm>
-            <a:off x="5760720" y="2944368"/>
-            <a:ext cx="402336" cy="402336"/>
+            <a:off x="5760720" y="2715768"/>
+            <a:ext cx="365760" cy="365760"/>
           </a:xfrm>
           <a:prstGeom prst="rect">
             <a:avLst/>
@@ -6966,7 +8047,7 @@
               <a:buNone/>
             </a:pPr>
             <a:r>
-              <a:rPr lang="en-US" sz="1600" b="1" dirty="0">
+              <a:rPr lang="en-US" sz="1500" b="1" dirty="0">
                 <a:solidFill>
                   <a:srgbClr val="FF8A3D"/>
                 </a:solidFill>
@@ -6976,7 +8057,7 @@
               </a:rPr>
               <a:t>2</a:t>
             </a:r>
-            <a:endParaRPr lang="en-US" sz="1600" dirty="0"/>
+            <a:endParaRPr lang="en-US" sz="1500" dirty="0"/>
           </a:p>
         </p:txBody>
       </p:sp>
@@ -6988,24 +8069,24 @@
         </p:nvSpPr>
         <p:spPr>
           <a:xfrm>
-            <a:off x="6327648" y="2852928"/>
-            <a:ext cx="5193792" cy="365760"/>
-          </a:xfrm>
-          <a:prstGeom prst="rect">
-            <a:avLst/>
-          </a:prstGeom>
-          <a:noFill/>
-          <a:ln/>
-        </p:spPr>
-        <p:txBody>
-          <a:bodyPr wrap="square" lIns="0" tIns="0" rIns="0" bIns="0" rtlCol="0" anchor="ctr"/>
-          <a:lstStyle/>
-          <a:p>
-            <a:pPr indent="0" marL="0">
-              <a:buNone/>
-            </a:pPr>
-            <a:r>
-              <a:rPr lang="en-US" sz="1600" b="1" dirty="0">
+            <a:off x="6291072" y="2642616"/>
+            <a:ext cx="5230368" cy="329184"/>
+          </a:xfrm>
+          <a:prstGeom prst="rect">
+            <a:avLst/>
+          </a:prstGeom>
+          <a:noFill/>
+          <a:ln/>
+        </p:spPr>
+        <p:txBody>
+          <a:bodyPr wrap="square" lIns="0" tIns="0" rIns="0" bIns="0" rtlCol="0" anchor="ctr"/>
+          <a:lstStyle/>
+          <a:p>
+            <a:pPr indent="0" marL="0">
+              <a:buNone/>
+            </a:pPr>
+            <a:r>
+              <a:rPr lang="en-US" sz="1500" b="1" dirty="0">
                 <a:solidFill>
                   <a:srgbClr val="E9EEF3"/>
                 </a:solidFill>
@@ -7015,7 +8096,7 @@
               </a:rPr>
               <a:t>Governed gold layer</a:t>
             </a:r>
-            <a:endParaRPr lang="en-US" sz="1600" dirty="0"/>
+            <a:endParaRPr lang="en-US" sz="1500" dirty="0"/>
           </a:p>
         </p:txBody>
       </p:sp>
@@ -7027,8 +8108,8 @@
         </p:nvSpPr>
         <p:spPr>
           <a:xfrm>
-            <a:off x="6327648" y="3200400"/>
-            <a:ext cx="5193792" cy="749808"/>
+            <a:off x="6291072" y="2953512"/>
+            <a:ext cx="5230368" cy="640080"/>
           </a:xfrm>
           <a:prstGeom prst="rect">
             <a:avLst/>
@@ -7042,12 +8123,12 @@
           <a:p>
             <a:pPr indent="0" marL="0">
               <a:lnSpc>
-                <a:spcPct val="108000"/>
+                <a:spcPct val="105000"/>
               </a:lnSpc>
               <a:buNone/>
             </a:pPr>
             <a:r>
-              <a:rPr lang="en-US" sz="1250" dirty="0">
+              <a:rPr lang="en-US" sz="1150" dirty="0">
                 <a:solidFill>
                   <a:srgbClr val="93A1AF"/>
                 </a:solidFill>
@@ -7057,7 +8138,7 @@
               </a:rPr>
               <a:t>Business-ready tables the agent reads. In the sandbox this is a real DuckDB engine; in production, a Serverless SQL Warehouse over Delta.</a:t>
             </a:r>
-            <a:endParaRPr lang="en-US" sz="1250" dirty="0"/>
+            <a:endParaRPr lang="en-US" sz="1150" dirty="0"/>
           </a:p>
         </p:txBody>
       </p:sp>
@@ -7069,8 +8150,8 @@
         </p:nvSpPr>
         <p:spPr>
           <a:xfrm>
-            <a:off x="5760720" y="4023360"/>
-            <a:ext cx="402336" cy="402336"/>
+            <a:off x="5760720" y="3602736"/>
+            <a:ext cx="365760" cy="365760"/>
           </a:xfrm>
           <a:prstGeom prst="ellipse">
             <a:avLst/>
@@ -7094,8 +8175,8 @@
         </p:nvSpPr>
         <p:spPr>
           <a:xfrm>
-            <a:off x="5760720" y="4023360"/>
-            <a:ext cx="402336" cy="402336"/>
+            <a:off x="5760720" y="3602736"/>
+            <a:ext cx="365760" cy="365760"/>
           </a:xfrm>
           <a:prstGeom prst="rect">
             <a:avLst/>
@@ -7111,7 +8192,7 @@
               <a:buNone/>
             </a:pPr>
             <a:r>
-              <a:rPr lang="en-US" sz="1600" b="1" dirty="0">
+              <a:rPr lang="en-US" sz="1500" b="1" dirty="0">
                 <a:solidFill>
                   <a:srgbClr val="FF8A3D"/>
                 </a:solidFill>
@@ -7121,7 +8202,7 @@
               </a:rPr>
               <a:t>3</a:t>
             </a:r>
-            <a:endParaRPr lang="en-US" sz="1600" dirty="0"/>
+            <a:endParaRPr lang="en-US" sz="1500" dirty="0"/>
           </a:p>
         </p:txBody>
       </p:sp>
@@ -7133,24 +8214,24 @@
         </p:nvSpPr>
         <p:spPr>
           <a:xfrm>
-            <a:off x="6327648" y="3931920"/>
-            <a:ext cx="5193792" cy="365760"/>
-          </a:xfrm>
-          <a:prstGeom prst="rect">
-            <a:avLst/>
-          </a:prstGeom>
-          <a:noFill/>
-          <a:ln/>
-        </p:spPr>
-        <p:txBody>
-          <a:bodyPr wrap="square" lIns="0" tIns="0" rIns="0" bIns="0" rtlCol="0" anchor="ctr"/>
-          <a:lstStyle/>
-          <a:p>
-            <a:pPr indent="0" marL="0">
-              <a:buNone/>
-            </a:pPr>
-            <a:r>
-              <a:rPr lang="en-US" sz="1600" b="1" dirty="0">
+            <a:off x="6291072" y="3529584"/>
+            <a:ext cx="5230368" cy="329184"/>
+          </a:xfrm>
+          <a:prstGeom prst="rect">
+            <a:avLst/>
+          </a:prstGeom>
+          <a:noFill/>
+          <a:ln/>
+        </p:spPr>
+        <p:txBody>
+          <a:bodyPr wrap="square" lIns="0" tIns="0" rIns="0" bIns="0" rtlCol="0" anchor="ctr"/>
+          <a:lstStyle/>
+          <a:p>
+            <a:pPr indent="0" marL="0">
+              <a:buNone/>
+            </a:pPr>
+            <a:r>
+              <a:rPr lang="en-US" sz="1500" b="1" dirty="0">
                 <a:solidFill>
                   <a:srgbClr val="E9EEF3"/>
                 </a:solidFill>
@@ -7160,7 +8241,7 @@
               </a:rPr>
               <a:t>Unity Catalog boundary</a:t>
             </a:r>
-            <a:endParaRPr lang="en-US" sz="1600" dirty="0"/>
+            <a:endParaRPr lang="en-US" sz="1500" dirty="0"/>
           </a:p>
         </p:txBody>
       </p:sp>
@@ -7172,8 +8253,8 @@
         </p:nvSpPr>
         <p:spPr>
           <a:xfrm>
-            <a:off x="6327648" y="4279392"/>
-            <a:ext cx="5193792" cy="749808"/>
+            <a:off x="6291072" y="3840480"/>
+            <a:ext cx="5230368" cy="640080"/>
           </a:xfrm>
           <a:prstGeom prst="rect">
             <a:avLst/>
@@ -7187,12 +8268,12 @@
           <a:p>
             <a:pPr indent="0" marL="0">
               <a:lnSpc>
-                <a:spcPct val="108000"/>
+                <a:spcPct val="105000"/>
               </a:lnSpc>
               <a:buNone/>
             </a:pPr>
             <a:r>
-              <a:rPr lang="en-US" sz="1250" dirty="0">
+              <a:rPr lang="en-US" sz="1150" dirty="0">
                 <a:solidFill>
                   <a:srgbClr val="93A1AF"/>
                 </a:solidFill>
@@ -7202,7 +8283,7 @@
               </a:rPr>
               <a:t>The agent is granted EXECUTE on a short allowlist of functions — never raw table access. Every call is checked before it runs.</a:t>
             </a:r>
-            <a:endParaRPr lang="en-US" sz="1250" dirty="0"/>
+            <a:endParaRPr lang="en-US" sz="1150" dirty="0"/>
           </a:p>
         </p:txBody>
       </p:sp>
@@ -7214,8 +8295,8 @@
         </p:nvSpPr>
         <p:spPr>
           <a:xfrm>
-            <a:off x="5760720" y="5102352"/>
-            <a:ext cx="402336" cy="402336"/>
+            <a:off x="5760720" y="4489704"/>
+            <a:ext cx="365760" cy="365760"/>
           </a:xfrm>
           <a:prstGeom prst="ellipse">
             <a:avLst/>
@@ -7239,8 +8320,8 @@
         </p:nvSpPr>
         <p:spPr>
           <a:xfrm>
-            <a:off x="5760720" y="5102352"/>
-            <a:ext cx="402336" cy="402336"/>
+            <a:off x="5760720" y="4489704"/>
+            <a:ext cx="365760" cy="365760"/>
           </a:xfrm>
           <a:prstGeom prst="rect">
             <a:avLst/>
@@ -7256,7 +8337,7 @@
               <a:buNone/>
             </a:pPr>
             <a:r>
-              <a:rPr lang="en-US" sz="1600" b="1" dirty="0">
+              <a:rPr lang="en-US" sz="1500" b="1" dirty="0">
                 <a:solidFill>
                   <a:srgbClr val="FF8A3D"/>
                 </a:solidFill>
@@ -7266,7 +8347,7 @@
               </a:rPr>
               <a:t>4</a:t>
             </a:r>
-            <a:endParaRPr lang="en-US" sz="1600" dirty="0"/>
+            <a:endParaRPr lang="en-US" sz="1500" dirty="0"/>
           </a:p>
         </p:txBody>
       </p:sp>
@@ -7278,24 +8359,24 @@
         </p:nvSpPr>
         <p:spPr>
           <a:xfrm>
-            <a:off x="6327648" y="5010912"/>
-            <a:ext cx="5193792" cy="365760"/>
-          </a:xfrm>
-          <a:prstGeom prst="rect">
-            <a:avLst/>
-          </a:prstGeom>
-          <a:noFill/>
-          <a:ln/>
-        </p:spPr>
-        <p:txBody>
-          <a:bodyPr wrap="square" lIns="0" tIns="0" rIns="0" bIns="0" rtlCol="0" anchor="ctr"/>
-          <a:lstStyle/>
-          <a:p>
-            <a:pPr indent="0" marL="0">
-              <a:buNone/>
-            </a:pPr>
-            <a:r>
-              <a:rPr lang="en-US" sz="1600" b="1" dirty="0">
+            <a:off x="6291072" y="4416552"/>
+            <a:ext cx="5230368" cy="329184"/>
+          </a:xfrm>
+          <a:prstGeom prst="rect">
+            <a:avLst/>
+          </a:prstGeom>
+          <a:noFill/>
+          <a:ln/>
+        </p:spPr>
+        <p:txBody>
+          <a:bodyPr wrap="square" lIns="0" tIns="0" rIns="0" bIns="0" rtlCol="0" anchor="ctr"/>
+          <a:lstStyle/>
+          <a:p>
+            <a:pPr indent="0" marL="0">
+              <a:buNone/>
+            </a:pPr>
+            <a:r>
+              <a:rPr lang="en-US" sz="1500" b="1" dirty="0">
                 <a:solidFill>
                   <a:srgbClr val="E9EEF3"/>
                 </a:solidFill>
@@ -7303,22 +8384,167 @@
                 <a:ea typeface="Calibri" pitchFamily="34" charset="-122"/>
                 <a:cs typeface="Calibri" pitchFamily="34" charset="-120"/>
               </a:rPr>
+              <a:t>Mosaic AI Vector Search</a:t>
+            </a:r>
+            <a:endParaRPr lang="en-US" sz="1500" dirty="0"/>
+          </a:p>
+        </p:txBody>
+      </p:sp>
+      <p:sp>
+        <p:nvSpPr>
+          <p:cNvPr id="21" name="Text 18"/>
+          <p:cNvSpPr/>
+          <p:nvPr/>
+        </p:nvSpPr>
+        <p:spPr>
+          <a:xfrm>
+            <a:off x="6291072" y="4727448"/>
+            <a:ext cx="5230368" cy="640080"/>
+          </a:xfrm>
+          <a:prstGeom prst="rect">
+            <a:avLst/>
+          </a:prstGeom>
+          <a:noFill/>
+          <a:ln/>
+        </p:spPr>
+        <p:txBody>
+          <a:bodyPr wrap="square" lIns="0" tIns="0" rIns="0" bIns="0" rtlCol="0" anchor="ctr"/>
+          <a:lstStyle/>
+          <a:p>
+            <a:pPr indent="0" marL="0">
+              <a:lnSpc>
+                <a:spcPct val="105000"/>
+              </a:lnSpc>
+              <a:buNone/>
+            </a:pPr>
+            <a:r>
+              <a:rPr lang="en-US" sz="1150" dirty="0">
+                <a:solidFill>
+                  <a:srgbClr val="93A1AF"/>
+                </a:solidFill>
+                <a:latin typeface="Calibri" pitchFamily="34" charset="0"/>
+                <a:ea typeface="Calibri" pitchFamily="34" charset="-122"/>
+                <a:cs typeface="Calibri" pitchFamily="34" charset="-120"/>
+              </a:rPr>
+              <a:t>A governed index over enterprise runbooks and policies, so the agent can ground answers in documented knowledge as well as live metrics.</a:t>
+            </a:r>
+            <a:endParaRPr lang="en-US" sz="1150" dirty="0"/>
+          </a:p>
+        </p:txBody>
+      </p:sp>
+      <p:sp>
+        <p:nvSpPr>
+          <p:cNvPr id="22" name="Shape 19"/>
+          <p:cNvSpPr/>
+          <p:nvPr/>
+        </p:nvSpPr>
+        <p:spPr>
+          <a:xfrm>
+            <a:off x="5760720" y="5376672"/>
+            <a:ext cx="365760" cy="365760"/>
+          </a:xfrm>
+          <a:prstGeom prst="ellipse">
+            <a:avLst/>
+          </a:prstGeom>
+          <a:solidFill>
+            <a:srgbClr val="2A1B12"/>
+          </a:solidFill>
+          <a:ln w="15240">
+            <a:solidFill>
+              <a:srgbClr val="FF6C00"/>
+            </a:solidFill>
+            <a:prstDash val="solid"/>
+          </a:ln>
+        </p:spPr>
+      </p:sp>
+      <p:sp>
+        <p:nvSpPr>
+          <p:cNvPr id="23" name="Text 20"/>
+          <p:cNvSpPr/>
+          <p:nvPr/>
+        </p:nvSpPr>
+        <p:spPr>
+          <a:xfrm>
+            <a:off x="5760720" y="5376672"/>
+            <a:ext cx="365760" cy="365760"/>
+          </a:xfrm>
+          <a:prstGeom prst="rect">
+            <a:avLst/>
+          </a:prstGeom>
+          <a:noFill/>
+          <a:ln/>
+        </p:spPr>
+        <p:txBody>
+          <a:bodyPr wrap="square" lIns="0" tIns="0" rIns="0" bIns="0" rtlCol="0" anchor="ctr"/>
+          <a:lstStyle/>
+          <a:p>
+            <a:pPr algn="ctr" indent="0" marL="0">
+              <a:buNone/>
+            </a:pPr>
+            <a:r>
+              <a:rPr lang="en-US" sz="1500" b="1" dirty="0">
+                <a:solidFill>
+                  <a:srgbClr val="FF8A3D"/>
+                </a:solidFill>
+                <a:latin typeface="Cambria" pitchFamily="34" charset="0"/>
+                <a:ea typeface="Cambria" pitchFamily="34" charset="-122"/>
+                <a:cs typeface="Cambria" pitchFamily="34" charset="-120"/>
+              </a:rPr>
+              <a:t>5</a:t>
+            </a:r>
+            <a:endParaRPr lang="en-US" sz="1500" dirty="0"/>
+          </a:p>
+        </p:txBody>
+      </p:sp>
+      <p:sp>
+        <p:nvSpPr>
+          <p:cNvPr id="24" name="Text 21"/>
+          <p:cNvSpPr/>
+          <p:nvPr/>
+        </p:nvSpPr>
+        <p:spPr>
+          <a:xfrm>
+            <a:off x="6291072" y="5303520"/>
+            <a:ext cx="5230368" cy="329184"/>
+          </a:xfrm>
+          <a:prstGeom prst="rect">
+            <a:avLst/>
+          </a:prstGeom>
+          <a:noFill/>
+          <a:ln/>
+        </p:spPr>
+        <p:txBody>
+          <a:bodyPr wrap="square" lIns="0" tIns="0" rIns="0" bIns="0" rtlCol="0" anchor="ctr"/>
+          <a:lstStyle/>
+          <a:p>
+            <a:pPr indent="0" marL="0">
+              <a:buNone/>
+            </a:pPr>
+            <a:r>
+              <a:rPr lang="en-US" sz="1500" b="1" dirty="0">
+                <a:solidFill>
+                  <a:srgbClr val="E9EEF3"/>
+                </a:solidFill>
+                <a:latin typeface="Calibri" pitchFamily="34" charset="0"/>
+                <a:ea typeface="Calibri" pitchFamily="34" charset="-122"/>
+                <a:cs typeface="Calibri" pitchFamily="34" charset="-120"/>
+              </a:rPr>
               <a:t>Cognitive agent + serving</a:t>
             </a:r>
-            <a:endParaRPr lang="en-US" sz="1600" dirty="0"/>
-          </a:p>
-        </p:txBody>
-      </p:sp>
-      <p:sp>
-        <p:nvSpPr>
-          <p:cNvPr id="21" name="Text 18"/>
-          <p:cNvSpPr/>
-          <p:nvPr/>
-        </p:nvSpPr>
-        <p:spPr>
-          <a:xfrm>
-            <a:off x="6327648" y="5358384"/>
-            <a:ext cx="5193792" cy="749808"/>
+            <a:endParaRPr lang="en-US" sz="1500" dirty="0"/>
+          </a:p>
+        </p:txBody>
+      </p:sp>
+      <p:sp>
+        <p:nvSpPr>
+          <p:cNvPr id="25" name="Text 22"/>
+          <p:cNvSpPr/>
+          <p:nvPr/>
+        </p:nvSpPr>
+        <p:spPr>
+          <a:xfrm>
+            <a:off x="6291072" y="5614416"/>
+            <a:ext cx="5230368" cy="640080"/>
           </a:xfrm>
           <a:prstGeom prst="rect">
             <a:avLst/>
@@ -7332,12 +8558,12 @@
           <a:p>
             <a:pPr indent="0" marL="0">
               <a:lnSpc>
-                <a:spcPct val="108000"/>
+                <a:spcPct val="105000"/>
               </a:lnSpc>
               <a:buNone/>
             </a:pPr>
             <a:r>
-              <a:rPr lang="en-US" sz="1250" dirty="0">
+              <a:rPr lang="en-US" sz="1150" dirty="0">
                 <a:solidFill>
                   <a:srgbClr val="93A1AF"/>
                 </a:solidFill>
@@ -7345,15 +8571,15 @@
                 <a:ea typeface="Calibri" pitchFamily="34" charset="-122"/>
                 <a:cs typeface="Calibri" pitchFamily="34" charset="-120"/>
               </a:rPr>
-              <a:t>Model Serving resolves plain-English intent to one approved function call, then grounds the answer in the returned rows.</a:t>
-            </a:r>
-            <a:endParaRPr lang="en-US" sz="1250" dirty="0"/>
-          </a:p>
-        </p:txBody>
-      </p:sp>
-      <p:sp>
-        <p:nvSpPr>
-          <p:cNvPr id="22" name="Text 19"/>
+              <a:t>Model Serving resolves plain-English intent into approved function calls, then grounds the answer in what those calls returned.</a:t>
+            </a:r>
+            <a:endParaRPr lang="en-US" sz="1150" dirty="0"/>
+          </a:p>
+        </p:txBody>
+      </p:sp>
+      <p:sp>
+        <p:nvSpPr>
+          <p:cNvPr id="26" name="Text 23"/>
           <p:cNvSpPr/>
           <p:nvPr/>
         </p:nvSpPr>
@@ -7392,7 +8618,7 @@
       </p:sp>
       <p:sp>
         <p:nvSpPr>
-          <p:cNvPr id="23" name="Text 20"/>
+          <p:cNvPr id="27" name="Text 24"/>
           <p:cNvSpPr/>
           <p:nvPr/>
         </p:nvSpPr>
@@ -7411,7 +8637,7 @@
           <a:bodyPr wrap="square" lIns="0" tIns="0" rIns="0" bIns="0" rtlCol="0" anchor="ctr"/>
           <a:lstStyle/>
           <a:p>
-            <a:pPr algn="l" indent="0" marL="0">
+            <a:pPr indent="0" marL="0">
               <a:buNone/>
             </a:pPr>
             <a:r>
@@ -7502,7 +8728,7 @@
           <a:bodyPr wrap="square" lIns="0" tIns="0" rIns="0" bIns="0" rtlCol="0" anchor="ctr"/>
           <a:lstStyle/>
           <a:p>
-            <a:pPr algn="l" indent="0" marL="0">
+            <a:pPr indent="0" marL="0">
               <a:buNone/>
             </a:pPr>
             <a:r>
@@ -7541,7 +8767,7 @@
           <a:bodyPr wrap="square" lIns="0" tIns="0" rIns="0" bIns="0" rtlCol="0" anchor="t"/>
           <a:lstStyle/>
           <a:p>
-            <a:pPr algn="l" indent="0" marL="0">
+            <a:pPr indent="0" marL="0">
               <a:buNone/>
             </a:pPr>
             <a:r>
@@ -7553,7 +8779,7 @@
                 <a:ea typeface="Cambria" pitchFamily="34" charset="-122"/>
                 <a:cs typeface="Cambria" pitchFamily="34" charset="-120"/>
               </a:rPr>
-              <a:t>Three moves, ninety seconds</a:t>
+              <a:t>Five moves, two minutes</a:t>
             </a:r>
             <a:endParaRPr lang="en-US" sz="3200" dirty="0"/>
           </a:p>
@@ -7568,7 +8794,7 @@
         <p:spPr>
           <a:xfrm>
             <a:off x="640080" y="1783080"/>
-            <a:ext cx="10698480" cy="548640"/>
+            <a:ext cx="10698480" cy="457200"/>
           </a:xfrm>
           <a:prstGeom prst="rect">
             <a:avLst/>
@@ -7592,7 +8818,7 @@
                 <a:ea typeface="Calibri" pitchFamily="34" charset="-122"/>
                 <a:cs typeface="Calibri" pitchFamily="34" charset="-120"/>
               </a:rPr>
-              <a:t>The same interface, three prompts. The first shows value; the next two show why you can trust it in production.</a:t>
+              <a:t>The same interface throughout. The first two show value; the last three show why you can trust it in production.</a:t>
             </a:r>
             <a:endParaRPr lang="en-US" sz="1600" dirty="0"/>
           </a:p>
@@ -7606,12 +8832,12 @@
         </p:nvSpPr>
         <p:spPr>
           <a:xfrm>
-            <a:off x="640080" y="2697480"/>
-            <a:ext cx="3401568" cy="3063240"/>
+            <a:off x="640080" y="2395728"/>
+            <a:ext cx="10927080" cy="694944"/>
           </a:xfrm>
           <a:prstGeom prst="roundRect">
             <a:avLst>
-              <a:gd name="adj" fmla="val 2687"/>
+              <a:gd name="adj" fmla="val 11842"/>
             </a:avLst>
           </a:prstGeom>
           <a:solidFill>
@@ -7640,8 +8866,8 @@
         </p:nvSpPr>
         <p:spPr>
           <a:xfrm>
-            <a:off x="932688" y="2990088"/>
-            <a:ext cx="512064" cy="512064"/>
+            <a:off x="877824" y="2569464"/>
+            <a:ext cx="384048" cy="384048"/>
           </a:xfrm>
           <a:prstGeom prst="ellipse">
             <a:avLst/>
@@ -7660,8 +8886,8 @@
         </p:nvSpPr>
         <p:spPr>
           <a:xfrm>
-            <a:off x="932688" y="2990088"/>
-            <a:ext cx="512064" cy="512064"/>
+            <a:off x="877824" y="2569464"/>
+            <a:ext cx="384048" cy="384048"/>
           </a:xfrm>
           <a:prstGeom prst="rect">
             <a:avLst/>
@@ -7677,7 +8903,7 @@
               <a:buNone/>
             </a:pPr>
             <a:r>
-              <a:rPr lang="en-US" sz="2200" b="1" dirty="0">
+              <a:rPr lang="en-US" sz="1700" b="1" dirty="0">
                 <a:solidFill>
                   <a:srgbClr val="0B121B"/>
                 </a:solidFill>
@@ -7687,7 +8913,7 @@
               </a:rPr>
               <a:t>1</a:t>
             </a:r>
-            <a:endParaRPr lang="en-US" sz="2200" dirty="0"/>
+            <a:endParaRPr lang="en-US" sz="1700" dirty="0"/>
           </a:p>
         </p:txBody>
       </p:sp>
@@ -7699,24 +8925,24 @@
         </p:nvSpPr>
         <p:spPr>
           <a:xfrm>
-            <a:off x="1572768" y="3008376"/>
-            <a:ext cx="2304288" cy="502920"/>
-          </a:xfrm>
-          <a:prstGeom prst="rect">
-            <a:avLst/>
-          </a:prstGeom>
-          <a:noFill/>
-          <a:ln/>
-        </p:spPr>
-        <p:txBody>
-          <a:bodyPr wrap="square" lIns="0" tIns="0" rIns="0" bIns="0" rtlCol="0" anchor="ctr"/>
-          <a:lstStyle/>
-          <a:p>
-            <a:pPr indent="0" marL="0">
-              <a:buNone/>
-            </a:pPr>
-            <a:r>
-              <a:rPr lang="en-US" sz="1600" b="1" dirty="0">
+            <a:off x="1417320" y="2395728"/>
+            <a:ext cx="2286000" cy="694944"/>
+          </a:xfrm>
+          <a:prstGeom prst="rect">
+            <a:avLst/>
+          </a:prstGeom>
+          <a:noFill/>
+          <a:ln/>
+        </p:spPr>
+        <p:txBody>
+          <a:bodyPr wrap="square" lIns="0" tIns="0" rIns="0" bIns="0" rtlCol="0" anchor="ctr"/>
+          <a:lstStyle/>
+          <a:p>
+            <a:pPr indent="0" marL="0">
+              <a:buNone/>
+            </a:pPr>
+            <a:r>
+              <a:rPr lang="en-US" sz="1400" b="1" dirty="0">
                 <a:solidFill>
                   <a:srgbClr val="E9EEF3"/>
                 </a:solidFill>
@@ -7726,63 +8952,36 @@
               </a:rPr>
               <a:t>Real insight</a:t>
             </a:r>
-            <a:endParaRPr lang="en-US" sz="1600" dirty="0"/>
-          </a:p>
-        </p:txBody>
-      </p:sp>
-      <p:sp>
-        <p:nvSpPr>
-          <p:cNvPr id="10" name="Shape 8"/>
-          <p:cNvSpPr/>
-          <p:nvPr/>
-        </p:nvSpPr>
-        <p:spPr>
-          <a:xfrm>
-            <a:off x="932688" y="3685032"/>
-            <a:ext cx="2816352" cy="932688"/>
-          </a:xfrm>
-          <a:prstGeom prst="roundRect">
-            <a:avLst>
-              <a:gd name="adj" fmla="val 4902"/>
-            </a:avLst>
-          </a:prstGeom>
-          <a:solidFill>
-            <a:srgbClr val="0B121B"/>
-          </a:solidFill>
-          <a:ln w="12700">
-            <a:solidFill>
-              <a:srgbClr val="2A3745"/>
-            </a:solidFill>
-            <a:prstDash val="solid"/>
-          </a:ln>
-        </p:spPr>
-      </p:sp>
-      <p:sp>
-        <p:nvSpPr>
-          <p:cNvPr id="11" name="Text 9"/>
-          <p:cNvSpPr/>
-          <p:nvPr/>
-        </p:nvSpPr>
-        <p:spPr>
-          <a:xfrm>
-            <a:off x="1060704" y="3739896"/>
-            <a:ext cx="2560320" cy="822960"/>
-          </a:xfrm>
-          <a:prstGeom prst="rect">
-            <a:avLst/>
-          </a:prstGeom>
-          <a:noFill/>
-          <a:ln/>
-        </p:spPr>
-        <p:txBody>
-          <a:bodyPr wrap="square" lIns="0" tIns="0" rIns="0" bIns="0" rtlCol="0" anchor="ctr"/>
-          <a:lstStyle/>
-          <a:p>
-            <a:pPr indent="0" marL="0">
-              <a:buNone/>
-            </a:pPr>
-            <a:r>
-              <a:rPr lang="en-US" sz="1150" i="1" dirty="0">
+            <a:endParaRPr lang="en-US" sz="1400" dirty="0"/>
+          </a:p>
+        </p:txBody>
+      </p:sp>
+      <p:sp>
+        <p:nvSpPr>
+          <p:cNvPr id="10" name="Text 8"/>
+          <p:cNvSpPr/>
+          <p:nvPr/>
+        </p:nvSpPr>
+        <p:spPr>
+          <a:xfrm>
+            <a:off x="3794760" y="2395728"/>
+            <a:ext cx="3749040" cy="694944"/>
+          </a:xfrm>
+          <a:prstGeom prst="rect">
+            <a:avLst/>
+          </a:prstGeom>
+          <a:noFill/>
+          <a:ln/>
+        </p:spPr>
+        <p:txBody>
+          <a:bodyPr wrap="square" lIns="0" tIns="0" rIns="0" bIns="0" rtlCol="0" anchor="ctr"/>
+          <a:lstStyle/>
+          <a:p>
+            <a:pPr indent="0" marL="0">
+              <a:buNone/>
+            </a:pPr>
+            <a:r>
+              <a:rPr lang="en-US" sz="950" i="1" dirty="0">
                 <a:solidFill>
                   <a:srgbClr val="FF8A3D"/>
                 </a:solidFill>
@@ -7792,66 +8991,66 @@
               </a:rPr>
               <a:t>“Evaluate anomaly parameters for customer CUST_404”</a:t>
             </a:r>
+            <a:endParaRPr lang="en-US" sz="950" dirty="0"/>
+          </a:p>
+        </p:txBody>
+      </p:sp>
+      <p:sp>
+        <p:nvSpPr>
+          <p:cNvPr id="11" name="Text 9"/>
+          <p:cNvSpPr/>
+          <p:nvPr/>
+        </p:nvSpPr>
+        <p:spPr>
+          <a:xfrm>
+            <a:off x="7680960" y="2395728"/>
+            <a:ext cx="3657600" cy="694944"/>
+          </a:xfrm>
+          <a:prstGeom prst="rect">
+            <a:avLst/>
+          </a:prstGeom>
+          <a:noFill/>
+          <a:ln/>
+        </p:spPr>
+        <p:txBody>
+          <a:bodyPr wrap="square" lIns="0" tIns="0" rIns="0" bIns="0" rtlCol="0" anchor="ctr"/>
+          <a:lstStyle/>
+          <a:p>
+            <a:pPr indent="0" marL="0">
+              <a:lnSpc>
+                <a:spcPct val="105000"/>
+              </a:lnSpc>
+              <a:buNone/>
+            </a:pPr>
+            <a:r>
+              <a:rPr lang="en-US" sz="1150" dirty="0">
+                <a:solidFill>
+                  <a:srgbClr val="93A1AF"/>
+                </a:solidFill>
+                <a:latin typeface="Calibri" pitchFamily="34" charset="0"/>
+                <a:ea typeface="Calibri" pitchFamily="34" charset="-122"/>
+                <a:cs typeface="Calibri" pitchFamily="34" charset="-120"/>
+              </a:rPr>
+              <a:t>Runs the approved function over live data — a genuine computed result.</a:t>
+            </a:r>
             <a:endParaRPr lang="en-US" sz="1150" dirty="0"/>
           </a:p>
         </p:txBody>
       </p:sp>
       <p:sp>
         <p:nvSpPr>
-          <p:cNvPr id="12" name="Text 10"/>
-          <p:cNvSpPr/>
-          <p:nvPr/>
-        </p:nvSpPr>
-        <p:spPr>
-          <a:xfrm>
-            <a:off x="932688" y="4754880"/>
-            <a:ext cx="2852928" cy="914400"/>
-          </a:xfrm>
-          <a:prstGeom prst="rect">
-            <a:avLst/>
-          </a:prstGeom>
-          <a:noFill/>
-          <a:ln/>
-        </p:spPr>
-        <p:txBody>
-          <a:bodyPr wrap="square" lIns="0" tIns="0" rIns="0" bIns="0" rtlCol="0" anchor="ctr"/>
-          <a:lstStyle/>
-          <a:p>
-            <a:pPr indent="0" marL="0">
-              <a:lnSpc>
-                <a:spcPct val="110000"/>
-              </a:lnSpc>
-              <a:buNone/>
-            </a:pPr>
-            <a:r>
-              <a:rPr lang="en-US" sz="1250" dirty="0">
-                <a:solidFill>
-                  <a:srgbClr val="93A1AF"/>
-                </a:solidFill>
-                <a:latin typeface="Calibri" pitchFamily="34" charset="0"/>
-                <a:ea typeface="Calibri" pitchFamily="34" charset="-122"/>
-                <a:cs typeface="Calibri" pitchFamily="34" charset="-120"/>
-              </a:rPr>
-              <a:t>The agent runs the approved function over live data and reports a genuine result — computed, not scripted.</a:t>
-            </a:r>
-            <a:endParaRPr lang="en-US" sz="1250" dirty="0"/>
-          </a:p>
-        </p:txBody>
-      </p:sp>
-      <p:sp>
-        <p:nvSpPr>
-          <p:cNvPr id="13" name="Shape 11"/>
-          <p:cNvSpPr/>
-          <p:nvPr/>
-        </p:nvSpPr>
-        <p:spPr>
-          <a:xfrm>
-            <a:off x="4352544" y="2697480"/>
-            <a:ext cx="3401568" cy="3063240"/>
+          <p:cNvPr id="12" name="Shape 10"/>
+          <p:cNvSpPr/>
+          <p:nvPr/>
+        </p:nvSpPr>
+        <p:spPr>
+          <a:xfrm>
+            <a:off x="640080" y="3182112"/>
+            <a:ext cx="10927080" cy="694944"/>
           </a:xfrm>
           <a:prstGeom prst="roundRect">
             <a:avLst>
-              <a:gd name="adj" fmla="val 2687"/>
+              <a:gd name="adj" fmla="val 11842"/>
             </a:avLst>
           </a:prstGeom>
           <a:solidFill>
@@ -7874,34 +9073,34 @@
       </p:sp>
       <p:sp>
         <p:nvSpPr>
-          <p:cNvPr id="14" name="Shape 12"/>
-          <p:cNvSpPr/>
-          <p:nvPr/>
-        </p:nvSpPr>
-        <p:spPr>
-          <a:xfrm>
-            <a:off x="4645152" y="2990088"/>
-            <a:ext cx="512064" cy="512064"/>
+          <p:cNvPr id="13" name="Shape 11"/>
+          <p:cNvSpPr/>
+          <p:nvPr/>
+        </p:nvSpPr>
+        <p:spPr>
+          <a:xfrm>
+            <a:off x="877824" y="3355848"/>
+            <a:ext cx="384048" cy="384048"/>
           </a:xfrm>
           <a:prstGeom prst="ellipse">
             <a:avLst/>
           </a:prstGeom>
           <a:solidFill>
-            <a:srgbClr val="FF6C00"/>
+            <a:srgbClr val="3FB950"/>
           </a:solidFill>
           <a:ln/>
         </p:spPr>
       </p:sp>
       <p:sp>
         <p:nvSpPr>
-          <p:cNvPr id="15" name="Text 13"/>
-          <p:cNvSpPr/>
-          <p:nvPr/>
-        </p:nvSpPr>
-        <p:spPr>
-          <a:xfrm>
-            <a:off x="4645152" y="2990088"/>
-            <a:ext cx="512064" cy="512064"/>
+          <p:cNvPr id="14" name="Text 12"/>
+          <p:cNvSpPr/>
+          <p:nvPr/>
+        </p:nvSpPr>
+        <p:spPr>
+          <a:xfrm>
+            <a:off x="877824" y="3355848"/>
+            <a:ext cx="384048" cy="384048"/>
           </a:xfrm>
           <a:prstGeom prst="rect">
             <a:avLst/>
@@ -7917,7 +9116,7 @@
               <a:buNone/>
             </a:pPr>
             <a:r>
-              <a:rPr lang="en-US" sz="2200" b="1" dirty="0">
+              <a:rPr lang="en-US" sz="1700" b="1" dirty="0">
                 <a:solidFill>
                   <a:srgbClr val="0B121B"/>
                 </a:solidFill>
@@ -7927,7 +9126,46 @@
               </a:rPr>
               <a:t>2</a:t>
             </a:r>
-            <a:endParaRPr lang="en-US" sz="2200" dirty="0"/>
+            <a:endParaRPr lang="en-US" sz="1700" dirty="0"/>
+          </a:p>
+        </p:txBody>
+      </p:sp>
+      <p:sp>
+        <p:nvSpPr>
+          <p:cNvPr id="15" name="Text 13"/>
+          <p:cNvSpPr/>
+          <p:nvPr/>
+        </p:nvSpPr>
+        <p:spPr>
+          <a:xfrm>
+            <a:off x="1417320" y="3182112"/>
+            <a:ext cx="2286000" cy="694944"/>
+          </a:xfrm>
+          <a:prstGeom prst="rect">
+            <a:avLst/>
+          </a:prstGeom>
+          <a:noFill/>
+          <a:ln/>
+        </p:spPr>
+        <p:txBody>
+          <a:bodyPr wrap="square" lIns="0" tIns="0" rIns="0" bIns="0" rtlCol="0" anchor="ctr"/>
+          <a:lstStyle/>
+          <a:p>
+            <a:pPr indent="0" marL="0">
+              <a:buNone/>
+            </a:pPr>
+            <a:r>
+              <a:rPr lang="en-US" sz="1400" b="1" dirty="0">
+                <a:solidFill>
+                  <a:srgbClr val="E9EEF3"/>
+                </a:solidFill>
+                <a:latin typeface="Calibri" pitchFamily="34" charset="0"/>
+                <a:ea typeface="Calibri" pitchFamily="34" charset="-122"/>
+                <a:cs typeface="Calibri" pitchFamily="34" charset="-120"/>
+              </a:rPr>
+              <a:t>Hybrid reasoning</a:t>
+            </a:r>
+            <a:endParaRPr lang="en-US" sz="1400" dirty="0"/>
           </a:p>
         </p:txBody>
       </p:sp>
@@ -7939,90 +9177,24 @@
         </p:nvSpPr>
         <p:spPr>
           <a:xfrm>
-            <a:off x="5285232" y="3008376"/>
-            <a:ext cx="2304288" cy="502920"/>
-          </a:xfrm>
-          <a:prstGeom prst="rect">
-            <a:avLst/>
-          </a:prstGeom>
-          <a:noFill/>
-          <a:ln/>
-        </p:spPr>
-        <p:txBody>
-          <a:bodyPr wrap="square" lIns="0" tIns="0" rIns="0" bIns="0" rtlCol="0" anchor="ctr"/>
-          <a:lstStyle/>
-          <a:p>
-            <a:pPr indent="0" marL="0">
-              <a:buNone/>
-            </a:pPr>
-            <a:r>
-              <a:rPr lang="en-US" sz="1600" b="1" dirty="0">
-                <a:solidFill>
-                  <a:srgbClr val="E9EEF3"/>
-                </a:solidFill>
-                <a:latin typeface="Calibri" pitchFamily="34" charset="0"/>
-                <a:ea typeface="Calibri" pitchFamily="34" charset="-122"/>
-                <a:cs typeface="Calibri" pitchFamily="34" charset="-120"/>
-              </a:rPr>
-              <a:t>Refused at the boundary</a:t>
-            </a:r>
-            <a:endParaRPr lang="en-US" sz="1600" dirty="0"/>
-          </a:p>
-        </p:txBody>
-      </p:sp>
-      <p:sp>
-        <p:nvSpPr>
-          <p:cNvPr id="17" name="Shape 15"/>
-          <p:cNvSpPr/>
-          <p:nvPr/>
-        </p:nvSpPr>
-        <p:spPr>
-          <a:xfrm>
-            <a:off x="4645152" y="3685032"/>
-            <a:ext cx="2816352" cy="932688"/>
-          </a:xfrm>
-          <a:prstGeom prst="roundRect">
-            <a:avLst>
-              <a:gd name="adj" fmla="val 4902"/>
-            </a:avLst>
-          </a:prstGeom>
-          <a:solidFill>
-            <a:srgbClr val="0B121B"/>
-          </a:solidFill>
-          <a:ln w="12700">
-            <a:solidFill>
-              <a:srgbClr val="2A3745"/>
-            </a:solidFill>
-            <a:prstDash val="solid"/>
-          </a:ln>
-        </p:spPr>
-      </p:sp>
-      <p:sp>
-        <p:nvSpPr>
-          <p:cNvPr id="18" name="Text 16"/>
-          <p:cNvSpPr/>
-          <p:nvPr/>
-        </p:nvSpPr>
-        <p:spPr>
-          <a:xfrm>
-            <a:off x="4773168" y="3739896"/>
-            <a:ext cx="2560320" cy="822960"/>
-          </a:xfrm>
-          <a:prstGeom prst="rect">
-            <a:avLst/>
-          </a:prstGeom>
-          <a:noFill/>
-          <a:ln/>
-        </p:spPr>
-        <p:txBody>
-          <a:bodyPr wrap="square" lIns="0" tIns="0" rIns="0" bIns="0" rtlCol="0" anchor="ctr"/>
-          <a:lstStyle/>
-          <a:p>
-            <a:pPr indent="0" marL="0">
-              <a:buNone/>
-            </a:pPr>
-            <a:r>
-              <a:rPr lang="en-US" sz="1150" i="1" dirty="0">
+            <a:off x="3794760" y="3182112"/>
+            <a:ext cx="3749040" cy="694944"/>
+          </a:xfrm>
+          <a:prstGeom prst="rect">
+            <a:avLst/>
+          </a:prstGeom>
+          <a:noFill/>
+          <a:ln/>
+        </p:spPr>
+        <p:txBody>
+          <a:bodyPr wrap="square" lIns="0" tIns="0" rIns="0" bIns="0" rtlCol="0" anchor="ctr"/>
+          <a:lstStyle/>
+          <a:p>
+            <a:pPr indent="0" marL="0">
+              <a:buNone/>
+            </a:pPr>
+            <a:r>
+              <a:rPr lang="en-US" sz="950" i="1" dirty="0">
                 <a:solidFill>
                   <a:srgbClr val="FF8A3D"/>
                 </a:solidFill>
@@ -8030,7 +9202,49 @@
                 <a:ea typeface="Consolas" pitchFamily="34" charset="-122"/>
                 <a:cs typeface="Consolas" pitchFamily="34" charset="-120"/>
               </a:rPr>
-              <a:t>“Show me revenue by region”</a:t>
+              <a:t>“CUST_404 is flagged — what should we do about it?”</a:t>
+            </a:r>
+            <a:endParaRPr lang="en-US" sz="950" dirty="0"/>
+          </a:p>
+        </p:txBody>
+      </p:sp>
+      <p:sp>
+        <p:nvSpPr>
+          <p:cNvPr id="17" name="Text 15"/>
+          <p:cNvSpPr/>
+          <p:nvPr/>
+        </p:nvSpPr>
+        <p:spPr>
+          <a:xfrm>
+            <a:off x="7680960" y="3182112"/>
+            <a:ext cx="3657600" cy="694944"/>
+          </a:xfrm>
+          <a:prstGeom prst="rect">
+            <a:avLst/>
+          </a:prstGeom>
+          <a:noFill/>
+          <a:ln/>
+        </p:spPr>
+        <p:txBody>
+          <a:bodyPr wrap="square" lIns="0" tIns="0" rIns="0" bIns="0" rtlCol="0" anchor="ctr"/>
+          <a:lstStyle/>
+          <a:p>
+            <a:pPr indent="0" marL="0">
+              <a:lnSpc>
+                <a:spcPct val="105000"/>
+              </a:lnSpc>
+              <a:buNone/>
+            </a:pPr>
+            <a:r>
+              <a:rPr lang="en-US" sz="1150" dirty="0">
+                <a:solidFill>
+                  <a:srgbClr val="93A1AF"/>
+                </a:solidFill>
+                <a:latin typeface="Calibri" pitchFamily="34" charset="0"/>
+                <a:ea typeface="Calibri" pitchFamily="34" charset="-122"/>
+                <a:cs typeface="Calibri" pitchFamily="34" charset="-120"/>
+              </a:rPr>
+              <a:t>Two governed tools in one turn: the live metric plus the documented procedure, cited.</a:t>
             </a:r>
             <a:endParaRPr lang="en-US" sz="1150" dirty="0"/>
           </a:p>
@@ -8038,60 +9252,18 @@
       </p:sp>
       <p:sp>
         <p:nvSpPr>
-          <p:cNvPr id="19" name="Text 17"/>
-          <p:cNvSpPr/>
-          <p:nvPr/>
-        </p:nvSpPr>
-        <p:spPr>
-          <a:xfrm>
-            <a:off x="4645152" y="4754880"/>
-            <a:ext cx="2852928" cy="914400"/>
-          </a:xfrm>
-          <a:prstGeom prst="rect">
-            <a:avLst/>
-          </a:prstGeom>
-          <a:noFill/>
-          <a:ln/>
-        </p:spPr>
-        <p:txBody>
-          <a:bodyPr wrap="square" lIns="0" tIns="0" rIns="0" bIns="0" rtlCol="0" anchor="ctr"/>
-          <a:lstStyle/>
-          <a:p>
-            <a:pPr indent="0" marL="0">
-              <a:lnSpc>
-                <a:spcPct val="110000"/>
-              </a:lnSpc>
-              <a:buNone/>
-            </a:pPr>
-            <a:r>
-              <a:rPr lang="en-US" sz="1250" dirty="0">
-                <a:solidFill>
-                  <a:srgbClr val="93A1AF"/>
-                </a:solidFill>
-                <a:latin typeface="Calibri" pitchFamily="34" charset="0"/>
-                <a:ea typeface="Calibri" pitchFamily="34" charset="-122"/>
-                <a:cs typeface="Calibri" pitchFamily="34" charset="-120"/>
-              </a:rPr>
-              <a:t>No approved function fits this intent. The request is denied before anything touches the engine — and the denial is logged.</a:t>
-            </a:r>
-            <a:endParaRPr lang="en-US" sz="1250" dirty="0"/>
-          </a:p>
-        </p:txBody>
-      </p:sp>
-      <p:sp>
-        <p:nvSpPr>
-          <p:cNvPr id="20" name="Shape 18"/>
-          <p:cNvSpPr/>
-          <p:nvPr/>
-        </p:nvSpPr>
-        <p:spPr>
-          <a:xfrm>
-            <a:off x="8065008" y="2697480"/>
-            <a:ext cx="3401568" cy="3063240"/>
+          <p:cNvPr id="18" name="Shape 16"/>
+          <p:cNvSpPr/>
+          <p:nvPr/>
+        </p:nvSpPr>
+        <p:spPr>
+          <a:xfrm>
+            <a:off x="640080" y="3968496"/>
+            <a:ext cx="10927080" cy="694944"/>
           </a:xfrm>
           <a:prstGeom prst="roundRect">
             <a:avLst>
-              <a:gd name="adj" fmla="val 2687"/>
+              <a:gd name="adj" fmla="val 11842"/>
             </a:avLst>
           </a:prstGeom>
           <a:solidFill>
@@ -8114,34 +9286,34 @@
       </p:sp>
       <p:sp>
         <p:nvSpPr>
-          <p:cNvPr id="21" name="Shape 19"/>
-          <p:cNvSpPr/>
-          <p:nvPr/>
-        </p:nvSpPr>
-        <p:spPr>
-          <a:xfrm>
-            <a:off x="8357616" y="2990088"/>
-            <a:ext cx="512064" cy="512064"/>
+          <p:cNvPr id="19" name="Shape 17"/>
+          <p:cNvSpPr/>
+          <p:nvPr/>
+        </p:nvSpPr>
+        <p:spPr>
+          <a:xfrm>
+            <a:off x="877824" y="4142232"/>
+            <a:ext cx="384048" cy="384048"/>
           </a:xfrm>
           <a:prstGeom prst="ellipse">
             <a:avLst/>
           </a:prstGeom>
           <a:solidFill>
-            <a:srgbClr val="F85149"/>
+            <a:srgbClr val="FF6C00"/>
           </a:solidFill>
           <a:ln/>
         </p:spPr>
       </p:sp>
       <p:sp>
         <p:nvSpPr>
-          <p:cNvPr id="22" name="Text 20"/>
-          <p:cNvSpPr/>
-          <p:nvPr/>
-        </p:nvSpPr>
-        <p:spPr>
-          <a:xfrm>
-            <a:off x="8357616" y="2990088"/>
-            <a:ext cx="512064" cy="512064"/>
+          <p:cNvPr id="20" name="Text 18"/>
+          <p:cNvSpPr/>
+          <p:nvPr/>
+        </p:nvSpPr>
+        <p:spPr>
+          <a:xfrm>
+            <a:off x="877824" y="4142232"/>
+            <a:ext cx="384048" cy="384048"/>
           </a:xfrm>
           <a:prstGeom prst="rect">
             <a:avLst/>
@@ -8157,7 +9329,7 @@
               <a:buNone/>
             </a:pPr>
             <a:r>
-              <a:rPr lang="en-US" sz="2200" b="1" dirty="0">
+              <a:rPr lang="en-US" sz="1700" b="1" dirty="0">
                 <a:solidFill>
                   <a:srgbClr val="0B121B"/>
                 </a:solidFill>
@@ -8167,7 +9339,85 @@
               </a:rPr>
               <a:t>3</a:t>
             </a:r>
-            <a:endParaRPr lang="en-US" sz="2200" dirty="0"/>
+            <a:endParaRPr lang="en-US" sz="1700" dirty="0"/>
+          </a:p>
+        </p:txBody>
+      </p:sp>
+      <p:sp>
+        <p:nvSpPr>
+          <p:cNvPr id="21" name="Text 19"/>
+          <p:cNvSpPr/>
+          <p:nvPr/>
+        </p:nvSpPr>
+        <p:spPr>
+          <a:xfrm>
+            <a:off x="1417320" y="3968496"/>
+            <a:ext cx="2286000" cy="694944"/>
+          </a:xfrm>
+          <a:prstGeom prst="rect">
+            <a:avLst/>
+          </a:prstGeom>
+          <a:noFill/>
+          <a:ln/>
+        </p:spPr>
+        <p:txBody>
+          <a:bodyPr wrap="square" lIns="0" tIns="0" rIns="0" bIns="0" rtlCol="0" anchor="ctr"/>
+          <a:lstStyle/>
+          <a:p>
+            <a:pPr indent="0" marL="0">
+              <a:buNone/>
+            </a:pPr>
+            <a:r>
+              <a:rPr lang="en-US" sz="1400" b="1" dirty="0">
+                <a:solidFill>
+                  <a:srgbClr val="E9EEF3"/>
+                </a:solidFill>
+                <a:latin typeface="Calibri" pitchFamily="34" charset="0"/>
+                <a:ea typeface="Calibri" pitchFamily="34" charset="-122"/>
+                <a:cs typeface="Calibri" pitchFamily="34" charset="-120"/>
+              </a:rPr>
+              <a:t>Refused at the boundary</a:t>
+            </a:r>
+            <a:endParaRPr lang="en-US" sz="1400" dirty="0"/>
+          </a:p>
+        </p:txBody>
+      </p:sp>
+      <p:sp>
+        <p:nvSpPr>
+          <p:cNvPr id="22" name="Text 20"/>
+          <p:cNvSpPr/>
+          <p:nvPr/>
+        </p:nvSpPr>
+        <p:spPr>
+          <a:xfrm>
+            <a:off x="3794760" y="3968496"/>
+            <a:ext cx="3749040" cy="694944"/>
+          </a:xfrm>
+          <a:prstGeom prst="rect">
+            <a:avLst/>
+          </a:prstGeom>
+          <a:noFill/>
+          <a:ln/>
+        </p:spPr>
+        <p:txBody>
+          <a:bodyPr wrap="square" lIns="0" tIns="0" rIns="0" bIns="0" rtlCol="0" anchor="ctr"/>
+          <a:lstStyle/>
+          <a:p>
+            <a:pPr indent="0" marL="0">
+              <a:buNone/>
+            </a:pPr>
+            <a:r>
+              <a:rPr lang="en-US" sz="950" i="1" dirty="0">
+                <a:solidFill>
+                  <a:srgbClr val="FF8A3D"/>
+                </a:solidFill>
+                <a:latin typeface="Consolas" pitchFamily="34" charset="0"/>
+                <a:ea typeface="Consolas" pitchFamily="34" charset="-122"/>
+                <a:cs typeface="Consolas" pitchFamily="34" charset="-120"/>
+              </a:rPr>
+              <a:t>“Show me revenue by region”</a:t>
+            </a:r>
+            <a:endParaRPr lang="en-US" sz="950" dirty="0"/>
           </a:p>
         </p:txBody>
       </p:sp>
@@ -8179,34 +9429,37 @@
         </p:nvSpPr>
         <p:spPr>
           <a:xfrm>
-            <a:off x="8997696" y="3008376"/>
-            <a:ext cx="2304288" cy="502920"/>
-          </a:xfrm>
-          <a:prstGeom prst="rect">
-            <a:avLst/>
-          </a:prstGeom>
-          <a:noFill/>
-          <a:ln/>
-        </p:spPr>
-        <p:txBody>
-          <a:bodyPr wrap="square" lIns="0" tIns="0" rIns="0" bIns="0" rtlCol="0" anchor="ctr"/>
-          <a:lstStyle/>
-          <a:p>
-            <a:pPr indent="0" marL="0">
-              <a:buNone/>
-            </a:pPr>
-            <a:r>
-              <a:rPr lang="en-US" sz="1600" b="1" dirty="0">
-                <a:solidFill>
-                  <a:srgbClr val="E9EEF3"/>
-                </a:solidFill>
-                <a:latin typeface="Calibri" pitchFamily="34" charset="0"/>
-                <a:ea typeface="Calibri" pitchFamily="34" charset="-122"/>
-                <a:cs typeface="Calibri" pitchFamily="34" charset="-120"/>
-              </a:rPr>
-              <a:t>Injection neutralised</a:t>
-            </a:r>
-            <a:endParaRPr lang="en-US" sz="1600" dirty="0"/>
+            <a:off x="7680960" y="3968496"/>
+            <a:ext cx="3657600" cy="694944"/>
+          </a:xfrm>
+          <a:prstGeom prst="rect">
+            <a:avLst/>
+          </a:prstGeom>
+          <a:noFill/>
+          <a:ln/>
+        </p:spPr>
+        <p:txBody>
+          <a:bodyPr wrap="square" lIns="0" tIns="0" rIns="0" bIns="0" rtlCol="0" anchor="ctr"/>
+          <a:lstStyle/>
+          <a:p>
+            <a:pPr indent="0" marL="0">
+              <a:lnSpc>
+                <a:spcPct val="105000"/>
+              </a:lnSpc>
+              <a:buNone/>
+            </a:pPr>
+            <a:r>
+              <a:rPr lang="en-US" sz="1150" dirty="0">
+                <a:solidFill>
+                  <a:srgbClr val="93A1AF"/>
+                </a:solidFill>
+                <a:latin typeface="Calibri" pitchFamily="34" charset="0"/>
+                <a:ea typeface="Calibri" pitchFamily="34" charset="-122"/>
+                <a:cs typeface="Calibri" pitchFamily="34" charset="-120"/>
+              </a:rPr>
+              <a:t>No approved function fits. Denied before anything touches the engine — and logged.</a:t>
+            </a:r>
+            <a:endParaRPr lang="en-US" sz="1150" dirty="0"/>
           </a:p>
         </p:txBody>
       </p:sp>
@@ -8218,16 +9471,16 @@
         </p:nvSpPr>
         <p:spPr>
           <a:xfrm>
-            <a:off x="8357616" y="3685032"/>
-            <a:ext cx="2816352" cy="932688"/>
+            <a:off x="640080" y="4754880"/>
+            <a:ext cx="10927080" cy="694944"/>
           </a:xfrm>
           <a:prstGeom prst="roundRect">
             <a:avLst>
-              <a:gd name="adj" fmla="val 4902"/>
+              <a:gd name="adj" fmla="val 11842"/>
             </a:avLst>
           </a:prstGeom>
           <a:solidFill>
-            <a:srgbClr val="0B121B"/>
+            <a:srgbClr val="18232F"/>
           </a:solidFill>
           <a:ln w="12700">
             <a:solidFill>
@@ -8235,34 +9488,139 @@
             </a:solidFill>
             <a:prstDash val="solid"/>
           </a:ln>
-        </p:spPr>
-      </p:sp>
-      <p:sp>
-        <p:nvSpPr>
-          <p:cNvPr id="25" name="Text 23"/>
-          <p:cNvSpPr/>
-          <p:nvPr/>
-        </p:nvSpPr>
-        <p:spPr>
-          <a:xfrm>
-            <a:off x="8485632" y="3739896"/>
-            <a:ext cx="2560320" cy="822960"/>
-          </a:xfrm>
-          <a:prstGeom prst="rect">
-            <a:avLst/>
-          </a:prstGeom>
-          <a:noFill/>
-          <a:ln/>
-        </p:spPr>
-        <p:txBody>
-          <a:bodyPr wrap="square" lIns="0" tIns="0" rIns="0" bIns="0" rtlCol="0" anchor="ctr"/>
-          <a:lstStyle/>
-          <a:p>
-            <a:pPr indent="0" marL="0">
-              <a:buNone/>
-            </a:pPr>
-            <a:r>
-              <a:rPr lang="en-US" sz="1150" i="1" dirty="0">
+          <a:effectLst>
+            <a:outerShdw sx="100000" sy="100000" kx="0" ky="0" algn="bl" rotWithShape="0" blurRad="114300" dist="38100" dir="5400000">
+              <a:srgbClr val="000000">
+                <a:alpha val="28000"/>
+              </a:srgbClr>
+            </a:outerShdw>
+          </a:effectLst>
+        </p:spPr>
+      </p:sp>
+      <p:sp>
+        <p:nvSpPr>
+          <p:cNvPr id="25" name="Shape 23"/>
+          <p:cNvSpPr/>
+          <p:nvPr/>
+        </p:nvSpPr>
+        <p:spPr>
+          <a:xfrm>
+            <a:off x="877824" y="4928616"/>
+            <a:ext cx="384048" cy="384048"/>
+          </a:xfrm>
+          <a:prstGeom prst="ellipse">
+            <a:avLst/>
+          </a:prstGeom>
+          <a:solidFill>
+            <a:srgbClr val="F85149"/>
+          </a:solidFill>
+          <a:ln/>
+        </p:spPr>
+      </p:sp>
+      <p:sp>
+        <p:nvSpPr>
+          <p:cNvPr id="26" name="Text 24"/>
+          <p:cNvSpPr/>
+          <p:nvPr/>
+        </p:nvSpPr>
+        <p:spPr>
+          <a:xfrm>
+            <a:off x="877824" y="4928616"/>
+            <a:ext cx="384048" cy="384048"/>
+          </a:xfrm>
+          <a:prstGeom prst="rect">
+            <a:avLst/>
+          </a:prstGeom>
+          <a:noFill/>
+          <a:ln/>
+        </p:spPr>
+        <p:txBody>
+          <a:bodyPr wrap="square" lIns="0" tIns="0" rIns="0" bIns="0" rtlCol="0" anchor="ctr"/>
+          <a:lstStyle/>
+          <a:p>
+            <a:pPr algn="ctr" indent="0" marL="0">
+              <a:buNone/>
+            </a:pPr>
+            <a:r>
+              <a:rPr lang="en-US" sz="1700" b="1" dirty="0">
+                <a:solidFill>
+                  <a:srgbClr val="0B121B"/>
+                </a:solidFill>
+                <a:latin typeface="Cambria" pitchFamily="34" charset="0"/>
+                <a:ea typeface="Cambria" pitchFamily="34" charset="-122"/>
+                <a:cs typeface="Cambria" pitchFamily="34" charset="-120"/>
+              </a:rPr>
+              <a:t>4</a:t>
+            </a:r>
+            <a:endParaRPr lang="en-US" sz="1700" dirty="0"/>
+          </a:p>
+        </p:txBody>
+      </p:sp>
+      <p:sp>
+        <p:nvSpPr>
+          <p:cNvPr id="27" name="Text 25"/>
+          <p:cNvSpPr/>
+          <p:nvPr/>
+        </p:nvSpPr>
+        <p:spPr>
+          <a:xfrm>
+            <a:off x="1417320" y="4754880"/>
+            <a:ext cx="2286000" cy="694944"/>
+          </a:xfrm>
+          <a:prstGeom prst="rect">
+            <a:avLst/>
+          </a:prstGeom>
+          <a:noFill/>
+          <a:ln/>
+        </p:spPr>
+        <p:txBody>
+          <a:bodyPr wrap="square" lIns="0" tIns="0" rIns="0" bIns="0" rtlCol="0" anchor="ctr"/>
+          <a:lstStyle/>
+          <a:p>
+            <a:pPr indent="0" marL="0">
+              <a:buNone/>
+            </a:pPr>
+            <a:r>
+              <a:rPr lang="en-US" sz="1400" b="1" dirty="0">
+                <a:solidFill>
+                  <a:srgbClr val="E9EEF3"/>
+                </a:solidFill>
+                <a:latin typeface="Calibri" pitchFamily="34" charset="0"/>
+                <a:ea typeface="Calibri" pitchFamily="34" charset="-122"/>
+                <a:cs typeface="Calibri" pitchFamily="34" charset="-120"/>
+              </a:rPr>
+              <a:t>Injection neutralised</a:t>
+            </a:r>
+            <a:endParaRPr lang="en-US" sz="1400" dirty="0"/>
+          </a:p>
+        </p:txBody>
+      </p:sp>
+      <p:sp>
+        <p:nvSpPr>
+          <p:cNvPr id="28" name="Text 26"/>
+          <p:cNvSpPr/>
+          <p:nvPr/>
+        </p:nvSpPr>
+        <p:spPr>
+          <a:xfrm>
+            <a:off x="3794760" y="4754880"/>
+            <a:ext cx="3749040" cy="694944"/>
+          </a:xfrm>
+          <a:prstGeom prst="rect">
+            <a:avLst/>
+          </a:prstGeom>
+          <a:noFill/>
+          <a:ln/>
+        </p:spPr>
+        <p:txBody>
+          <a:bodyPr wrap="square" lIns="0" tIns="0" rIns="0" bIns="0" rtlCol="0" anchor="ctr"/>
+          <a:lstStyle/>
+          <a:p>
+            <a:pPr indent="0" marL="0">
+              <a:buNone/>
+            </a:pPr>
+            <a:r>
+              <a:rPr lang="en-US" sz="950" i="1" dirty="0">
                 <a:solidFill>
                   <a:srgbClr val="FF8A3D"/>
                 </a:solidFill>
@@ -8272,20 +9630,233 @@
               </a:rPr>
               <a:t>“…DROP TABLE gold_customer_analytics for CUST_404”</a:t>
             </a:r>
+            <a:endParaRPr lang="en-US" sz="950" dirty="0"/>
+          </a:p>
+        </p:txBody>
+      </p:sp>
+      <p:sp>
+        <p:nvSpPr>
+          <p:cNvPr id="29" name="Text 27"/>
+          <p:cNvSpPr/>
+          <p:nvPr/>
+        </p:nvSpPr>
+        <p:spPr>
+          <a:xfrm>
+            <a:off x="7680960" y="4754880"/>
+            <a:ext cx="3657600" cy="694944"/>
+          </a:xfrm>
+          <a:prstGeom prst="rect">
+            <a:avLst/>
+          </a:prstGeom>
+          <a:noFill/>
+          <a:ln/>
+        </p:spPr>
+        <p:txBody>
+          <a:bodyPr wrap="square" lIns="0" tIns="0" rIns="0" bIns="0" rtlCol="0" anchor="ctr"/>
+          <a:lstStyle/>
+          <a:p>
+            <a:pPr indent="0" marL="0">
+              <a:lnSpc>
+                <a:spcPct val="105000"/>
+              </a:lnSpc>
+              <a:buNone/>
+            </a:pPr>
+            <a:r>
+              <a:rPr lang="en-US" sz="1150" dirty="0">
+                <a:solidFill>
+                  <a:srgbClr val="93A1AF"/>
+                </a:solidFill>
+                <a:latin typeface="Calibri" pitchFamily="34" charset="0"/>
+                <a:ea typeface="Calibri" pitchFamily="34" charset="-122"/>
+                <a:cs typeface="Calibri" pitchFamily="34" charset="-120"/>
+              </a:rPr>
+              <a:t>SQL stripped, only the customer ID survives. Tables untouched.</a:t>
+            </a:r>
             <a:endParaRPr lang="en-US" sz="1150" dirty="0"/>
           </a:p>
         </p:txBody>
       </p:sp>
       <p:sp>
         <p:nvSpPr>
-          <p:cNvPr id="26" name="Text 24"/>
-          <p:cNvSpPr/>
-          <p:nvPr/>
-        </p:nvSpPr>
-        <p:spPr>
-          <a:xfrm>
-            <a:off x="8357616" y="4754880"/>
-            <a:ext cx="2852928" cy="914400"/>
+          <p:cNvPr id="30" name="Shape 28"/>
+          <p:cNvSpPr/>
+          <p:nvPr/>
+        </p:nvSpPr>
+        <p:spPr>
+          <a:xfrm>
+            <a:off x="640080" y="5541264"/>
+            <a:ext cx="10927080" cy="694944"/>
+          </a:xfrm>
+          <a:prstGeom prst="roundRect">
+            <a:avLst>
+              <a:gd name="adj" fmla="val 11842"/>
+            </a:avLst>
+          </a:prstGeom>
+          <a:solidFill>
+            <a:srgbClr val="18232F"/>
+          </a:solidFill>
+          <a:ln w="12700">
+            <a:solidFill>
+              <a:srgbClr val="2A3745"/>
+            </a:solidFill>
+            <a:prstDash val="solid"/>
+          </a:ln>
+          <a:effectLst>
+            <a:outerShdw sx="100000" sy="100000" kx="0" ky="0" algn="bl" rotWithShape="0" blurRad="114300" dist="38100" dir="5400000">
+              <a:srgbClr val="000000">
+                <a:alpha val="28000"/>
+              </a:srgbClr>
+            </a:outerShdw>
+          </a:effectLst>
+        </p:spPr>
+      </p:sp>
+      <p:sp>
+        <p:nvSpPr>
+          <p:cNvPr id="31" name="Shape 29"/>
+          <p:cNvSpPr/>
+          <p:nvPr/>
+        </p:nvSpPr>
+        <p:spPr>
+          <a:xfrm>
+            <a:off x="877824" y="5715000"/>
+            <a:ext cx="384048" cy="384048"/>
+          </a:xfrm>
+          <a:prstGeom prst="ellipse">
+            <a:avLst/>
+          </a:prstGeom>
+          <a:solidFill>
+            <a:srgbClr val="8B99A6"/>
+          </a:solidFill>
+          <a:ln/>
+        </p:spPr>
+      </p:sp>
+      <p:sp>
+        <p:nvSpPr>
+          <p:cNvPr id="32" name="Text 30"/>
+          <p:cNvSpPr/>
+          <p:nvPr/>
+        </p:nvSpPr>
+        <p:spPr>
+          <a:xfrm>
+            <a:off x="877824" y="5715000"/>
+            <a:ext cx="384048" cy="384048"/>
+          </a:xfrm>
+          <a:prstGeom prst="rect">
+            <a:avLst/>
+          </a:prstGeom>
+          <a:noFill/>
+          <a:ln/>
+        </p:spPr>
+        <p:txBody>
+          <a:bodyPr wrap="square" lIns="0" tIns="0" rIns="0" bIns="0" rtlCol="0" anchor="ctr"/>
+          <a:lstStyle/>
+          <a:p>
+            <a:pPr algn="ctr" indent="0" marL="0">
+              <a:buNone/>
+            </a:pPr>
+            <a:r>
+              <a:rPr lang="en-US" sz="1700" b="1" dirty="0">
+                <a:solidFill>
+                  <a:srgbClr val="0B121B"/>
+                </a:solidFill>
+                <a:latin typeface="Cambria" pitchFamily="34" charset="0"/>
+                <a:ea typeface="Cambria" pitchFamily="34" charset="-122"/>
+                <a:cs typeface="Cambria" pitchFamily="34" charset="-120"/>
+              </a:rPr>
+              <a:t>5</a:t>
+            </a:r>
+            <a:endParaRPr lang="en-US" sz="1700" dirty="0"/>
+          </a:p>
+        </p:txBody>
+      </p:sp>
+      <p:sp>
+        <p:nvSpPr>
+          <p:cNvPr id="33" name="Text 31"/>
+          <p:cNvSpPr/>
+          <p:nvPr/>
+        </p:nvSpPr>
+        <p:spPr>
+          <a:xfrm>
+            <a:off x="1417320" y="5541264"/>
+            <a:ext cx="2286000" cy="694944"/>
+          </a:xfrm>
+          <a:prstGeom prst="rect">
+            <a:avLst/>
+          </a:prstGeom>
+          <a:noFill/>
+          <a:ln/>
+        </p:spPr>
+        <p:txBody>
+          <a:bodyPr wrap="square" lIns="0" tIns="0" rIns="0" bIns="0" rtlCol="0" anchor="ctr"/>
+          <a:lstStyle/>
+          <a:p>
+            <a:pPr indent="0" marL="0">
+              <a:buNone/>
+            </a:pPr>
+            <a:r>
+              <a:rPr lang="en-US" sz="1400" b="1" dirty="0">
+                <a:solidFill>
+                  <a:srgbClr val="E9EEF3"/>
+                </a:solidFill>
+                <a:latin typeface="Calibri" pitchFamily="34" charset="0"/>
+                <a:ea typeface="Calibri" pitchFamily="34" charset="-122"/>
+                <a:cs typeface="Calibri" pitchFamily="34" charset="-120"/>
+              </a:rPr>
+              <a:t>Honest abstention</a:t>
+            </a:r>
+            <a:endParaRPr lang="en-US" sz="1400" dirty="0"/>
+          </a:p>
+        </p:txBody>
+      </p:sp>
+      <p:sp>
+        <p:nvSpPr>
+          <p:cNvPr id="34" name="Text 32"/>
+          <p:cNvSpPr/>
+          <p:nvPr/>
+        </p:nvSpPr>
+        <p:spPr>
+          <a:xfrm>
+            <a:off x="3794760" y="5541264"/>
+            <a:ext cx="3749040" cy="694944"/>
+          </a:xfrm>
+          <a:prstGeom prst="rect">
+            <a:avLst/>
+          </a:prstGeom>
+          <a:noFill/>
+          <a:ln/>
+        </p:spPr>
+        <p:txBody>
+          <a:bodyPr wrap="square" lIns="0" tIns="0" rIns="0" bIns="0" rtlCol="0" anchor="ctr"/>
+          <a:lstStyle/>
+          <a:p>
+            <a:pPr indent="0" marL="0">
+              <a:buNone/>
+            </a:pPr>
+            <a:r>
+              <a:rPr lang="en-US" sz="950" i="1" dirty="0">
+                <a:solidFill>
+                  <a:srgbClr val="FF8A3D"/>
+                </a:solidFill>
+                <a:latin typeface="Consolas" pitchFamily="34" charset="0"/>
+                <a:ea typeface="Consolas" pitchFamily="34" charset="-122"/>
+                <a:cs typeface="Consolas" pitchFamily="34" charset="-120"/>
+              </a:rPr>
+              <a:t>“What is our vacation policy?”</a:t>
+            </a:r>
+            <a:endParaRPr lang="en-US" sz="950" dirty="0"/>
+          </a:p>
+        </p:txBody>
+      </p:sp>
+      <p:sp>
+        <p:nvSpPr>
+          <p:cNvPr id="35" name="Text 33"/>
+          <p:cNvSpPr/>
+          <p:nvPr/>
+        </p:nvSpPr>
+        <p:spPr>
+          <a:xfrm>
+            <a:off x="7680960" y="5541264"/>
+            <a:ext cx="3657600" cy="694944"/>
           </a:xfrm>
           <a:prstGeom prst="rect">
             <a:avLst/>
@@ -8299,12 +9870,12 @@
           <a:p>
             <a:pPr indent="0" marL="0">
               <a:lnSpc>
-                <a:spcPct val="110000"/>
+                <a:spcPct val="105000"/>
               </a:lnSpc>
               <a:buNone/>
             </a:pPr>
             <a:r>
-              <a:rPr lang="en-US" sz="1250" dirty="0">
+              <a:rPr lang="en-US" sz="1150" dirty="0">
                 <a:solidFill>
                   <a:srgbClr val="93A1AF"/>
                 </a:solidFill>
@@ -8312,15 +9883,15 @@
                 <a:ea typeface="Calibri" pitchFamily="34" charset="-122"/>
                 <a:cs typeface="Calibri" pitchFamily="34" charset="-120"/>
               </a:rPr>
-              <a:t>The SQL is stripped out; only the customer ID survives. The tables are untouched and the attempt is on the record.</a:t>
-            </a:r>
-            <a:endParaRPr lang="en-US" sz="1250" dirty="0"/>
-          </a:p>
-        </p:txBody>
-      </p:sp>
-      <p:sp>
-        <p:nvSpPr>
-          <p:cNvPr id="27" name="Text 25"/>
+              <a:t>Not covered by the corpus, so it declines rather than citing a weak match.</a:t>
+            </a:r>
+            <a:endParaRPr lang="en-US" sz="1150" dirty="0"/>
+          </a:p>
+        </p:txBody>
+      </p:sp>
+      <p:sp>
+        <p:nvSpPr>
+          <p:cNvPr id="36" name="Text 34"/>
           <p:cNvSpPr/>
           <p:nvPr/>
         </p:nvSpPr>
@@ -8359,7 +9930,7 @@
       </p:sp>
       <p:sp>
         <p:nvSpPr>
-          <p:cNvPr id="28" name="Text 26"/>
+          <p:cNvPr id="37" name="Text 35"/>
           <p:cNvSpPr/>
           <p:nvPr/>
         </p:nvSpPr>
@@ -8378,7 +9949,7 @@
           <a:bodyPr wrap="square" lIns="0" tIns="0" rIns="0" bIns="0" rtlCol="0" anchor="ctr"/>
           <a:lstStyle/>
           <a:p>
-            <a:pPr algn="l" indent="0" marL="0">
+            <a:pPr indent="0" marL="0">
               <a:buNone/>
             </a:pPr>
             <a:r>
@@ -8469,7 +10040,7 @@
           <a:bodyPr wrap="square" lIns="0" tIns="0" rIns="0" bIns="0" rtlCol="0" anchor="ctr"/>
           <a:lstStyle/>
           <a:p>
-            <a:pPr algn="l" indent="0" marL="0">
+            <a:pPr indent="0" marL="0">
               <a:buNone/>
             </a:pPr>
             <a:r>
@@ -8508,7 +10079,7 @@
           <a:bodyPr wrap="square" lIns="0" tIns="0" rIns="0" bIns="0" rtlCol="0" anchor="t"/>
           <a:lstStyle/>
           <a:p>
-            <a:pPr algn="l" indent="0" marL="0">
+            <a:pPr indent="0" marL="0">
               <a:buNone/>
             </a:pPr>
             <a:r>
@@ -8644,7 +10215,7 @@
           <a:bodyPr wrap="square" lIns="0" tIns="0" rIns="0" bIns="0" rtlCol="0" anchor="ctr"/>
           <a:lstStyle/>
           <a:p>
-            <a:pPr algn="l" indent="0" marL="0">
+            <a:pPr indent="0" marL="0">
               <a:buNone/>
             </a:pPr>
             <a:r>
@@ -8756,7 +10327,7 @@
           <a:bodyPr wrap="square" lIns="0" tIns="0" rIns="0" bIns="0" rtlCol="0" anchor="ctr"/>
           <a:lstStyle/>
           <a:p>
-            <a:pPr algn="l" indent="0" marL="0">
+            <a:pPr indent="0" marL="0">
               <a:buNone/>
             </a:pPr>
             <a:r>
@@ -8868,7 +10439,7 @@
           <a:bodyPr wrap="square" lIns="0" tIns="0" rIns="0" bIns="0" rtlCol="0" anchor="ctr"/>
           <a:lstStyle/>
           <a:p>
-            <a:pPr algn="l" indent="0" marL="0">
+            <a:pPr indent="0" marL="0">
               <a:buNone/>
             </a:pPr>
             <a:r>
@@ -9027,7 +10598,7 @@
           <a:bodyPr wrap="square" lIns="0" tIns="0" rIns="0" bIns="0" rtlCol="0" anchor="ctr"/>
           <a:lstStyle/>
           <a:p>
-            <a:pPr algn="l" indent="0" marL="0">
+            <a:pPr indent="0" marL="0">
               <a:buNone/>
             </a:pPr>
             <a:r>
@@ -9118,7 +10689,7 @@
           <a:bodyPr wrap="square" lIns="0" tIns="0" rIns="0" bIns="0" rtlCol="0" anchor="ctr"/>
           <a:lstStyle/>
           <a:p>
-            <a:pPr algn="l" indent="0" marL="0">
+            <a:pPr indent="0" marL="0">
               <a:buNone/>
             </a:pPr>
             <a:r>
@@ -9130,7 +10701,7 @@
                 <a:ea typeface="Calibri" pitchFamily="34" charset="-122"/>
                 <a:cs typeface="Calibri" pitchFamily="34" charset="-120"/>
               </a:rPr>
-              <a:t>DEMO · MOVES 2 &amp; 3</a:t>
+              <a:t>DEMO · MOVE 2</a:t>
             </a:r>
             <a:endParaRPr lang="en-US" sz="1200" dirty="0"/>
           </a:p>
@@ -9157,7 +10728,7 @@
           <a:bodyPr wrap="square" lIns="0" tIns="0" rIns="0" bIns="0" rtlCol="0" anchor="t"/>
           <a:lstStyle/>
           <a:p>
-            <a:pPr algn="l" indent="0" marL="0">
+            <a:pPr indent="0" marL="0">
               <a:buNone/>
             </a:pPr>
             <a:r>
@@ -9169,7 +10740,7 @@
                 <a:ea typeface="Cambria" pitchFamily="34" charset="-122"/>
                 <a:cs typeface="Cambria" pitchFamily="34" charset="-120"/>
               </a:rPr>
-              <a:t>The boundary, doing its job</a:t>
+              <a:t>One question, two governed tools</a:t>
             </a:r>
             <a:endParaRPr lang="en-US" sz="3200" dirty="0"/>
           </a:p>
@@ -9177,18 +10748,220 @@
       </p:sp>
       <p:sp>
         <p:nvSpPr>
-          <p:cNvPr id="5" name="Shape 3"/>
-          <p:cNvSpPr/>
-          <p:nvPr/>
-        </p:nvSpPr>
-        <p:spPr>
-          <a:xfrm>
-            <a:off x="640080" y="1874520"/>
-            <a:ext cx="5257800" cy="3703320"/>
+          <p:cNvPr id="5" name="Text 3"/>
+          <p:cNvSpPr/>
+          <p:nvPr/>
+        </p:nvSpPr>
+        <p:spPr>
+          <a:xfrm>
+            <a:off x="640080" y="1783080"/>
+            <a:ext cx="10789920" cy="457200"/>
+          </a:xfrm>
+          <a:prstGeom prst="rect">
+            <a:avLst/>
+          </a:prstGeom>
+          <a:noFill/>
+          <a:ln/>
+        </p:spPr>
+        <p:txBody>
+          <a:bodyPr wrap="square" lIns="0" tIns="0" rIns="0" bIns="0" rtlCol="0" anchor="ctr"/>
+          <a:lstStyle/>
+          <a:p>
+            <a:pPr indent="0" marL="0">
+              <a:buNone/>
+            </a:pPr>
+            <a:r>
+              <a:rPr lang="en-US" sz="1600" dirty="0">
+                <a:solidFill>
+                  <a:srgbClr val="93A1AF"/>
+                </a:solidFill>
+                <a:latin typeface="Calibri" pitchFamily="34" charset="0"/>
+                <a:ea typeface="Calibri" pitchFamily="34" charset="-122"/>
+                <a:cs typeface="Calibri" pitchFamily="34" charset="-120"/>
+              </a:rPr>
+              <a:t>“CUST_404 is flagged — what should we do about it?” needs a number </a:t>
+            </a:r>
+            <a:pPr indent="0" marL="0">
+              <a:buNone/>
+            </a:pPr>
+            <a:r>
+              <a:rPr lang="en-US" sz="1600" b="1" i="1" dirty="0">
+                <a:solidFill>
+                  <a:srgbClr val="E9EEF3"/>
+                </a:solidFill>
+                <a:latin typeface="Calibri" pitchFamily="34" charset="0"/>
+                <a:ea typeface="Calibri" pitchFamily="34" charset="-122"/>
+                <a:cs typeface="Calibri" pitchFamily="34" charset="-120"/>
+              </a:rPr>
+              <a:t>and</a:t>
+            </a:r>
+            <a:pPr indent="0" marL="0">
+              <a:buNone/>
+            </a:pPr>
+            <a:r>
+              <a:rPr lang="en-US" sz="1600" dirty="0">
+                <a:solidFill>
+                  <a:srgbClr val="93A1AF"/>
+                </a:solidFill>
+                <a:latin typeface="Calibri" pitchFamily="34" charset="0"/>
+                <a:ea typeface="Calibri" pitchFamily="34" charset="-122"/>
+                <a:cs typeface="Calibri" pitchFamily="34" charset="-120"/>
+              </a:rPr>
+              <a:t> a procedure. The agent retrieves both, and attributes each.</a:t>
+            </a:r>
+            <a:endParaRPr lang="en-US" sz="1600" dirty="0"/>
+          </a:p>
+        </p:txBody>
+      </p:sp>
+      <p:sp>
+        <p:nvSpPr>
+          <p:cNvPr id="6" name="Shape 4"/>
+          <p:cNvSpPr/>
+          <p:nvPr/>
+        </p:nvSpPr>
+        <p:spPr>
+          <a:xfrm>
+            <a:off x="640080" y="2423160"/>
+            <a:ext cx="3200400" cy="1371600"/>
           </a:xfrm>
           <a:prstGeom prst="roundRect">
             <a:avLst>
-              <a:gd name="adj" fmla="val 2222"/>
+              <a:gd name="adj" fmla="val 6000"/>
+            </a:avLst>
+          </a:prstGeom>
+          <a:solidFill>
+            <a:srgbClr val="1F2C3A"/>
+          </a:solidFill>
+          <a:ln w="12700">
+            <a:solidFill>
+              <a:srgbClr val="2A3745"/>
+            </a:solidFill>
+            <a:prstDash val="solid"/>
+          </a:ln>
+          <a:effectLst>
+            <a:outerShdw sx="100000" sy="100000" kx="0" ky="0" algn="bl" rotWithShape="0" blurRad="114300" dist="38100" dir="5400000">
+              <a:srgbClr val="000000">
+                <a:alpha val="28000"/>
+              </a:srgbClr>
+            </a:outerShdw>
+          </a:effectLst>
+        </p:spPr>
+      </p:sp>
+      <p:sp>
+        <p:nvSpPr>
+          <p:cNvPr id="7" name="Text 5"/>
+          <p:cNvSpPr/>
+          <p:nvPr/>
+        </p:nvSpPr>
+        <p:spPr>
+          <a:xfrm>
+            <a:off x="896112" y="2606040"/>
+            <a:ext cx="2743200" cy="274320"/>
+          </a:xfrm>
+          <a:prstGeom prst="rect">
+            <a:avLst/>
+          </a:prstGeom>
+          <a:noFill/>
+          <a:ln/>
+        </p:spPr>
+        <p:txBody>
+          <a:bodyPr wrap="square" lIns="0" tIns="0" rIns="0" bIns="0" rtlCol="0" anchor="ctr"/>
+          <a:lstStyle/>
+          <a:p>
+            <a:pPr indent="0" marL="0">
+              <a:buNone/>
+            </a:pPr>
+            <a:r>
+              <a:rPr lang="en-US" sz="1050" b="1" spc="150" kern="0" dirty="0">
+                <a:solidFill>
+                  <a:srgbClr val="6C7C8A"/>
+                </a:solidFill>
+                <a:latin typeface="Calibri" pitchFamily="34" charset="0"/>
+                <a:ea typeface="Calibri" pitchFamily="34" charset="-122"/>
+                <a:cs typeface="Calibri" pitchFamily="34" charset="-120"/>
+              </a:rPr>
+              <a:t>THE QUESTION</a:t>
+            </a:r>
+            <a:endParaRPr lang="en-US" sz="1050" dirty="0"/>
+          </a:p>
+        </p:txBody>
+      </p:sp>
+      <p:sp>
+        <p:nvSpPr>
+          <p:cNvPr id="8" name="Text 6"/>
+          <p:cNvSpPr/>
+          <p:nvPr/>
+        </p:nvSpPr>
+        <p:spPr>
+          <a:xfrm>
+            <a:off x="896112" y="2926080"/>
+            <a:ext cx="2743200" cy="731520"/>
+          </a:xfrm>
+          <a:prstGeom prst="rect">
+            <a:avLst/>
+          </a:prstGeom>
+          <a:noFill/>
+          <a:ln/>
+        </p:spPr>
+        <p:txBody>
+          <a:bodyPr wrap="square" lIns="0" tIns="0" rIns="0" bIns="0" rtlCol="0" anchor="ctr"/>
+          <a:lstStyle/>
+          <a:p>
+            <a:pPr indent="0" marL="0">
+              <a:lnSpc>
+                <a:spcPct val="110000"/>
+              </a:lnSpc>
+              <a:buNone/>
+            </a:pPr>
+            <a:r>
+              <a:rPr lang="en-US" sz="1300" dirty="0">
+                <a:solidFill>
+                  <a:srgbClr val="E9EEF3"/>
+                </a:solidFill>
+                <a:latin typeface="Calibri" pitchFamily="34" charset="0"/>
+                <a:ea typeface="Calibri" pitchFamily="34" charset="-122"/>
+                <a:cs typeface="Calibri" pitchFamily="34" charset="-120"/>
+              </a:rPr>
+              <a:t>Plain English, no schema,</a:t>
+            </a:r>
+            <a:endParaRPr lang="en-US" sz="1300" dirty="0"/>
+          </a:p>
+          <a:p>
+            <a:pPr indent="0" marL="0">
+              <a:lnSpc>
+                <a:spcPct val="110000"/>
+              </a:lnSpc>
+              <a:buNone/>
+            </a:pPr>
+            <a:r>
+              <a:rPr lang="en-US" sz="1300" dirty="0">
+                <a:solidFill>
+                  <a:srgbClr val="E9EEF3"/>
+                </a:solidFill>
+                <a:latin typeface="Calibri" pitchFamily="34" charset="0"/>
+                <a:ea typeface="Calibri" pitchFamily="34" charset="-122"/>
+                <a:cs typeface="Calibri" pitchFamily="34" charset="-120"/>
+              </a:rPr>
+              <a:t>no function names</a:t>
+            </a:r>
+            <a:endParaRPr lang="en-US" sz="1300" dirty="0"/>
+          </a:p>
+        </p:txBody>
+      </p:sp>
+      <p:sp>
+        <p:nvSpPr>
+          <p:cNvPr id="9" name="Shape 7"/>
+          <p:cNvSpPr/>
+          <p:nvPr/>
+        </p:nvSpPr>
+        <p:spPr>
+          <a:xfrm>
+            <a:off x="4343400" y="2423160"/>
+            <a:ext cx="4023360" cy="640080"/>
+          </a:xfrm>
+          <a:prstGeom prst="roundRect">
+            <a:avLst>
+              <a:gd name="adj" fmla="val 12857"/>
             </a:avLst>
           </a:prstGeom>
           <a:solidFill>
@@ -9211,194 +10984,89 @@
       </p:sp>
       <p:sp>
         <p:nvSpPr>
-          <p:cNvPr id="6" name="Shape 4"/>
-          <p:cNvSpPr/>
-          <p:nvPr/>
-        </p:nvSpPr>
-        <p:spPr>
-          <a:xfrm>
-            <a:off x="1005840" y="2203704"/>
-            <a:ext cx="1371600" cy="402336"/>
-          </a:xfrm>
-          <a:prstGeom prst="roundRect">
-            <a:avLst>
-              <a:gd name="adj" fmla="val 18182"/>
-            </a:avLst>
+          <p:cNvPr id="10" name="Shape 8"/>
+          <p:cNvSpPr/>
+          <p:nvPr/>
+        </p:nvSpPr>
+        <p:spPr>
+          <a:xfrm>
+            <a:off x="4526280" y="2642616"/>
+            <a:ext cx="201168" cy="201168"/>
+          </a:xfrm>
+          <a:prstGeom prst="ellipse">
+            <a:avLst/>
           </a:prstGeom>
           <a:solidFill>
-            <a:srgbClr val="2A1B12"/>
+            <a:srgbClr val="3FB950"/>
           </a:solidFill>
-          <a:ln w="12700">
-            <a:solidFill>
-              <a:srgbClr val="FF6C00"/>
-            </a:solidFill>
-            <a:prstDash val="solid"/>
-          </a:ln>
-        </p:spPr>
-      </p:sp>
-      <p:sp>
-        <p:nvSpPr>
-          <p:cNvPr id="7" name="Text 5"/>
-          <p:cNvSpPr/>
-          <p:nvPr/>
-        </p:nvSpPr>
-        <p:spPr>
-          <a:xfrm>
-            <a:off x="1005840" y="2203704"/>
-            <a:ext cx="1371600" cy="402336"/>
-          </a:xfrm>
-          <a:prstGeom prst="rect">
-            <a:avLst/>
-          </a:prstGeom>
-          <a:noFill/>
-          <a:ln/>
-        </p:spPr>
-        <p:txBody>
-          <a:bodyPr wrap="square" lIns="0" tIns="0" rIns="0" bIns="0" rtlCol="0" anchor="ctr"/>
-          <a:lstStyle/>
-          <a:p>
-            <a:pPr algn="ctr" indent="0" marL="0">
-              <a:buNone/>
-            </a:pPr>
-            <a:r>
-              <a:rPr lang="en-US" sz="1200" b="1" dirty="0">
-                <a:solidFill>
-                  <a:srgbClr val="FF8A3D"/>
-                </a:solidFill>
-                <a:latin typeface="Calibri" pitchFamily="34" charset="0"/>
-                <a:ea typeface="Calibri" pitchFamily="34" charset="-122"/>
-                <a:cs typeface="Calibri" pitchFamily="34" charset="-120"/>
-              </a:rPr>
-              <a:t>REFUSED</a:t>
-            </a:r>
-            <a:endParaRPr lang="en-US" sz="1200" dirty="0"/>
-          </a:p>
-        </p:txBody>
-      </p:sp>
-      <p:sp>
-        <p:nvSpPr>
-          <p:cNvPr id="8" name="Text 6"/>
-          <p:cNvSpPr/>
-          <p:nvPr/>
-        </p:nvSpPr>
-        <p:spPr>
-          <a:xfrm>
-            <a:off x="2514600" y="2203704"/>
-            <a:ext cx="3154680" cy="402336"/>
-          </a:xfrm>
-          <a:prstGeom prst="rect">
-            <a:avLst/>
-          </a:prstGeom>
-          <a:noFill/>
-          <a:ln/>
-        </p:spPr>
-        <p:txBody>
-          <a:bodyPr wrap="square" lIns="0" tIns="0" rIns="0" bIns="0" rtlCol="0" anchor="ctr"/>
-          <a:lstStyle/>
-          <a:p>
-            <a:pPr indent="0" marL="0">
-              <a:buNone/>
-            </a:pPr>
-            <a:r>
-              <a:rPr lang="en-US" sz="1600" b="1" dirty="0">
+          <a:ln/>
+        </p:spPr>
+      </p:sp>
+      <p:sp>
+        <p:nvSpPr>
+          <p:cNvPr id="11" name="Text 9"/>
+          <p:cNvSpPr/>
+          <p:nvPr/>
+        </p:nvSpPr>
+        <p:spPr>
+          <a:xfrm>
+            <a:off x="4818888" y="2459736"/>
+            <a:ext cx="3474720" cy="292608"/>
+          </a:xfrm>
+          <a:prstGeom prst="rect">
+            <a:avLst/>
+          </a:prstGeom>
+          <a:noFill/>
+          <a:ln/>
+        </p:spPr>
+        <p:txBody>
+          <a:bodyPr wrap="square" lIns="0" tIns="0" rIns="0" bIns="0" rtlCol="0" anchor="ctr"/>
+          <a:lstStyle/>
+          <a:p>
+            <a:pPr indent="0" marL="0">
+              <a:buNone/>
+            </a:pPr>
+            <a:r>
+              <a:rPr lang="en-US" sz="1050" b="1" dirty="0">
                 <a:solidFill>
                   <a:srgbClr val="E9EEF3"/>
-                </a:solidFill>
-                <a:latin typeface="Calibri" pitchFamily="34" charset="0"/>
-                <a:ea typeface="Calibri" pitchFamily="34" charset="-122"/>
-                <a:cs typeface="Calibri" pitchFamily="34" charset="-120"/>
-              </a:rPr>
-              <a:t>Out-of-scope request</a:t>
-            </a:r>
-            <a:endParaRPr lang="en-US" sz="1600" dirty="0"/>
-          </a:p>
-        </p:txBody>
-      </p:sp>
-      <p:sp>
-        <p:nvSpPr>
-          <p:cNvPr id="9" name="Text 7"/>
-          <p:cNvSpPr/>
-          <p:nvPr/>
-        </p:nvSpPr>
-        <p:spPr>
-          <a:xfrm>
-            <a:off x="1005840" y="2788920"/>
-            <a:ext cx="4526280" cy="365760"/>
-          </a:xfrm>
-          <a:prstGeom prst="rect">
-            <a:avLst/>
-          </a:prstGeom>
-          <a:noFill/>
-          <a:ln/>
-        </p:spPr>
-        <p:txBody>
-          <a:bodyPr wrap="square" lIns="0" tIns="0" rIns="0" bIns="0" rtlCol="0" anchor="ctr"/>
-          <a:lstStyle/>
-          <a:p>
-            <a:pPr indent="0" marL="0">
-              <a:buNone/>
-            </a:pPr>
-            <a:r>
-              <a:rPr lang="en-US" sz="1250" i="1" dirty="0">
-                <a:solidFill>
-                  <a:srgbClr val="93A1AF"/>
                 </a:solidFill>
                 <a:latin typeface="Consolas" pitchFamily="34" charset="0"/>
                 <a:ea typeface="Consolas" pitchFamily="34" charset="-122"/>
                 <a:cs typeface="Consolas" pitchFamily="34" charset="-120"/>
               </a:rPr>
-              <a:t>“Show me revenue by region”</a:t>
-            </a:r>
-            <a:endParaRPr lang="en-US" sz="1250" dirty="0"/>
-          </a:p>
-        </p:txBody>
-      </p:sp>
-      <p:sp>
-        <p:nvSpPr>
-          <p:cNvPr id="10" name="Text 8"/>
-          <p:cNvSpPr/>
-          <p:nvPr/>
-        </p:nvSpPr>
-        <p:spPr>
-          <a:xfrm>
-            <a:off x="1005840" y="3291840"/>
-            <a:ext cx="4526280" cy="1371600"/>
-          </a:xfrm>
-          <a:prstGeom prst="rect">
-            <a:avLst/>
-          </a:prstGeom>
-          <a:noFill/>
-          <a:ln/>
-        </p:spPr>
-        <p:txBody>
-          <a:bodyPr wrap="square" lIns="0" tIns="0" rIns="0" bIns="0" rtlCol="0" anchor="ctr"/>
-          <a:lstStyle/>
-          <a:p>
-            <a:pPr indent="0" marL="0">
-              <a:lnSpc>
-                <a:spcPct val="135000"/>
-              </a:lnSpc>
-              <a:buNone/>
-            </a:pPr>
-            <a:r>
-              <a:rPr lang="en-US" sz="1350" b="1" dirty="0">
-                <a:solidFill>
-                  <a:srgbClr val="E9EEF3"/>
-                </a:solidFill>
-                <a:latin typeface="Calibri" pitchFamily="34" charset="0"/>
-                <a:ea typeface="Calibri" pitchFamily="34" charset="-122"/>
-                <a:cs typeface="Calibri" pitchFamily="34" charset="-120"/>
-              </a:rPr>
-              <a:t>Intent Resolution</a:t>
-            </a:r>
-            <a:pPr indent="0" marL="0">
-              <a:lnSpc>
-                <a:spcPct val="135000"/>
-              </a:lnSpc>
-              <a:buNone/>
-            </a:pPr>
-            <a:r>
-              <a:rPr lang="en-US" sz="1350" dirty="0">
+              <a:t>get_customer_anomaly_score</a:t>
+            </a:r>
+            <a:endParaRPr lang="en-US" sz="1050" dirty="0"/>
+          </a:p>
+        </p:txBody>
+      </p:sp>
+      <p:sp>
+        <p:nvSpPr>
+          <p:cNvPr id="12" name="Text 10"/>
+          <p:cNvSpPr/>
+          <p:nvPr/>
+        </p:nvSpPr>
+        <p:spPr>
+          <a:xfrm>
+            <a:off x="4818888" y="2734056"/>
+            <a:ext cx="3474720" cy="274320"/>
+          </a:xfrm>
+          <a:prstGeom prst="rect">
+            <a:avLst/>
+          </a:prstGeom>
+          <a:noFill/>
+          <a:ln/>
+        </p:spPr>
+        <p:txBody>
+          <a:bodyPr wrap="square" lIns="0" tIns="0" rIns="0" bIns="0" rtlCol="0" anchor="ctr"/>
+          <a:lstStyle/>
+          <a:p>
+            <a:pPr indent="0" marL="0">
+              <a:buNone/>
+            </a:pPr>
+            <a:r>
+              <a:rPr lang="en-US" sz="1050" dirty="0">
                 <a:solidFill>
                   <a:srgbClr val="93A1AF"/>
                 </a:solidFill>
@@ -9406,135 +11074,26 @@
                 <a:ea typeface="Calibri" pitchFamily="34" charset="-122"/>
                 <a:cs typeface="Calibri" pitchFamily="34" charset="-120"/>
               </a:rPr>
-              <a:t>  no approved function matches
-</a:t>
-            </a:r>
-            <a:pPr indent="0" marL="0">
-              <a:lnSpc>
-                <a:spcPct val="135000"/>
-              </a:lnSpc>
-              <a:buNone/>
-            </a:pPr>
-            <a:r>
-              <a:rPr lang="en-US" sz="1350" b="1" dirty="0">
-                <a:solidFill>
-                  <a:srgbClr val="E9EEF3"/>
-                </a:solidFill>
-                <a:latin typeface="Calibri" pitchFamily="34" charset="0"/>
-                <a:ea typeface="Calibri" pitchFamily="34" charset="-122"/>
-                <a:cs typeface="Calibri" pitchFamily="34" charset="-120"/>
-              </a:rPr>
-              <a:t>Governance Check</a:t>
-            </a:r>
-            <a:pPr indent="0" marL="0">
-              <a:lnSpc>
-                <a:spcPct val="135000"/>
-              </a:lnSpc>
-              <a:buNone/>
-            </a:pPr>
-            <a:r>
-              <a:rPr lang="en-US" sz="1350" dirty="0">
-                <a:solidFill>
-                  <a:srgbClr val="F85149"/>
-                </a:solidFill>
-                <a:latin typeface="Calibri" pitchFamily="34" charset="0"/>
-                <a:ea typeface="Calibri" pitchFamily="34" charset="-122"/>
-                <a:cs typeface="Calibri" pitchFamily="34" charset="-120"/>
-              </a:rPr>
-              <a:t>  DENIED · control FUNCTION_GRANT
-</a:t>
-            </a:r>
-            <a:pPr indent="0" marL="0">
-              <a:lnSpc>
-                <a:spcPct val="135000"/>
-              </a:lnSpc>
-              <a:buNone/>
-            </a:pPr>
-            <a:r>
-              <a:rPr lang="en-US" sz="1350" b="1" dirty="0">
-                <a:solidFill>
-                  <a:srgbClr val="E9EEF3"/>
-                </a:solidFill>
-                <a:latin typeface="Calibri" pitchFamily="34" charset="0"/>
-                <a:ea typeface="Calibri" pitchFamily="34" charset="-122"/>
-                <a:cs typeface="Calibri" pitchFamily="34" charset="-120"/>
-              </a:rPr>
-              <a:t>Execution</a:t>
-            </a:r>
-            <a:pPr indent="0" marL="0">
-              <a:lnSpc>
-                <a:spcPct val="135000"/>
-              </a:lnSpc>
-              <a:buNone/>
-            </a:pPr>
-            <a:r>
-              <a:rPr lang="en-US" sz="1350" dirty="0">
-                <a:solidFill>
-                  <a:srgbClr val="93A1AF"/>
-                </a:solidFill>
-                <a:latin typeface="Calibri" pitchFamily="34" charset="0"/>
-                <a:ea typeface="Calibri" pitchFamily="34" charset="-122"/>
-                <a:cs typeface="Calibri" pitchFamily="34" charset="-120"/>
-              </a:rPr>
-              <a:t>  blocked — nothing reached the engine</a:t>
-            </a:r>
-            <a:endParaRPr lang="en-US" sz="1350" dirty="0"/>
-          </a:p>
-        </p:txBody>
-      </p:sp>
-      <p:sp>
-        <p:nvSpPr>
-          <p:cNvPr id="11" name="Text 9"/>
-          <p:cNvSpPr/>
-          <p:nvPr/>
-        </p:nvSpPr>
-        <p:spPr>
-          <a:xfrm>
-            <a:off x="1005840" y="4937760"/>
-            <a:ext cx="4526280" cy="457200"/>
-          </a:xfrm>
-          <a:prstGeom prst="rect">
-            <a:avLst/>
-          </a:prstGeom>
-          <a:noFill/>
-          <a:ln/>
-        </p:spPr>
-        <p:txBody>
-          <a:bodyPr wrap="square" lIns="0" tIns="0" rIns="0" bIns="0" rtlCol="0" anchor="ctr"/>
-          <a:lstStyle/>
-          <a:p>
-            <a:pPr indent="0" marL="0">
-              <a:buNone/>
-            </a:pPr>
-            <a:r>
-              <a:rPr lang="en-US" sz="1300" i="1" dirty="0">
-                <a:solidFill>
-                  <a:srgbClr val="FF8A3D"/>
-                </a:solidFill>
-                <a:latin typeface="Calibri" pitchFamily="34" charset="0"/>
-                <a:ea typeface="Calibri" pitchFamily="34" charset="-122"/>
-                <a:cs typeface="Calibri" pitchFamily="34" charset="-120"/>
-              </a:rPr>
-              <a:t>A denial is a logged, auditable event — not an error.</a:t>
-            </a:r>
-            <a:endParaRPr lang="en-US" sz="1300" dirty="0"/>
-          </a:p>
-        </p:txBody>
-      </p:sp>
-      <p:sp>
-        <p:nvSpPr>
-          <p:cNvPr id="12" name="Shape 10"/>
-          <p:cNvSpPr/>
-          <p:nvPr/>
-        </p:nvSpPr>
-        <p:spPr>
-          <a:xfrm>
-            <a:off x="6217920" y="1874520"/>
-            <a:ext cx="5257800" cy="3703320"/>
+              <a:t>Gold layer → 82.35% anomalous, 6.0× baseline</a:t>
+            </a:r>
+            <a:endParaRPr lang="en-US" sz="1050" dirty="0"/>
+          </a:p>
+        </p:txBody>
+      </p:sp>
+      <p:sp>
+        <p:nvSpPr>
+          <p:cNvPr id="13" name="Shape 11"/>
+          <p:cNvSpPr/>
+          <p:nvPr/>
+        </p:nvSpPr>
+        <p:spPr>
+          <a:xfrm>
+            <a:off x="4343400" y="3154680"/>
+            <a:ext cx="4023360" cy="640080"/>
           </a:xfrm>
           <a:prstGeom prst="roundRect">
             <a:avLst>
-              <a:gd name="adj" fmla="val 2222"/>
+              <a:gd name="adj" fmla="val 12857"/>
             </a:avLst>
           </a:prstGeom>
           <a:solidFill>
@@ -9557,96 +11116,243 @@
       </p:sp>
       <p:sp>
         <p:nvSpPr>
-          <p:cNvPr id="13" name="Shape 11"/>
-          <p:cNvSpPr/>
-          <p:nvPr/>
-        </p:nvSpPr>
-        <p:spPr>
-          <a:xfrm>
-            <a:off x="6583680" y="2203704"/>
-            <a:ext cx="1828800" cy="402336"/>
+          <p:cNvPr id="14" name="Shape 12"/>
+          <p:cNvSpPr/>
+          <p:nvPr/>
+        </p:nvSpPr>
+        <p:spPr>
+          <a:xfrm>
+            <a:off x="4526280" y="3374136"/>
+            <a:ext cx="201168" cy="201168"/>
+          </a:xfrm>
+          <a:prstGeom prst="ellipse">
+            <a:avLst/>
+          </a:prstGeom>
+          <a:solidFill>
+            <a:srgbClr val="3FB950"/>
+          </a:solidFill>
+          <a:ln/>
+        </p:spPr>
+      </p:sp>
+      <p:sp>
+        <p:nvSpPr>
+          <p:cNvPr id="15" name="Text 13"/>
+          <p:cNvSpPr/>
+          <p:nvPr/>
+        </p:nvSpPr>
+        <p:spPr>
+          <a:xfrm>
+            <a:off x="4818888" y="3191256"/>
+            <a:ext cx="3474720" cy="292608"/>
+          </a:xfrm>
+          <a:prstGeom prst="rect">
+            <a:avLst/>
+          </a:prstGeom>
+          <a:noFill/>
+          <a:ln/>
+        </p:spPr>
+        <p:txBody>
+          <a:bodyPr wrap="square" lIns="0" tIns="0" rIns="0" bIns="0" rtlCol="0" anchor="ctr"/>
+          <a:lstStyle/>
+          <a:p>
+            <a:pPr indent="0" marL="0">
+              <a:buNone/>
+            </a:pPr>
+            <a:r>
+              <a:rPr lang="en-US" sz="1050" b="1" dirty="0">
+                <a:solidFill>
+                  <a:srgbClr val="E9EEF3"/>
+                </a:solidFill>
+                <a:latin typeface="Consolas" pitchFamily="34" charset="0"/>
+                <a:ea typeface="Consolas" pitchFamily="34" charset="-122"/>
+                <a:cs typeface="Consolas" pitchFamily="34" charset="-120"/>
+              </a:rPr>
+              <a:t>search_knowledge_base</a:t>
+            </a:r>
+            <a:endParaRPr lang="en-US" sz="1050" dirty="0"/>
+          </a:p>
+        </p:txBody>
+      </p:sp>
+      <p:sp>
+        <p:nvSpPr>
+          <p:cNvPr id="16" name="Text 14"/>
+          <p:cNvSpPr/>
+          <p:nvPr/>
+        </p:nvSpPr>
+        <p:spPr>
+          <a:xfrm>
+            <a:off x="4818888" y="3465576"/>
+            <a:ext cx="3474720" cy="274320"/>
+          </a:xfrm>
+          <a:prstGeom prst="rect">
+            <a:avLst/>
+          </a:prstGeom>
+          <a:noFill/>
+          <a:ln/>
+        </p:spPr>
+        <p:txBody>
+          <a:bodyPr wrap="square" lIns="0" tIns="0" rIns="0" bIns="0" rtlCol="0" anchor="ctr"/>
+          <a:lstStyle/>
+          <a:p>
+            <a:pPr indent="0" marL="0">
+              <a:buNone/>
+            </a:pPr>
+            <a:r>
+              <a:rPr lang="en-US" sz="1050" dirty="0">
+                <a:solidFill>
+                  <a:srgbClr val="93A1AF"/>
+                </a:solidFill>
+                <a:latin typeface="Calibri" pitchFamily="34" charset="0"/>
+                <a:ea typeface="Calibri" pitchFamily="34" charset="-122"/>
+                <a:cs typeface="Calibri" pitchFamily="34" charset="-120"/>
+              </a:rPr>
+              <a:t>Vector index → SRE Runbook remediation steps</a:t>
+            </a:r>
+            <a:endParaRPr lang="en-US" sz="1050" dirty="0"/>
+          </a:p>
+        </p:txBody>
+      </p:sp>
+      <p:sp>
+        <p:nvSpPr>
+          <p:cNvPr id="17" name="Text 15"/>
+          <p:cNvSpPr/>
+          <p:nvPr/>
+        </p:nvSpPr>
+        <p:spPr>
+          <a:xfrm>
+            <a:off x="4343400" y="3867912"/>
+            <a:ext cx="4023360" cy="274320"/>
+          </a:xfrm>
+          <a:prstGeom prst="rect">
+            <a:avLst/>
+          </a:prstGeom>
+          <a:noFill/>
+          <a:ln/>
+        </p:spPr>
+        <p:txBody>
+          <a:bodyPr wrap="square" lIns="0" tIns="0" rIns="0" bIns="0" rtlCol="0" anchor="ctr"/>
+          <a:lstStyle/>
+          <a:p>
+            <a:pPr algn="ctr" indent="0" marL="0">
+              <a:buNone/>
+            </a:pPr>
+            <a:r>
+              <a:rPr lang="en-US" sz="1050" i="1" dirty="0">
+                <a:solidFill>
+                  <a:srgbClr val="FF8A3D"/>
+                </a:solidFill>
+                <a:latin typeface="Calibri" pitchFamily="34" charset="0"/>
+                <a:ea typeface="Calibri" pitchFamily="34" charset="-122"/>
+                <a:cs typeface="Calibri" pitchFamily="34" charset="-120"/>
+              </a:rPr>
+              <a:t>each independently cleared at the boundary</a:t>
+            </a:r>
+            <a:endParaRPr lang="en-US" sz="1050" dirty="0"/>
+          </a:p>
+        </p:txBody>
+      </p:sp>
+      <p:sp>
+        <p:nvSpPr>
+          <p:cNvPr id="18" name="Shape 16"/>
+          <p:cNvSpPr/>
+          <p:nvPr/>
+        </p:nvSpPr>
+        <p:spPr>
+          <a:xfrm>
+            <a:off x="8686800" y="2423160"/>
+            <a:ext cx="2880360" cy="1371600"/>
           </a:xfrm>
           <a:prstGeom prst="roundRect">
             <a:avLst>
-              <a:gd name="adj" fmla="val 18182"/>
+              <a:gd name="adj" fmla="val 6000"/>
             </a:avLst>
           </a:prstGeom>
           <a:solidFill>
-            <a:srgbClr val="2A1214"/>
+            <a:srgbClr val="1F2C3A"/>
           </a:solidFill>
           <a:ln w="12700">
             <a:solidFill>
-              <a:srgbClr val="F85149"/>
+              <a:srgbClr val="2A3745"/>
             </a:solidFill>
             <a:prstDash val="solid"/>
           </a:ln>
-        </p:spPr>
-      </p:sp>
-      <p:sp>
-        <p:nvSpPr>
-          <p:cNvPr id="14" name="Text 12"/>
-          <p:cNvSpPr/>
-          <p:nvPr/>
-        </p:nvSpPr>
-        <p:spPr>
-          <a:xfrm>
-            <a:off x="6583680" y="2203704"/>
-            <a:ext cx="1828800" cy="402336"/>
-          </a:xfrm>
-          <a:prstGeom prst="rect">
-            <a:avLst/>
-          </a:prstGeom>
-          <a:noFill/>
-          <a:ln/>
-        </p:spPr>
-        <p:txBody>
-          <a:bodyPr wrap="square" lIns="0" tIns="0" rIns="0" bIns="0" rtlCol="0" anchor="ctr"/>
-          <a:lstStyle/>
-          <a:p>
-            <a:pPr algn="ctr" indent="0" marL="0">
-              <a:buNone/>
-            </a:pPr>
-            <a:r>
-              <a:rPr lang="en-US" sz="1200" b="1" dirty="0">
-                <a:solidFill>
-                  <a:srgbClr val="F85149"/>
-                </a:solidFill>
-                <a:latin typeface="Calibri" pitchFamily="34" charset="0"/>
-                <a:ea typeface="Calibri" pitchFamily="34" charset="-122"/>
-                <a:cs typeface="Calibri" pitchFamily="34" charset="-120"/>
-              </a:rPr>
-              <a:t>NEUTRALISED</a:t>
-            </a:r>
-            <a:endParaRPr lang="en-US" sz="1200" dirty="0"/>
-          </a:p>
-        </p:txBody>
-      </p:sp>
-      <p:sp>
-        <p:nvSpPr>
-          <p:cNvPr id="15" name="Text 13"/>
-          <p:cNvSpPr/>
-          <p:nvPr/>
-        </p:nvSpPr>
-        <p:spPr>
-          <a:xfrm>
-            <a:off x="8549640" y="2203704"/>
-            <a:ext cx="2697480" cy="402336"/>
-          </a:xfrm>
-          <a:prstGeom prst="rect">
-            <a:avLst/>
-          </a:prstGeom>
-          <a:noFill/>
-          <a:ln/>
-        </p:spPr>
-        <p:txBody>
-          <a:bodyPr wrap="square" lIns="0" tIns="0" rIns="0" bIns="0" rtlCol="0" anchor="ctr"/>
-          <a:lstStyle/>
-          <a:p>
-            <a:pPr indent="0" marL="0">
-              <a:buNone/>
-            </a:pPr>
-            <a:r>
-              <a:rPr lang="en-US" sz="1600" b="1" dirty="0">
+          <a:effectLst>
+            <a:outerShdw sx="100000" sy="100000" kx="0" ky="0" algn="bl" rotWithShape="0" blurRad="114300" dist="38100" dir="5400000">
+              <a:srgbClr val="000000">
+                <a:alpha val="28000"/>
+              </a:srgbClr>
+            </a:outerShdw>
+          </a:effectLst>
+        </p:spPr>
+      </p:sp>
+      <p:sp>
+        <p:nvSpPr>
+          <p:cNvPr id="19" name="Text 17"/>
+          <p:cNvSpPr/>
+          <p:nvPr/>
+        </p:nvSpPr>
+        <p:spPr>
+          <a:xfrm>
+            <a:off x="8942832" y="2606040"/>
+            <a:ext cx="2377440" cy="274320"/>
+          </a:xfrm>
+          <a:prstGeom prst="rect">
+            <a:avLst/>
+          </a:prstGeom>
+          <a:noFill/>
+          <a:ln/>
+        </p:spPr>
+        <p:txBody>
+          <a:bodyPr wrap="square" lIns="0" tIns="0" rIns="0" bIns="0" rtlCol="0" anchor="ctr"/>
+          <a:lstStyle/>
+          <a:p>
+            <a:pPr indent="0" marL="0">
+              <a:buNone/>
+            </a:pPr>
+            <a:r>
+              <a:rPr lang="en-US" sz="1050" b="1" spc="150" kern="0" dirty="0">
+                <a:solidFill>
+                  <a:srgbClr val="3FB950"/>
+                </a:solidFill>
+                <a:latin typeface="Calibri" pitchFamily="34" charset="0"/>
+                <a:ea typeface="Calibri" pitchFamily="34" charset="-122"/>
+                <a:cs typeface="Calibri" pitchFamily="34" charset="-120"/>
+              </a:rPr>
+              <a:t>ONE CITED ANSWER</a:t>
+            </a:r>
+            <a:endParaRPr lang="en-US" sz="1050" dirty="0"/>
+          </a:p>
+        </p:txBody>
+      </p:sp>
+      <p:sp>
+        <p:nvSpPr>
+          <p:cNvPr id="20" name="Text 18"/>
+          <p:cNvSpPr/>
+          <p:nvPr/>
+        </p:nvSpPr>
+        <p:spPr>
+          <a:xfrm>
+            <a:off x="8942832" y="2926080"/>
+            <a:ext cx="2468880" cy="777240"/>
+          </a:xfrm>
+          <a:prstGeom prst="rect">
+            <a:avLst/>
+          </a:prstGeom>
+          <a:noFill/>
+          <a:ln/>
+        </p:spPr>
+        <p:txBody>
+          <a:bodyPr wrap="square" lIns="0" tIns="0" rIns="0" bIns="0" rtlCol="0" anchor="ctr"/>
+          <a:lstStyle/>
+          <a:p>
+            <a:pPr indent="0" marL="0">
+              <a:lnSpc>
+                <a:spcPct val="110000"/>
+              </a:lnSpc>
+              <a:buNone/>
+            </a:pPr>
+            <a:r>
+              <a:rPr lang="en-US" sz="1250" dirty="0">
                 <a:solidFill>
                   <a:srgbClr val="E9EEF3"/>
                 </a:solidFill>
@@ -9654,206 +11360,268 @@
                 <a:ea typeface="Calibri" pitchFamily="34" charset="-122"/>
                 <a:cs typeface="Calibri" pitchFamily="34" charset="-120"/>
               </a:rPr>
-              <a:t>Prompt injection</a:t>
-            </a:r>
-            <a:endParaRPr lang="en-US" sz="1600" dirty="0"/>
-          </a:p>
-        </p:txBody>
-      </p:sp>
-      <p:sp>
-        <p:nvSpPr>
-          <p:cNvPr id="16" name="Text 14"/>
-          <p:cNvSpPr/>
-          <p:nvPr/>
-        </p:nvSpPr>
-        <p:spPr>
-          <a:xfrm>
-            <a:off x="6583680" y="2788920"/>
-            <a:ext cx="4526280" cy="365760"/>
-          </a:xfrm>
-          <a:prstGeom prst="rect">
-            <a:avLst/>
-          </a:prstGeom>
-          <a:noFill/>
-          <a:ln/>
-        </p:spPr>
-        <p:txBody>
-          <a:bodyPr wrap="square" lIns="0" tIns="0" rIns="0" bIns="0" rtlCol="0" anchor="ctr"/>
-          <a:lstStyle/>
-          <a:p>
-            <a:pPr indent="0" marL="0">
-              <a:buNone/>
-            </a:pPr>
-            <a:r>
-              <a:rPr lang="en-US" sz="1100" i="1" dirty="0">
+              <a:t>The metric, the recommended</a:t>
+            </a:r>
+            <a:endParaRPr lang="en-US" sz="1250" dirty="0"/>
+          </a:p>
+          <a:p>
+            <a:pPr indent="0" marL="0">
+              <a:lnSpc>
+                <a:spcPct val="110000"/>
+              </a:lnSpc>
+              <a:buNone/>
+            </a:pPr>
+            <a:r>
+              <a:rPr lang="en-US" sz="1250" dirty="0">
+                <a:solidFill>
+                  <a:srgbClr val="E9EEF3"/>
+                </a:solidFill>
+                <a:latin typeface="Calibri" pitchFamily="34" charset="0"/>
+                <a:ea typeface="Calibri" pitchFamily="34" charset="-122"/>
+                <a:cs typeface="Calibri" pitchFamily="34" charset="-120"/>
+              </a:rPr>
+              <a:t>action, and the document it</a:t>
+            </a:r>
+            <a:endParaRPr lang="en-US" sz="1250" dirty="0"/>
+          </a:p>
+          <a:p>
+            <a:pPr indent="0" marL="0">
+              <a:lnSpc>
+                <a:spcPct val="110000"/>
+              </a:lnSpc>
+              <a:buNone/>
+            </a:pPr>
+            <a:r>
+              <a:rPr lang="en-US" sz="1250" dirty="0">
+                <a:solidFill>
+                  <a:srgbClr val="E9EEF3"/>
+                </a:solidFill>
+                <a:latin typeface="Calibri" pitchFamily="34" charset="0"/>
+                <a:ea typeface="Calibri" pitchFamily="34" charset="-122"/>
+                <a:cs typeface="Calibri" pitchFamily="34" charset="-120"/>
+              </a:rPr>
+              <a:t>came from</a:t>
+            </a:r>
+            <a:endParaRPr lang="en-US" sz="1250" dirty="0"/>
+          </a:p>
+        </p:txBody>
+      </p:sp>
+      <p:sp>
+        <p:nvSpPr>
+          <p:cNvPr id="21" name="Shape 19"/>
+          <p:cNvSpPr/>
+          <p:nvPr/>
+        </p:nvSpPr>
+        <p:spPr>
+          <a:xfrm>
+            <a:off x="3913632" y="2962656"/>
+            <a:ext cx="365760" cy="292608"/>
+          </a:xfrm>
+          <a:prstGeom prst="rightArrow">
+            <a:avLst/>
+          </a:prstGeom>
+          <a:solidFill>
+            <a:srgbClr val="FF6C00"/>
+          </a:solidFill>
+          <a:ln/>
+        </p:spPr>
+      </p:sp>
+      <p:sp>
+        <p:nvSpPr>
+          <p:cNvPr id="22" name="Shape 20"/>
+          <p:cNvSpPr/>
+          <p:nvPr/>
+        </p:nvSpPr>
+        <p:spPr>
+          <a:xfrm>
+            <a:off x="8412480" y="2962656"/>
+            <a:ext cx="365760" cy="292608"/>
+          </a:xfrm>
+          <a:prstGeom prst="rightArrow">
+            <a:avLst/>
+          </a:prstGeom>
+          <a:solidFill>
+            <a:srgbClr val="FF6C00"/>
+          </a:solidFill>
+          <a:ln/>
+        </p:spPr>
+      </p:sp>
+      <p:sp>
+        <p:nvSpPr>
+          <p:cNvPr id="23" name="Shape 21"/>
+          <p:cNvSpPr/>
+          <p:nvPr/>
+        </p:nvSpPr>
+        <p:spPr>
+          <a:xfrm>
+            <a:off x="640080" y="4160520"/>
+            <a:ext cx="10927080" cy="1600200"/>
+          </a:xfrm>
+          <a:prstGeom prst="roundRect">
+            <a:avLst>
+              <a:gd name="adj" fmla="val 5143"/>
+            </a:avLst>
+          </a:prstGeom>
+          <a:solidFill>
+            <a:srgbClr val="18232F"/>
+          </a:solidFill>
+          <a:ln w="12700">
+            <a:solidFill>
+              <a:srgbClr val="2A3745"/>
+            </a:solidFill>
+            <a:prstDash val="solid"/>
+          </a:ln>
+          <a:effectLst>
+            <a:outerShdw sx="100000" sy="100000" kx="0" ky="0" algn="bl" rotWithShape="0" blurRad="114300" dist="38100" dir="5400000">
+              <a:srgbClr val="000000">
+                <a:alpha val="28000"/>
+              </a:srgbClr>
+            </a:outerShdw>
+          </a:effectLst>
+        </p:spPr>
+      </p:sp>
+      <p:sp>
+        <p:nvSpPr>
+          <p:cNvPr id="24" name="Text 22"/>
+          <p:cNvSpPr/>
+          <p:nvPr/>
+        </p:nvSpPr>
+        <p:spPr>
+          <a:xfrm>
+            <a:off x="960120" y="4279392"/>
+            <a:ext cx="4572000" cy="274320"/>
+          </a:xfrm>
+          <a:prstGeom prst="rect">
+            <a:avLst/>
+          </a:prstGeom>
+          <a:noFill/>
+          <a:ln/>
+        </p:spPr>
+        <p:txBody>
+          <a:bodyPr wrap="square" lIns="0" tIns="0" rIns="0" bIns="0" rtlCol="0" anchor="ctr"/>
+          <a:lstStyle/>
+          <a:p>
+            <a:pPr indent="0" marL="0">
+              <a:buNone/>
+            </a:pPr>
+            <a:r>
+              <a:rPr lang="en-US" sz="1100" b="1" spc="100" kern="0" dirty="0">
+                <a:solidFill>
+                  <a:srgbClr val="FF8A3D"/>
+                </a:solidFill>
+                <a:latin typeface="Calibri" pitchFamily="34" charset="0"/>
+                <a:ea typeface="Calibri" pitchFamily="34" charset="-122"/>
+                <a:cs typeface="Calibri" pitchFamily="34" charset="-120"/>
+              </a:rPr>
+              <a:t>Agent output</a:t>
+            </a:r>
+            <a:endParaRPr lang="en-US" sz="1100" dirty="0"/>
+          </a:p>
+        </p:txBody>
+      </p:sp>
+      <p:sp>
+        <p:nvSpPr>
+          <p:cNvPr id="25" name="Text 23"/>
+          <p:cNvSpPr/>
+          <p:nvPr/>
+        </p:nvSpPr>
+        <p:spPr>
+          <a:xfrm>
+            <a:off x="960120" y="4572000"/>
+            <a:ext cx="10332720" cy="1097280"/>
+          </a:xfrm>
+          <a:prstGeom prst="rect">
+            <a:avLst/>
+          </a:prstGeom>
+          <a:noFill/>
+          <a:ln/>
+        </p:spPr>
+        <p:txBody>
+          <a:bodyPr wrap="square" lIns="0" tIns="0" rIns="0" bIns="0" rtlCol="0" anchor="ctr"/>
+          <a:lstStyle/>
+          <a:p>
+            <a:pPr indent="0" marL="0">
+              <a:lnSpc>
+                <a:spcPct val="115000"/>
+              </a:lnSpc>
+              <a:buNone/>
+            </a:pPr>
+            <a:r>
+              <a:rPr lang="en-US" sz="1250" dirty="0">
+                <a:solidFill>
+                  <a:srgbClr val="E9EEF3"/>
+                </a:solidFill>
+                <a:latin typeface="Calibri" pitchFamily="34" charset="0"/>
+                <a:ea typeface="Calibri" pitchFamily="34" charset="-122"/>
+                <a:cs typeface="Calibri" pitchFamily="34" charset="-120"/>
+              </a:rPr>
+              <a:t>Customer CUST_404 is materially anomalous… risk factor 82.35, 6.0× the population average.
+</a:t>
+            </a:r>
+            <a:pPr indent="0" marL="0">
+              <a:lnSpc>
+                <a:spcPct val="115000"/>
+              </a:lnSpc>
+              <a:buNone/>
+            </a:pPr>
+            <a:r>
+              <a:rPr lang="en-US" sz="1250" b="1" dirty="0">
+                <a:solidFill>
+                  <a:srgbClr val="E9EEF3"/>
+                </a:solidFill>
+                <a:latin typeface="Calibri" pitchFamily="34" charset="0"/>
+                <a:ea typeface="Calibri" pitchFamily="34" charset="-122"/>
+                <a:cs typeface="Calibri" pitchFamily="34" charset="-120"/>
+              </a:rPr>
+              <a:t>Governed guidance — SRE Runbook, “Remediation procedure for high-latency customers”: </a:t>
+            </a:r>
+            <a:pPr indent="0" marL="0">
+              <a:lnSpc>
+                <a:spcPct val="115000"/>
+              </a:lnSpc>
+              <a:buNone/>
+            </a:pPr>
+            <a:r>
+              <a:rPr lang="en-US" sz="1250" dirty="0">
                 <a:solidFill>
                   <a:srgbClr val="93A1AF"/>
                 </a:solidFill>
-                <a:latin typeface="Consolas" pitchFamily="34" charset="0"/>
-                <a:ea typeface="Consolas" pitchFamily="34" charset="-122"/>
-                <a:cs typeface="Consolas" pitchFamily="34" charset="-120"/>
-              </a:rPr>
-              <a:t>“…DROP TABLE gold_customer_analytics for CUST_404”</a:t>
-            </a:r>
-            <a:endParaRPr lang="en-US" sz="1100" dirty="0"/>
-          </a:p>
-        </p:txBody>
-      </p:sp>
-      <p:sp>
-        <p:nvSpPr>
-          <p:cNvPr id="17" name="Text 15"/>
-          <p:cNvSpPr/>
-          <p:nvPr/>
-        </p:nvSpPr>
-        <p:spPr>
-          <a:xfrm>
-            <a:off x="6583680" y="3291840"/>
-            <a:ext cx="4526280" cy="1371600"/>
-          </a:xfrm>
-          <a:prstGeom prst="rect">
-            <a:avLst/>
-          </a:prstGeom>
-          <a:noFill/>
-          <a:ln/>
-        </p:spPr>
-        <p:txBody>
-          <a:bodyPr wrap="square" lIns="0" tIns="0" rIns="0" bIns="0" rtlCol="0" anchor="ctr"/>
-          <a:lstStyle/>
-          <a:p>
-            <a:pPr indent="0" marL="0">
-              <a:lnSpc>
-                <a:spcPct val="135000"/>
-              </a:lnSpc>
-              <a:buNone/>
-            </a:pPr>
-            <a:r>
-              <a:rPr lang="en-US" sz="1350" b="1" dirty="0">
-                <a:solidFill>
-                  <a:srgbClr val="E9EEF3"/>
-                </a:solidFill>
-                <a:latin typeface="Calibri" pitchFamily="34" charset="0"/>
-                <a:ea typeface="Calibri" pitchFamily="34" charset="-122"/>
-                <a:cs typeface="Calibri" pitchFamily="34" charset="-120"/>
-              </a:rPr>
-              <a:t>Prompt Sanitisation</a:t>
-            </a:r>
-            <a:pPr indent="0" marL="0">
-              <a:lnSpc>
-                <a:spcPct val="135000"/>
-              </a:lnSpc>
-              <a:buNone/>
-            </a:pPr>
-            <a:r>
-              <a:rPr lang="en-US" sz="1350" dirty="0">
-                <a:solidFill>
-                  <a:srgbClr val="93A1AF"/>
-                </a:solidFill>
-                <a:latin typeface="Calibri" pitchFamily="34" charset="0"/>
-                <a:ea typeface="Calibri" pitchFamily="34" charset="-122"/>
-                <a:cs typeface="Calibri" pitchFamily="34" charset="-120"/>
-              </a:rPr>
-              <a:t>  SQL stripped; only CUST_404 kept
-</a:t>
-            </a:r>
-            <a:pPr indent="0" marL="0">
-              <a:lnSpc>
-                <a:spcPct val="135000"/>
-              </a:lnSpc>
-              <a:buNone/>
-            </a:pPr>
-            <a:r>
-              <a:rPr lang="en-US" sz="1350" b="1" dirty="0">
-                <a:solidFill>
-                  <a:srgbClr val="E9EEF3"/>
-                </a:solidFill>
-                <a:latin typeface="Calibri" pitchFamily="34" charset="0"/>
-                <a:ea typeface="Calibri" pitchFamily="34" charset="-122"/>
-                <a:cs typeface="Calibri" pitchFamily="34" charset="-120"/>
-              </a:rPr>
-              <a:t>Governance Check</a:t>
-            </a:r>
-            <a:pPr indent="0" marL="0">
-              <a:lnSpc>
-                <a:spcPct val="135000"/>
-              </a:lnSpc>
-              <a:buNone/>
-            </a:pPr>
-            <a:r>
-              <a:rPr lang="en-US" sz="1350" dirty="0">
-                <a:solidFill>
-                  <a:srgbClr val="3FB950"/>
-                </a:solidFill>
-                <a:latin typeface="Calibri" pitchFamily="34" charset="0"/>
-                <a:ea typeface="Calibri" pitchFamily="34" charset="-122"/>
-                <a:cs typeface="Calibri" pitchFamily="34" charset="-120"/>
-              </a:rPr>
-              <a:t>  GRANTED on the safe value
-</a:t>
-            </a:r>
-            <a:pPr indent="0" marL="0">
-              <a:lnSpc>
-                <a:spcPct val="135000"/>
-              </a:lnSpc>
-              <a:buNone/>
-            </a:pPr>
-            <a:r>
-              <a:rPr lang="en-US" sz="1350" b="1" dirty="0">
-                <a:solidFill>
-                  <a:srgbClr val="E9EEF3"/>
-                </a:solidFill>
-                <a:latin typeface="Calibri" pitchFamily="34" charset="0"/>
-                <a:ea typeface="Calibri" pitchFamily="34" charset="-122"/>
-                <a:cs typeface="Calibri" pitchFamily="34" charset="-120"/>
-              </a:rPr>
-              <a:t>Result</a:t>
-            </a:r>
-            <a:pPr indent="0" marL="0">
-              <a:lnSpc>
-                <a:spcPct val="135000"/>
-              </a:lnSpc>
-              <a:buNone/>
-            </a:pPr>
-            <a:r>
-              <a:rPr lang="en-US" sz="1350" dirty="0">
-                <a:solidFill>
-                  <a:srgbClr val="93A1AF"/>
-                </a:solidFill>
-                <a:latin typeface="Calibri" pitchFamily="34" charset="0"/>
-                <a:ea typeface="Calibri" pitchFamily="34" charset="-122"/>
-                <a:cs typeface="Calibri" pitchFamily="34" charset="-120"/>
-              </a:rPr>
-              <a:t>  every table intact; attempt logged</a:t>
-            </a:r>
-            <a:endParaRPr lang="en-US" sz="1350" dirty="0"/>
-          </a:p>
-        </p:txBody>
-      </p:sp>
-      <p:sp>
-        <p:nvSpPr>
-          <p:cNvPr id="18" name="Text 16"/>
-          <p:cNvSpPr/>
-          <p:nvPr/>
-        </p:nvSpPr>
-        <p:spPr>
-          <a:xfrm>
-            <a:off x="6583680" y="4937760"/>
-            <a:ext cx="4526280" cy="457200"/>
-          </a:xfrm>
-          <a:prstGeom prst="rect">
-            <a:avLst/>
-          </a:prstGeom>
-          <a:noFill/>
-          <a:ln/>
-        </p:spPr>
-        <p:txBody>
-          <a:bodyPr wrap="square" lIns="0" tIns="0" rIns="0" bIns="0" rtlCol="0" anchor="ctr"/>
-          <a:lstStyle/>
-          <a:p>
-            <a:pPr indent="0" marL="0">
-              <a:buNone/>
-            </a:pPr>
-            <a:r>
-              <a:rPr lang="en-US" sz="1300" i="1" dirty="0">
+                <a:latin typeface="Calibri" pitchFamily="34" charset="0"/>
+                <a:ea typeface="Calibri" pitchFamily="34" charset="-122"/>
+                <a:cs typeface="Calibri" pitchFamily="34" charset="-120"/>
+              </a:rPr>
+              <a:t>confirm the signal, isolate the blast radius, check recent deploys, apply the mitigation, verify recovery below 5%.</a:t>
+            </a:r>
+            <a:endParaRPr lang="en-US" sz="1250" dirty="0"/>
+          </a:p>
+        </p:txBody>
+      </p:sp>
+      <p:sp>
+        <p:nvSpPr>
+          <p:cNvPr id="26" name="Text 24"/>
+          <p:cNvSpPr/>
+          <p:nvPr/>
+        </p:nvSpPr>
+        <p:spPr>
+          <a:xfrm>
+            <a:off x="640080" y="5943600"/>
+            <a:ext cx="10881360" cy="411480"/>
+          </a:xfrm>
+          <a:prstGeom prst="rect">
+            <a:avLst/>
+          </a:prstGeom>
+          <a:noFill/>
+          <a:ln/>
+        </p:spPr>
+        <p:txBody>
+          <a:bodyPr wrap="square" lIns="0" tIns="0" rIns="0" bIns="0" rtlCol="0" anchor="ctr"/>
+          <a:lstStyle/>
+          <a:p>
+            <a:pPr indent="0" marL="0">
+              <a:buNone/>
+            </a:pPr>
+            <a:r>
+              <a:rPr lang="en-US" sz="1450" i="1" dirty="0">
                 <a:solidFill>
                   <a:srgbClr val="FF8A3D"/>
                 </a:solidFill>
@@ -9861,15 +11629,15 @@
                 <a:ea typeface="Calibri" pitchFamily="34" charset="-122"/>
                 <a:cs typeface="Calibri" pitchFamily="34" charset="-120"/>
               </a:rPr>
-              <a:t>Defense in depth: even valid-looking values are bound, never interpolated.</a:t>
-            </a:r>
-            <a:endParaRPr lang="en-US" sz="1300" dirty="0"/>
-          </a:p>
-        </p:txBody>
-      </p:sp>
-      <p:sp>
-        <p:nvSpPr>
-          <p:cNvPr id="19" name="Text 17"/>
+              <a:t>The number comes from the lakehouse; the recommendation comes from an approved document. Neither is invented by the model.</a:t>
+            </a:r>
+            <a:endParaRPr lang="en-US" sz="1450" dirty="0"/>
+          </a:p>
+        </p:txBody>
+      </p:sp>
+      <p:sp>
+        <p:nvSpPr>
+          <p:cNvPr id="27" name="Text 25"/>
           <p:cNvSpPr/>
           <p:nvPr/>
         </p:nvSpPr>
@@ -9908,7 +11676,7 @@
       </p:sp>
       <p:sp>
         <p:nvSpPr>
-          <p:cNvPr id="20" name="Text 18"/>
+          <p:cNvPr id="28" name="Text 26"/>
           <p:cNvSpPr/>
           <p:nvPr/>
         </p:nvSpPr>
@@ -9927,7 +11695,7 @@
           <a:bodyPr wrap="square" lIns="0" tIns="0" rIns="0" bIns="0" rtlCol="0" anchor="ctr"/>
           <a:lstStyle/>
           <a:p>
-            <a:pPr algn="l" indent="0" marL="0">
+            <a:pPr indent="0" marL="0">
               <a:buNone/>
             </a:pPr>
             <a:r>
@@ -10018,7 +11786,7 @@
           <a:bodyPr wrap="square" lIns="0" tIns="0" rIns="0" bIns="0" rtlCol="0" anchor="ctr"/>
           <a:lstStyle/>
           <a:p>
-            <a:pPr algn="l" indent="0" marL="0">
+            <a:pPr indent="0" marL="0">
               <a:buNone/>
             </a:pPr>
             <a:r>
@@ -10030,7 +11798,7 @@
                 <a:ea typeface="Calibri" pitchFamily="34" charset="-122"/>
                 <a:cs typeface="Calibri" pitchFamily="34" charset="-120"/>
               </a:rPr>
-              <a:t>UNDER THE HOOD</a:t>
+              <a:t>DEMO · MOVE 5</a:t>
             </a:r>
             <a:endParaRPr lang="en-US" sz="1200" dirty="0"/>
           </a:p>
@@ -10057,7 +11825,7 @@
           <a:bodyPr wrap="square" lIns="0" tIns="0" rIns="0" bIns="0" rtlCol="0" anchor="t"/>
           <a:lstStyle/>
           <a:p>
-            <a:pPr algn="l" indent="0" marL="0">
+            <a:pPr indent="0" marL="0">
               <a:buNone/>
             </a:pPr>
             <a:r>
@@ -10069,15 +11837,54 @@
                 <a:ea typeface="Cambria" pitchFamily="34" charset="-122"/>
                 <a:cs typeface="Cambria" pitchFamily="34" charset="-120"/>
               </a:rPr>
-              <a:t>Why the answers hold up</a:t>
+              <a:t>Retrieval that knows when to shut up</a:t>
             </a:r>
             <a:endParaRPr lang="en-US" sz="3200" dirty="0"/>
+          </a:p>
+        </p:txBody>
+      </p:sp>
+      <p:sp>
+        <p:nvSpPr>
+          <p:cNvPr id="5" name="Text 3"/>
+          <p:cNvSpPr/>
+          <p:nvPr/>
+        </p:nvSpPr>
+        <p:spPr>
+          <a:xfrm>
+            <a:off x="640080" y="1783080"/>
+            <a:ext cx="10789920" cy="457200"/>
+          </a:xfrm>
+          <a:prstGeom prst="rect">
+            <a:avLst/>
+          </a:prstGeom>
+          <a:noFill/>
+          <a:ln/>
+        </p:spPr>
+        <p:txBody>
+          <a:bodyPr wrap="square" lIns="0" tIns="0" rIns="0" bIns="0" rtlCol="0" anchor="ctr"/>
+          <a:lstStyle/>
+          <a:p>
+            <a:pPr indent="0" marL="0">
+              <a:buNone/>
+            </a:pPr>
+            <a:r>
+              <a:rPr lang="en-US" sz="1600" dirty="0">
+                <a:solidFill>
+                  <a:srgbClr val="93A1AF"/>
+                </a:solidFill>
+                <a:latin typeface="Calibri" pitchFamily="34" charset="0"/>
+                <a:ea typeface="Calibri" pitchFamily="34" charset="-122"/>
+                <a:cs typeface="Calibri" pitchFamily="34" charset="-120"/>
+              </a:rPr>
+              <a:t>The most dangerous failure in enterprise RAG is not a missing answer — it is a confident citation of the wrong document.</a:t>
+            </a:r>
+            <a:endParaRPr lang="en-US" sz="1600" dirty="0"/>
           </a:p>
         </p:txBody>
       </p:sp>
       <p:pic>
         <p:nvPicPr>
-          <p:cNvPr id="5" name="Image 0" descr="/private/tmp/claude-501/-Users-atharvvani-Downloads-DataBricks/437ba0b1-41b9-48e1-95cf-333721d11260/scratchpad/deck_assets/latency_dist.png">    </p:cNvPr>
+          <p:cNvPr id="6" name="Image 0" descr="/private/tmp/claude-501/-Users-atharvvani-Downloads-DataBricks/437ba0b1-41b9-48e1-95cf-333721d11260/scratchpad/deck_assets/abstention.png">    </p:cNvPr>
           <p:cNvPicPr>
             <a:picLocks noChangeAspect="1"/>
           </p:cNvPicPr>
@@ -10091,8 +11898,8 @@
         </p:blipFill>
         <p:spPr>
           <a:xfrm>
-            <a:off x="640080" y="1828800"/>
-            <a:ext cx="6766560" cy="2926080"/>
+            <a:off x="640080" y="2331720"/>
+            <a:ext cx="6858000" cy="2898648"/>
           </a:xfrm>
           <a:prstGeom prst="rect">
             <a:avLst/>
@@ -10101,13 +11908,13 @@
       </p:pic>
       <p:sp>
         <p:nvSpPr>
-          <p:cNvPr id="6" name="Shape 3"/>
-          <p:cNvSpPr/>
-          <p:nvPr/>
-        </p:nvSpPr>
-        <p:spPr>
-          <a:xfrm>
-            <a:off x="7772400" y="1764792"/>
+          <p:cNvPr id="7" name="Shape 4"/>
+          <p:cNvSpPr/>
+          <p:nvPr/>
+        </p:nvSpPr>
+        <p:spPr>
+          <a:xfrm>
+            <a:off x="7772400" y="2331720"/>
             <a:ext cx="146304" cy="146304"/>
           </a:xfrm>
           <a:prstGeom prst="ellipse">
@@ -10121,30 +11928,30 @@
       </p:sp>
       <p:sp>
         <p:nvSpPr>
-          <p:cNvPr id="7" name="Text 4"/>
-          <p:cNvSpPr/>
-          <p:nvPr/>
-        </p:nvSpPr>
-        <p:spPr>
-          <a:xfrm>
-            <a:off x="8046720" y="1645920"/>
-            <a:ext cx="3474720" cy="365760"/>
-          </a:xfrm>
-          <a:prstGeom prst="rect">
-            <a:avLst/>
-          </a:prstGeom>
-          <a:noFill/>
-          <a:ln/>
-        </p:spPr>
-        <p:txBody>
-          <a:bodyPr wrap="square" lIns="0" tIns="0" rIns="0" bIns="0" rtlCol="0" anchor="ctr"/>
-          <a:lstStyle/>
-          <a:p>
-            <a:pPr indent="0" marL="0">
-              <a:buNone/>
-            </a:pPr>
-            <a:r>
-              <a:rPr lang="en-US" sz="1550" b="1" dirty="0">
+          <p:cNvPr id="8" name="Text 5"/>
+          <p:cNvSpPr/>
+          <p:nvPr/>
+        </p:nvSpPr>
+        <p:spPr>
+          <a:xfrm>
+            <a:off x="8046720" y="2212848"/>
+            <a:ext cx="3520440" cy="320040"/>
+          </a:xfrm>
+          <a:prstGeom prst="rect">
+            <a:avLst/>
+          </a:prstGeom>
+          <a:noFill/>
+          <a:ln/>
+        </p:spPr>
+        <p:txBody>
+          <a:bodyPr wrap="square" lIns="0" tIns="0" rIns="0" bIns="0" rtlCol="0" anchor="ctr"/>
+          <a:lstStyle/>
+          <a:p>
+            <a:pPr indent="0" marL="0">
+              <a:buNone/>
+            </a:pPr>
+            <a:r>
+              <a:rPr lang="en-US" sz="1500" b="1" dirty="0">
                 <a:solidFill>
                   <a:srgbClr val="E9EEF3"/>
                 </a:solidFill>
@@ -10152,22 +11959,22 @@
                 <a:ea typeface="Calibri" pitchFamily="34" charset="-122"/>
                 <a:cs typeface="Calibri" pitchFamily="34" charset="-120"/>
               </a:rPr>
-              <a:t>Statistical, not hard-coded</a:t>
-            </a:r>
-            <a:endParaRPr lang="en-US" sz="1550" dirty="0"/>
-          </a:p>
-        </p:txBody>
-      </p:sp>
-      <p:sp>
-        <p:nvSpPr>
-          <p:cNvPr id="8" name="Text 5"/>
-          <p:cNvSpPr/>
-          <p:nvPr/>
-        </p:nvSpPr>
-        <p:spPr>
-          <a:xfrm>
-            <a:off x="8046720" y="2029968"/>
-            <a:ext cx="3474720" cy="822960"/>
+              <a:t>Similarity alone lies</a:t>
+            </a:r>
+            <a:endParaRPr lang="en-US" sz="1500" dirty="0"/>
+          </a:p>
+        </p:txBody>
+      </p:sp>
+      <p:sp>
+        <p:nvSpPr>
+          <p:cNvPr id="9" name="Text 6"/>
+          <p:cNvSpPr/>
+          <p:nvPr/>
+        </p:nvSpPr>
+        <p:spPr>
+          <a:xfrm>
+            <a:off x="8046720" y="2542032"/>
+            <a:ext cx="3520440" cy="1051560"/>
           </a:xfrm>
           <a:prstGeom prst="rect">
             <a:avLst/>
@@ -10186,7 +11993,7 @@
               <a:buNone/>
             </a:pPr>
             <a:r>
-              <a:rPr lang="en-US" sz="1250" dirty="0">
+              <a:rPr lang="en-US" sz="1200" dirty="0">
                 <a:solidFill>
                   <a:srgbClr val="93A1AF"/>
                 </a:solidFill>
@@ -10194,21 +12001,21 @@
                 <a:ea typeface="Calibri" pitchFamily="34" charset="-122"/>
                 <a:cs typeface="Calibri" pitchFamily="34" charset="-120"/>
               </a:rPr>
-              <a:t>Anomalies are defined as events beyond 3σ of the live population — the threshold moves with the data, not a magic number.</a:t>
-            </a:r>
-            <a:endParaRPr lang="en-US" sz="1250" dirty="0"/>
-          </a:p>
-        </p:txBody>
-      </p:sp>
-      <p:sp>
-        <p:nvSpPr>
-          <p:cNvPr id="9" name="Shape 6"/>
-          <p:cNvSpPr/>
-          <p:nvPr/>
-        </p:nvSpPr>
-        <p:spPr>
-          <a:xfrm>
-            <a:off x="7772400" y="3099816"/>
+              <a:t>Measured on this corpus, an off-topic question about a “vacation policy” scores higher than a legitimate one about a flagged customer — purely on the shared word “policy”.</a:t>
+            </a:r>
+            <a:endParaRPr lang="en-US" sz="1200" dirty="0"/>
+          </a:p>
+        </p:txBody>
+      </p:sp>
+      <p:sp>
+        <p:nvSpPr>
+          <p:cNvPr id="10" name="Shape 7"/>
+          <p:cNvSpPr/>
+          <p:nvPr/>
+        </p:nvSpPr>
+        <p:spPr>
+          <a:xfrm>
+            <a:off x="7772400" y="3630168"/>
             <a:ext cx="146304" cy="146304"/>
           </a:xfrm>
           <a:prstGeom prst="ellipse">
@@ -10222,30 +12029,30 @@
       </p:sp>
       <p:sp>
         <p:nvSpPr>
-          <p:cNvPr id="10" name="Text 7"/>
-          <p:cNvSpPr/>
-          <p:nvPr/>
-        </p:nvSpPr>
-        <p:spPr>
-          <a:xfrm>
-            <a:off x="8046720" y="2980944"/>
-            <a:ext cx="3474720" cy="365760"/>
-          </a:xfrm>
-          <a:prstGeom prst="rect">
-            <a:avLst/>
-          </a:prstGeom>
-          <a:noFill/>
-          <a:ln/>
-        </p:spPr>
-        <p:txBody>
-          <a:bodyPr wrap="square" lIns="0" tIns="0" rIns="0" bIns="0" rtlCol="0" anchor="ctr"/>
-          <a:lstStyle/>
-          <a:p>
-            <a:pPr indent="0" marL="0">
-              <a:buNone/>
-            </a:pPr>
-            <a:r>
-              <a:rPr lang="en-US" sz="1550" b="1" dirty="0">
+          <p:cNvPr id="11" name="Text 8"/>
+          <p:cNvSpPr/>
+          <p:nvPr/>
+        </p:nvSpPr>
+        <p:spPr>
+          <a:xfrm>
+            <a:off x="8046720" y="3511296"/>
+            <a:ext cx="3520440" cy="320040"/>
+          </a:xfrm>
+          <a:prstGeom prst="rect">
+            <a:avLst/>
+          </a:prstGeom>
+          <a:noFill/>
+          <a:ln/>
+        </p:spPr>
+        <p:txBody>
+          <a:bodyPr wrap="square" lIns="0" tIns="0" rIns="0" bIns="0" rtlCol="0" anchor="ctr"/>
+          <a:lstStyle/>
+          <a:p>
+            <a:pPr indent="0" marL="0">
+              <a:buNone/>
+            </a:pPr>
+            <a:r>
+              <a:rPr lang="en-US" sz="1500" b="1" dirty="0">
                 <a:solidFill>
                   <a:srgbClr val="E9EEF3"/>
                 </a:solidFill>
@@ -10253,22 +12060,22 @@
                 <a:ea typeface="Calibri" pitchFamily="34" charset="-122"/>
                 <a:cs typeface="Calibri" pitchFamily="34" charset="-120"/>
               </a:rPr>
-              <a:t>Parameter-bound execution</a:t>
-            </a:r>
-            <a:endParaRPr lang="en-US" sz="1550" dirty="0"/>
-          </a:p>
-        </p:txBody>
-      </p:sp>
-      <p:sp>
-        <p:nvSpPr>
-          <p:cNvPr id="11" name="Text 8"/>
-          <p:cNvSpPr/>
-          <p:nvPr/>
-        </p:nvSpPr>
-        <p:spPr>
-          <a:xfrm>
-            <a:off x="8046720" y="3364992"/>
-            <a:ext cx="3474720" cy="822960"/>
+              <a:t>So coverage is required</a:t>
+            </a:r>
+            <a:endParaRPr lang="en-US" sz="1500" dirty="0"/>
+          </a:p>
+        </p:txBody>
+      </p:sp>
+      <p:sp>
+        <p:nvSpPr>
+          <p:cNvPr id="12" name="Text 9"/>
+          <p:cNvSpPr/>
+          <p:nvPr/>
+        </p:nvSpPr>
+        <p:spPr>
+          <a:xfrm>
+            <a:off x="8046720" y="3840480"/>
+            <a:ext cx="3520440" cy="1051560"/>
           </a:xfrm>
           <a:prstGeom prst="rect">
             <a:avLst/>
@@ -10287,7 +12094,7 @@
               <a:buNone/>
             </a:pPr>
             <a:r>
-              <a:rPr lang="en-US" sz="1250" dirty="0">
+              <a:rPr lang="en-US" sz="1200" dirty="0">
                 <a:solidFill>
                   <a:srgbClr val="93A1AF"/>
                 </a:solidFill>
@@ -10295,21 +12102,21 @@
                 <a:ea typeface="Calibri" pitchFamily="34" charset="-122"/>
                 <a:cs typeface="Calibri" pitchFamily="34" charset="-120"/>
               </a:rPr>
-              <a:t>The governed function takes the customer ID as a bound parameter. A hostile value matches no rows; it cannot reshape the query.</a:t>
-            </a:r>
-            <a:endParaRPr lang="en-US" sz="1250" dirty="0"/>
-          </a:p>
-        </p:txBody>
-      </p:sp>
-      <p:sp>
-        <p:nvSpPr>
-          <p:cNvPr id="12" name="Shape 9"/>
-          <p:cNvSpPr/>
-          <p:nvPr/>
-        </p:nvSpPr>
-        <p:spPr>
-          <a:xfrm>
-            <a:off x="7772400" y="4434840"/>
+              <a:t>A hit also needs most of the question's meaningful terms to actually appear in the corpus. Below the threshold, the agent abstains.</a:t>
+            </a:r>
+            <a:endParaRPr lang="en-US" sz="1200" dirty="0"/>
+          </a:p>
+        </p:txBody>
+      </p:sp>
+      <p:sp>
+        <p:nvSpPr>
+          <p:cNvPr id="13" name="Shape 10"/>
+          <p:cNvSpPr/>
+          <p:nvPr/>
+        </p:nvSpPr>
+        <p:spPr>
+          <a:xfrm>
+            <a:off x="7772400" y="4928616"/>
             <a:ext cx="146304" cy="146304"/>
           </a:xfrm>
           <a:prstGeom prst="ellipse">
@@ -10323,30 +12130,30 @@
       </p:sp>
       <p:sp>
         <p:nvSpPr>
-          <p:cNvPr id="13" name="Text 10"/>
-          <p:cNvSpPr/>
-          <p:nvPr/>
-        </p:nvSpPr>
-        <p:spPr>
-          <a:xfrm>
-            <a:off x="8046720" y="4315968"/>
-            <a:ext cx="3474720" cy="365760"/>
-          </a:xfrm>
-          <a:prstGeom prst="rect">
-            <a:avLst/>
-          </a:prstGeom>
-          <a:noFill/>
-          <a:ln/>
-        </p:spPr>
-        <p:txBody>
-          <a:bodyPr wrap="square" lIns="0" tIns="0" rIns="0" bIns="0" rtlCol="0" anchor="ctr"/>
-          <a:lstStyle/>
-          <a:p>
-            <a:pPr indent="0" marL="0">
-              <a:buNone/>
-            </a:pPr>
-            <a:r>
-              <a:rPr lang="en-US" sz="1550" b="1" dirty="0">
+          <p:cNvPr id="14" name="Text 11"/>
+          <p:cNvSpPr/>
+          <p:nvPr/>
+        </p:nvSpPr>
+        <p:spPr>
+          <a:xfrm>
+            <a:off x="8046720" y="4809744"/>
+            <a:ext cx="3520440" cy="320040"/>
+          </a:xfrm>
+          <a:prstGeom prst="rect">
+            <a:avLst/>
+          </a:prstGeom>
+          <a:noFill/>
+          <a:ln/>
+        </p:spPr>
+        <p:txBody>
+          <a:bodyPr wrap="square" lIns="0" tIns="0" rIns="0" bIns="0" rtlCol="0" anchor="ctr"/>
+          <a:lstStyle/>
+          <a:p>
+            <a:pPr indent="0" marL="0">
+              <a:buNone/>
+            </a:pPr>
+            <a:r>
+              <a:rPr lang="en-US" sz="1500" b="1" dirty="0">
                 <a:solidFill>
                   <a:srgbClr val="E9EEF3"/>
                 </a:solidFill>
@@ -10354,22 +12161,22 @@
                 <a:ea typeface="Calibri" pitchFamily="34" charset="-122"/>
                 <a:cs typeface="Calibri" pitchFamily="34" charset="-120"/>
               </a:rPr>
-              <a:t>Every step is traced</a:t>
-            </a:r>
-            <a:endParaRPr lang="en-US" sz="1550" dirty="0"/>
-          </a:p>
-        </p:txBody>
-      </p:sp>
-      <p:sp>
-        <p:nvSpPr>
-          <p:cNvPr id="14" name="Text 11"/>
-          <p:cNvSpPr/>
-          <p:nvPr/>
-        </p:nvSpPr>
-        <p:spPr>
-          <a:xfrm>
-            <a:off x="8046720" y="4700016"/>
-            <a:ext cx="3474720" cy="822960"/>
+              <a:t>It says so out loud</a:t>
+            </a:r>
+            <a:endParaRPr lang="en-US" sz="1500" dirty="0"/>
+          </a:p>
+        </p:txBody>
+      </p:sp>
+      <p:sp>
+        <p:nvSpPr>
+          <p:cNvPr id="15" name="Text 12"/>
+          <p:cNvSpPr/>
+          <p:nvPr/>
+        </p:nvSpPr>
+        <p:spPr>
+          <a:xfrm>
+            <a:off x="8046720" y="5138928"/>
+            <a:ext cx="3520440" cy="1051560"/>
           </a:xfrm>
           <a:prstGeom prst="rect">
             <a:avLst/>
@@ -10388,7 +12195,7 @@
               <a:buNone/>
             </a:pPr>
             <a:r>
-              <a:rPr lang="en-US" sz="1250" dirty="0">
+              <a:rPr lang="en-US" sz="1200" dirty="0">
                 <a:solidFill>
                   <a:srgbClr val="93A1AF"/>
                 </a:solidFill>
@@ -10396,22 +12203,22 @@
                 <a:ea typeface="Calibri" pitchFamily="34" charset="-122"/>
                 <a:cs typeface="Calibri" pitchFamily="34" charset="-120"/>
               </a:rPr>
-              <a:t>Intent, governance decision, execution, synthesis — each is recorded and shown, so the answer is auditable end to end.</a:t>
-            </a:r>
-            <a:endParaRPr lang="en-US" sz="1250" dirty="0"/>
-          </a:p>
-        </p:txBody>
-      </p:sp>
-      <p:sp>
-        <p:nvSpPr>
-          <p:cNvPr id="15" name="Text 12"/>
-          <p:cNvSpPr/>
-          <p:nvPr/>
-        </p:nvSpPr>
-        <p:spPr>
-          <a:xfrm>
-            <a:off x="640080" y="5943600"/>
-            <a:ext cx="10881360" cy="457200"/>
+              <a:t>“No governed knowledge covers that question” — an honest no, not a plausible-sounding guess.</a:t>
+            </a:r>
+            <a:endParaRPr lang="en-US" sz="1200" dirty="0"/>
+          </a:p>
+        </p:txBody>
+      </p:sp>
+      <p:sp>
+        <p:nvSpPr>
+          <p:cNvPr id="16" name="Text 13"/>
+          <p:cNvSpPr/>
+          <p:nvPr/>
+        </p:nvSpPr>
+        <p:spPr>
+          <a:xfrm>
+            <a:off x="640080" y="5989320"/>
+            <a:ext cx="10881360" cy="365760"/>
           </a:xfrm>
           <a:prstGeom prst="rect">
             <a:avLst/>
@@ -10435,7 +12242,7 @@
                 <a:ea typeface="Calibri" pitchFamily="34" charset="-122"/>
                 <a:cs typeface="Calibri" pitchFamily="34" charset="-120"/>
               </a:rPr>
-              <a:t>Verified by a 10-test suite covering real computation, governance enforcement, and injection resistance — all passing.</a:t>
+              <a:t>A spurious citation is worse than an honest “no” — it is the failure mode that destroys trust in an AI system.</a:t>
             </a:r>
             <a:endParaRPr lang="en-US" sz="1450" dirty="0"/>
           </a:p>
@@ -10443,7 +12250,7 @@
       </p:sp>
       <p:sp>
         <p:nvSpPr>
-          <p:cNvPr id="16" name="Text 13"/>
+          <p:cNvPr id="17" name="Text 14"/>
           <p:cNvSpPr/>
           <p:nvPr/>
         </p:nvSpPr>
@@ -10482,7 +12289,7 @@
       </p:sp>
       <p:sp>
         <p:nvSpPr>
-          <p:cNvPr id="17" name="Text 14"/>
+          <p:cNvPr id="18" name="Text 15"/>
           <p:cNvSpPr/>
           <p:nvPr/>
         </p:nvSpPr>
@@ -10501,7 +12308,7 @@
           <a:bodyPr wrap="square" lIns="0" tIns="0" rIns="0" bIns="0" rtlCol="0" anchor="ctr"/>
           <a:lstStyle/>
           <a:p>
-            <a:pPr algn="l" indent="0" marL="0">
+            <a:pPr indent="0" marL="0">
               <a:buNone/>
             </a:pPr>
             <a:r>
@@ -10592,7 +12399,7 @@
           <a:bodyPr wrap="square" lIns="0" tIns="0" rIns="0" bIns="0" rtlCol="0" anchor="ctr"/>
           <a:lstStyle/>
           <a:p>
-            <a:pPr algn="l" indent="0" marL="0">
+            <a:pPr indent="0" marL="0">
               <a:buNone/>
             </a:pPr>
             <a:r>
@@ -10604,7 +12411,7 @@
                 <a:ea typeface="Calibri" pitchFamily="34" charset="-122"/>
                 <a:cs typeface="Calibri" pitchFamily="34" charset="-120"/>
               </a:rPr>
-              <a:t>WHY IT MATTERS</a:t>
+              <a:t>UNDER THE HOOD</a:t>
             </a:r>
             <a:endParaRPr lang="en-US" sz="1200" dirty="0"/>
           </a:p>
@@ -10631,7 +12438,7 @@
           <a:bodyPr wrap="square" lIns="0" tIns="0" rIns="0" bIns="0" rtlCol="0" anchor="t"/>
           <a:lstStyle/>
           <a:p>
-            <a:pPr algn="l" indent="0" marL="0">
+            <a:pPr indent="0" marL="0">
               <a:buNone/>
             </a:pPr>
             <a:r>
@@ -10643,111 +12450,82 @@
                 <a:ea typeface="Cambria" pitchFamily="34" charset="-122"/>
                 <a:cs typeface="Cambria" pitchFamily="34" charset="-120"/>
               </a:rPr>
-              <a:t>Business impact</a:t>
+              <a:t>Why the answers hold up</a:t>
             </a:r>
             <a:endParaRPr lang="en-US" sz="3200" dirty="0"/>
           </a:p>
         </p:txBody>
       </p:sp>
-      <p:sp>
-        <p:nvSpPr>
-          <p:cNvPr id="5" name="Shape 3"/>
-          <p:cNvSpPr/>
-          <p:nvPr/>
-        </p:nvSpPr>
+      <p:pic>
+        <p:nvPicPr>
+          <p:cNvPr id="5" name="Image 0" descr="/private/tmp/claude-501/-Users-atharvvani-Downloads-DataBricks/437ba0b1-41b9-48e1-95cf-333721d11260/scratchpad/deck_assets/latency_dist.png">    </p:cNvPr>
+          <p:cNvPicPr>
+            <a:picLocks noChangeAspect="1"/>
+          </p:cNvPicPr>
+          <p:nvPr/>
+        </p:nvPicPr>
+        <p:blipFill>
+          <a:blip r:embed="rId1"/>
+          <a:stretch>
+            <a:fillRect/>
+          </a:stretch>
+        </p:blipFill>
         <p:spPr>
           <a:xfrm>
             <a:off x="640080" y="1828800"/>
-            <a:ext cx="5257800" cy="1755648"/>
-          </a:xfrm>
-          <a:prstGeom prst="roundRect">
-            <a:avLst>
-              <a:gd name="adj" fmla="val 4688"/>
-            </a:avLst>
+            <a:ext cx="6766560" cy="2926080"/>
+          </a:xfrm>
+          <a:prstGeom prst="rect">
+            <a:avLst/>
+          </a:prstGeom>
+        </p:spPr>
+      </p:pic>
+      <p:sp>
+        <p:nvSpPr>
+          <p:cNvPr id="6" name="Shape 3"/>
+          <p:cNvSpPr/>
+          <p:nvPr/>
+        </p:nvSpPr>
+        <p:spPr>
+          <a:xfrm>
+            <a:off x="7772400" y="1764792"/>
+            <a:ext cx="146304" cy="146304"/>
+          </a:xfrm>
+          <a:prstGeom prst="ellipse">
+            <a:avLst/>
           </a:prstGeom>
           <a:solidFill>
-            <a:srgbClr val="18232F"/>
+            <a:srgbClr val="FF6C00"/>
           </a:solidFill>
-          <a:ln w="12700">
-            <a:solidFill>
-              <a:srgbClr val="2A3745"/>
-            </a:solidFill>
-            <a:prstDash val="solid"/>
-          </a:ln>
-          <a:effectLst>
-            <a:outerShdw sx="100000" sy="100000" kx="0" ky="0" algn="bl" rotWithShape="0" blurRad="114300" dist="38100" dir="5400000">
-              <a:srgbClr val="000000">
-                <a:alpha val="28000"/>
-              </a:srgbClr>
-            </a:outerShdw>
-          </a:effectLst>
-        </p:spPr>
-      </p:sp>
-      <p:sp>
-        <p:nvSpPr>
-          <p:cNvPr id="6" name="Text 4"/>
-          <p:cNvSpPr/>
-          <p:nvPr/>
-        </p:nvSpPr>
-        <p:spPr>
-          <a:xfrm>
-            <a:off x="960120" y="2066544"/>
-            <a:ext cx="4617720" cy="502920"/>
-          </a:xfrm>
-          <a:prstGeom prst="rect">
-            <a:avLst/>
-          </a:prstGeom>
-          <a:noFill/>
-          <a:ln/>
-        </p:spPr>
-        <p:txBody>
-          <a:bodyPr wrap="square" lIns="0" tIns="0" rIns="0" bIns="0" rtlCol="0" anchor="ctr"/>
-          <a:lstStyle/>
-          <a:p>
-            <a:pPr indent="0" marL="0">
-              <a:buNone/>
-            </a:pPr>
-            <a:r>
-              <a:rPr lang="en-US" sz="2600" b="1" dirty="0">
-                <a:solidFill>
-                  <a:srgbClr val="FF8A3D"/>
-                </a:solidFill>
-                <a:latin typeface="Cambria" pitchFamily="34" charset="0"/>
-                <a:ea typeface="Cambria" pitchFamily="34" charset="-122"/>
-                <a:cs typeface="Cambria" pitchFamily="34" charset="-120"/>
-              </a:rPr>
-              <a:t>Days → seconds</a:t>
-            </a:r>
-            <a:endParaRPr lang="en-US" sz="2600" dirty="0"/>
-          </a:p>
-        </p:txBody>
-      </p:sp>
-      <p:sp>
-        <p:nvSpPr>
-          <p:cNvPr id="7" name="Text 5"/>
-          <p:cNvSpPr/>
-          <p:nvPr/>
-        </p:nvSpPr>
-        <p:spPr>
-          <a:xfrm>
-            <a:off x="960120" y="2578608"/>
-            <a:ext cx="4617720" cy="292608"/>
-          </a:xfrm>
-          <a:prstGeom prst="rect">
-            <a:avLst/>
-          </a:prstGeom>
-          <a:noFill/>
-          <a:ln/>
-        </p:spPr>
-        <p:txBody>
-          <a:bodyPr wrap="square" lIns="0" tIns="0" rIns="0" bIns="0" rtlCol="0" anchor="ctr"/>
-          <a:lstStyle/>
-          <a:p>
-            <a:pPr indent="0" marL="0">
-              <a:buNone/>
-            </a:pPr>
-            <a:r>
-              <a:rPr lang="en-US" sz="1200" b="1" spc="150" kern="0" dirty="0">
+          <a:ln/>
+        </p:spPr>
+      </p:sp>
+      <p:sp>
+        <p:nvSpPr>
+          <p:cNvPr id="7" name="Text 4"/>
+          <p:cNvSpPr/>
+          <p:nvPr/>
+        </p:nvSpPr>
+        <p:spPr>
+          <a:xfrm>
+            <a:off x="8046720" y="1645920"/>
+            <a:ext cx="3474720" cy="365760"/>
+          </a:xfrm>
+          <a:prstGeom prst="rect">
+            <a:avLst/>
+          </a:prstGeom>
+          <a:noFill/>
+          <a:ln/>
+        </p:spPr>
+        <p:txBody>
+          <a:bodyPr wrap="square" lIns="0" tIns="0" rIns="0" bIns="0" rtlCol="0" anchor="ctr"/>
+          <a:lstStyle/>
+          <a:p>
+            <a:pPr indent="0" marL="0">
+              <a:buNone/>
+            </a:pPr>
+            <a:r>
+              <a:rPr lang="en-US" sz="1550" b="1" dirty="0">
                 <a:solidFill>
                   <a:srgbClr val="E9EEF3"/>
                 </a:solidFill>
@@ -10755,22 +12533,22 @@
                 <a:ea typeface="Calibri" pitchFamily="34" charset="-122"/>
                 <a:cs typeface="Calibri" pitchFamily="34" charset="-120"/>
               </a:rPr>
-              <a:t>TIME TO INSIGHT</a:t>
-            </a:r>
-            <a:endParaRPr lang="en-US" sz="1200" dirty="0"/>
-          </a:p>
-        </p:txBody>
-      </p:sp>
-      <p:sp>
-        <p:nvSpPr>
-          <p:cNvPr id="8" name="Text 6"/>
-          <p:cNvSpPr/>
-          <p:nvPr/>
-        </p:nvSpPr>
-        <p:spPr>
-          <a:xfrm>
-            <a:off x="960120" y="2871216"/>
-            <a:ext cx="4709160" cy="658368"/>
+              <a:t>Statistical, not hard-coded</a:t>
+            </a:r>
+            <a:endParaRPr lang="en-US" sz="1550" dirty="0"/>
+          </a:p>
+        </p:txBody>
+      </p:sp>
+      <p:sp>
+        <p:nvSpPr>
+          <p:cNvPr id="8" name="Text 5"/>
+          <p:cNvSpPr/>
+          <p:nvPr/>
+        </p:nvSpPr>
+        <p:spPr>
+          <a:xfrm>
+            <a:off x="8046720" y="2029968"/>
+            <a:ext cx="3474720" cy="822960"/>
           </a:xfrm>
           <a:prstGeom prst="rect">
             <a:avLst/>
@@ -10797,7 +12575,7 @@
                 <a:ea typeface="Calibri" pitchFamily="34" charset="-122"/>
                 <a:cs typeface="Calibri" pitchFamily="34" charset="-120"/>
               </a:rPr>
-              <a:t>A business owner asks in plain language and gets a governed answer immediately — no analyst ticket queue in between.</a:t>
+              <a:t>Anomalies are events beyond 3σ of the live population — the threshold moves with the data, not a magic number.</a:t>
             </a:r>
             <a:endParaRPr lang="en-US" sz="1250" dirty="0"/>
           </a:p>
@@ -10805,103 +12583,50 @@
       </p:sp>
       <p:sp>
         <p:nvSpPr>
-          <p:cNvPr id="9" name="Shape 7"/>
-          <p:cNvSpPr/>
-          <p:nvPr/>
-        </p:nvSpPr>
-        <p:spPr>
-          <a:xfrm>
-            <a:off x="6217920" y="1828800"/>
-            <a:ext cx="5257800" cy="1755648"/>
-          </a:xfrm>
-          <a:prstGeom prst="roundRect">
-            <a:avLst>
-              <a:gd name="adj" fmla="val 4688"/>
-            </a:avLst>
+          <p:cNvPr id="9" name="Shape 6"/>
+          <p:cNvSpPr/>
+          <p:nvPr/>
+        </p:nvSpPr>
+        <p:spPr>
+          <a:xfrm>
+            <a:off x="7772400" y="3099816"/>
+            <a:ext cx="146304" cy="146304"/>
+          </a:xfrm>
+          <a:prstGeom prst="ellipse">
+            <a:avLst/>
           </a:prstGeom>
           <a:solidFill>
-            <a:srgbClr val="18232F"/>
+            <a:srgbClr val="FF6C00"/>
           </a:solidFill>
-          <a:ln w="12700">
-            <a:solidFill>
-              <a:srgbClr val="2A3745"/>
-            </a:solidFill>
-            <a:prstDash val="solid"/>
-          </a:ln>
-          <a:effectLst>
-            <a:outerShdw sx="100000" sy="100000" kx="0" ky="0" algn="bl" rotWithShape="0" blurRad="114300" dist="38100" dir="5400000">
-              <a:srgbClr val="000000">
-                <a:alpha val="28000"/>
-              </a:srgbClr>
-            </a:outerShdw>
-          </a:effectLst>
-        </p:spPr>
-      </p:sp>
-      <p:sp>
-        <p:nvSpPr>
-          <p:cNvPr id="10" name="Text 8"/>
-          <p:cNvSpPr/>
-          <p:nvPr/>
-        </p:nvSpPr>
-        <p:spPr>
-          <a:xfrm>
-            <a:off x="6537960" y="2066544"/>
-            <a:ext cx="4617720" cy="502920"/>
-          </a:xfrm>
-          <a:prstGeom prst="rect">
-            <a:avLst/>
-          </a:prstGeom>
-          <a:noFill/>
-          <a:ln/>
-        </p:spPr>
-        <p:txBody>
-          <a:bodyPr wrap="square" lIns="0" tIns="0" rIns="0" bIns="0" rtlCol="0" anchor="ctr"/>
-          <a:lstStyle/>
-          <a:p>
-            <a:pPr indent="0" marL="0">
-              <a:buNone/>
-            </a:pPr>
-            <a:r>
-              <a:rPr lang="en-US" sz="2600" b="1" dirty="0">
-                <a:solidFill>
-                  <a:srgbClr val="FF8A3D"/>
-                </a:solidFill>
-                <a:latin typeface="Cambria" pitchFamily="34" charset="0"/>
-                <a:ea typeface="Cambria" pitchFamily="34" charset="-122"/>
-                <a:cs typeface="Cambria" pitchFamily="34" charset="-120"/>
-              </a:rPr>
-              <a:t>Unblocked</a:t>
-            </a:r>
-            <a:endParaRPr lang="en-US" sz="2600" dirty="0"/>
-          </a:p>
-        </p:txBody>
-      </p:sp>
-      <p:sp>
-        <p:nvSpPr>
-          <p:cNvPr id="11" name="Text 9"/>
-          <p:cNvSpPr/>
-          <p:nvPr/>
-        </p:nvSpPr>
-        <p:spPr>
-          <a:xfrm>
-            <a:off x="6537960" y="2578608"/>
-            <a:ext cx="4617720" cy="292608"/>
-          </a:xfrm>
-          <a:prstGeom prst="rect">
-            <a:avLst/>
-          </a:prstGeom>
-          <a:noFill/>
-          <a:ln/>
-        </p:spPr>
-        <p:txBody>
-          <a:bodyPr wrap="square" lIns="0" tIns="0" rIns="0" bIns="0" rtlCol="0" anchor="ctr"/>
-          <a:lstStyle/>
-          <a:p>
-            <a:pPr indent="0" marL="0">
-              <a:buNone/>
-            </a:pPr>
-            <a:r>
-              <a:rPr lang="en-US" sz="1200" b="1" spc="150" kern="0" dirty="0">
+          <a:ln/>
+        </p:spPr>
+      </p:sp>
+      <p:sp>
+        <p:nvSpPr>
+          <p:cNvPr id="10" name="Text 7"/>
+          <p:cNvSpPr/>
+          <p:nvPr/>
+        </p:nvSpPr>
+        <p:spPr>
+          <a:xfrm>
+            <a:off x="8046720" y="2980944"/>
+            <a:ext cx="3474720" cy="365760"/>
+          </a:xfrm>
+          <a:prstGeom prst="rect">
+            <a:avLst/>
+          </a:prstGeom>
+          <a:noFill/>
+          <a:ln/>
+        </p:spPr>
+        <p:txBody>
+          <a:bodyPr wrap="square" lIns="0" tIns="0" rIns="0" bIns="0" rtlCol="0" anchor="ctr"/>
+          <a:lstStyle/>
+          <a:p>
+            <a:pPr indent="0" marL="0">
+              <a:buNone/>
+            </a:pPr>
+            <a:r>
+              <a:rPr lang="en-US" sz="1550" b="1" dirty="0">
                 <a:solidFill>
                   <a:srgbClr val="E9EEF3"/>
                 </a:solidFill>
@@ -10909,22 +12634,22 @@
                 <a:ea typeface="Calibri" pitchFamily="34" charset="-122"/>
                 <a:cs typeface="Calibri" pitchFamily="34" charset="-120"/>
               </a:rPr>
-              <a:t>AI ADOPTION</a:t>
-            </a:r>
-            <a:endParaRPr lang="en-US" sz="1200" dirty="0"/>
-          </a:p>
-        </p:txBody>
-      </p:sp>
-      <p:sp>
-        <p:nvSpPr>
-          <p:cNvPr id="12" name="Text 10"/>
-          <p:cNvSpPr/>
-          <p:nvPr/>
-        </p:nvSpPr>
-        <p:spPr>
-          <a:xfrm>
-            <a:off x="6537960" y="2871216"/>
-            <a:ext cx="4709160" cy="658368"/>
+              <a:t>Parameter-bound execution</a:t>
+            </a:r>
+            <a:endParaRPr lang="en-US" sz="1550" dirty="0"/>
+          </a:p>
+        </p:txBody>
+      </p:sp>
+      <p:sp>
+        <p:nvSpPr>
+          <p:cNvPr id="11" name="Text 8"/>
+          <p:cNvSpPr/>
+          <p:nvPr/>
+        </p:nvSpPr>
+        <p:spPr>
+          <a:xfrm>
+            <a:off x="8046720" y="3364992"/>
+            <a:ext cx="3474720" cy="822960"/>
           </a:xfrm>
           <a:prstGeom prst="rect">
             <a:avLst/>
@@ -10951,7 +12676,7 @@
                 <a:ea typeface="Calibri" pitchFamily="34" charset="-122"/>
                 <a:cs typeface="Calibri" pitchFamily="34" charset="-120"/>
               </a:rPr>
-              <a:t>Risk stops being open-ended. Security reviews a bounded allowlist instead of debating 'the model can see everything.'</a:t>
+              <a:t>Values are bound, never interpolated — a hostile input matches no rows and cannot reshape a query.</a:t>
             </a:r>
             <a:endParaRPr lang="en-US" sz="1250" dirty="0"/>
           </a:p>
@@ -10959,103 +12684,50 @@
       </p:sp>
       <p:sp>
         <p:nvSpPr>
-          <p:cNvPr id="13" name="Shape 11"/>
-          <p:cNvSpPr/>
-          <p:nvPr/>
-        </p:nvSpPr>
-        <p:spPr>
-          <a:xfrm>
-            <a:off x="640080" y="3858768"/>
-            <a:ext cx="5257800" cy="1755648"/>
-          </a:xfrm>
-          <a:prstGeom prst="roundRect">
-            <a:avLst>
-              <a:gd name="adj" fmla="val 4688"/>
-            </a:avLst>
+          <p:cNvPr id="12" name="Shape 9"/>
+          <p:cNvSpPr/>
+          <p:nvPr/>
+        </p:nvSpPr>
+        <p:spPr>
+          <a:xfrm>
+            <a:off x="7772400" y="4434840"/>
+            <a:ext cx="146304" cy="146304"/>
+          </a:xfrm>
+          <a:prstGeom prst="ellipse">
+            <a:avLst/>
           </a:prstGeom>
           <a:solidFill>
-            <a:srgbClr val="18232F"/>
+            <a:srgbClr val="FF6C00"/>
           </a:solidFill>
-          <a:ln w="12700">
-            <a:solidFill>
-              <a:srgbClr val="2A3745"/>
-            </a:solidFill>
-            <a:prstDash val="solid"/>
-          </a:ln>
-          <a:effectLst>
-            <a:outerShdw sx="100000" sy="100000" kx="0" ky="0" algn="bl" rotWithShape="0" blurRad="114300" dist="38100" dir="5400000">
-              <a:srgbClr val="000000">
-                <a:alpha val="28000"/>
-              </a:srgbClr>
-            </a:outerShdw>
-          </a:effectLst>
-        </p:spPr>
-      </p:sp>
-      <p:sp>
-        <p:nvSpPr>
-          <p:cNvPr id="14" name="Text 12"/>
-          <p:cNvSpPr/>
-          <p:nvPr/>
-        </p:nvSpPr>
-        <p:spPr>
-          <a:xfrm>
-            <a:off x="960120" y="4096512"/>
-            <a:ext cx="4617720" cy="502920"/>
-          </a:xfrm>
-          <a:prstGeom prst="rect">
-            <a:avLst/>
-          </a:prstGeom>
-          <a:noFill/>
-          <a:ln/>
-        </p:spPr>
-        <p:txBody>
-          <a:bodyPr wrap="square" lIns="0" tIns="0" rIns="0" bIns="0" rtlCol="0" anchor="ctr"/>
-          <a:lstStyle/>
-          <a:p>
-            <a:pPr indent="0" marL="0">
-              <a:buNone/>
-            </a:pPr>
-            <a:r>
-              <a:rPr lang="en-US" sz="2600" b="1" dirty="0">
-                <a:solidFill>
-                  <a:srgbClr val="FF8A3D"/>
-                </a:solidFill>
-                <a:latin typeface="Cambria" pitchFamily="34" charset="0"/>
-                <a:ea typeface="Cambria" pitchFamily="34" charset="-122"/>
-                <a:cs typeface="Cambria" pitchFamily="34" charset="-120"/>
-              </a:rPr>
-              <a:t>Provable</a:t>
-            </a:r>
-            <a:endParaRPr lang="en-US" sz="2600" dirty="0"/>
-          </a:p>
-        </p:txBody>
-      </p:sp>
-      <p:sp>
-        <p:nvSpPr>
-          <p:cNvPr id="15" name="Text 13"/>
-          <p:cNvSpPr/>
-          <p:nvPr/>
-        </p:nvSpPr>
-        <p:spPr>
-          <a:xfrm>
-            <a:off x="960120" y="4608576"/>
-            <a:ext cx="4617720" cy="292608"/>
-          </a:xfrm>
-          <a:prstGeom prst="rect">
-            <a:avLst/>
-          </a:prstGeom>
-          <a:noFill/>
-          <a:ln/>
-        </p:spPr>
-        <p:txBody>
-          <a:bodyPr wrap="square" lIns="0" tIns="0" rIns="0" bIns="0" rtlCol="0" anchor="ctr"/>
-          <a:lstStyle/>
-          <a:p>
-            <a:pPr indent="0" marL="0">
-              <a:buNone/>
-            </a:pPr>
-            <a:r>
-              <a:rPr lang="en-US" sz="1200" b="1" spc="150" kern="0" dirty="0">
+          <a:ln/>
+        </p:spPr>
+      </p:sp>
+      <p:sp>
+        <p:nvSpPr>
+          <p:cNvPr id="13" name="Text 10"/>
+          <p:cNvSpPr/>
+          <p:nvPr/>
+        </p:nvSpPr>
+        <p:spPr>
+          <a:xfrm>
+            <a:off x="8046720" y="4315968"/>
+            <a:ext cx="3474720" cy="365760"/>
+          </a:xfrm>
+          <a:prstGeom prst="rect">
+            <a:avLst/>
+          </a:prstGeom>
+          <a:noFill/>
+          <a:ln/>
+        </p:spPr>
+        <p:txBody>
+          <a:bodyPr wrap="square" lIns="0" tIns="0" rIns="0" bIns="0" rtlCol="0" anchor="ctr"/>
+          <a:lstStyle/>
+          <a:p>
+            <a:pPr indent="0" marL="0">
+              <a:buNone/>
+            </a:pPr>
+            <a:r>
+              <a:rPr lang="en-US" sz="1550" b="1" dirty="0">
                 <a:solidFill>
                   <a:srgbClr val="E9EEF3"/>
                 </a:solidFill>
@@ -11063,22 +12735,22 @@
                 <a:ea typeface="Calibri" pitchFamily="34" charset="-122"/>
                 <a:cs typeface="Calibri" pitchFamily="34" charset="-120"/>
               </a:rPr>
-              <a:t>COMPLIANCE POSTURE</a:t>
-            </a:r>
-            <a:endParaRPr lang="en-US" sz="1200" dirty="0"/>
-          </a:p>
-        </p:txBody>
-      </p:sp>
-      <p:sp>
-        <p:nvSpPr>
-          <p:cNvPr id="16" name="Text 14"/>
-          <p:cNvSpPr/>
-          <p:nvPr/>
-        </p:nvSpPr>
-        <p:spPr>
-          <a:xfrm>
-            <a:off x="960120" y="4901184"/>
-            <a:ext cx="4709160" cy="658368"/>
+              <a:t>Every step is traced</a:t>
+            </a:r>
+            <a:endParaRPr lang="en-US" sz="1550" dirty="0"/>
+          </a:p>
+        </p:txBody>
+      </p:sp>
+      <p:sp>
+        <p:nvSpPr>
+          <p:cNvPr id="14" name="Text 11"/>
+          <p:cNvSpPr/>
+          <p:nvPr/>
+        </p:nvSpPr>
+        <p:spPr>
+          <a:xfrm>
+            <a:off x="8046720" y="4700016"/>
+            <a:ext cx="3474720" cy="822960"/>
           </a:xfrm>
           <a:prstGeom prst="rect">
             <a:avLst/>
@@ -11105,7 +12777,7 @@
                 <a:ea typeface="Calibri" pitchFamily="34" charset="-122"/>
                 <a:cs typeface="Calibri" pitchFamily="34" charset="-120"/>
               </a:rPr>
-              <a:t>PII hashed at ingestion, no raw-row exfiltration, per-action audit trail — controls you can demonstrate, not just promise.</a:t>
+              <a:t>Intent, each governance decision, execution, synthesis — all recorded, so an answer is auditable end to end.</a:t>
             </a:r>
             <a:endParaRPr lang="en-US" sz="1250" dirty="0"/>
           </a:p>
@@ -11113,161 +12785,46 @@
       </p:sp>
       <p:sp>
         <p:nvSpPr>
-          <p:cNvPr id="17" name="Shape 15"/>
-          <p:cNvSpPr/>
-          <p:nvPr/>
-        </p:nvSpPr>
-        <p:spPr>
-          <a:xfrm>
-            <a:off x="6217920" y="3858768"/>
-            <a:ext cx="5257800" cy="1755648"/>
-          </a:xfrm>
-          <a:prstGeom prst="roundRect">
-            <a:avLst>
-              <a:gd name="adj" fmla="val 4688"/>
-            </a:avLst>
-          </a:prstGeom>
-          <a:solidFill>
-            <a:srgbClr val="18232F"/>
-          </a:solidFill>
-          <a:ln w="12700">
-            <a:solidFill>
-              <a:srgbClr val="2A3745"/>
-            </a:solidFill>
-            <a:prstDash val="solid"/>
-          </a:ln>
-          <a:effectLst>
-            <a:outerShdw sx="100000" sy="100000" kx="0" ky="0" algn="bl" rotWithShape="0" blurRad="114300" dist="38100" dir="5400000">
-              <a:srgbClr val="000000">
-                <a:alpha val="28000"/>
-              </a:srgbClr>
-            </a:outerShdw>
-          </a:effectLst>
-        </p:spPr>
-      </p:sp>
-      <p:sp>
-        <p:nvSpPr>
-          <p:cNvPr id="18" name="Text 16"/>
-          <p:cNvSpPr/>
-          <p:nvPr/>
-        </p:nvSpPr>
-        <p:spPr>
-          <a:xfrm>
-            <a:off x="6537960" y="4096512"/>
-            <a:ext cx="4617720" cy="502920"/>
-          </a:xfrm>
-          <a:prstGeom prst="rect">
-            <a:avLst/>
-          </a:prstGeom>
-          <a:noFill/>
-          <a:ln/>
-        </p:spPr>
-        <p:txBody>
-          <a:bodyPr wrap="square" lIns="0" tIns="0" rIns="0" bIns="0" rtlCol="0" anchor="ctr"/>
-          <a:lstStyle/>
-          <a:p>
-            <a:pPr indent="0" marL="0">
-              <a:buNone/>
-            </a:pPr>
-            <a:r>
-              <a:rPr lang="en-US" sz="2600" b="1" dirty="0">
+          <p:cNvPr id="15" name="Text 12"/>
+          <p:cNvSpPr/>
+          <p:nvPr/>
+        </p:nvSpPr>
+        <p:spPr>
+          <a:xfrm>
+            <a:off x="640080" y="5943600"/>
+            <a:ext cx="10881360" cy="457200"/>
+          </a:xfrm>
+          <a:prstGeom prst="rect">
+            <a:avLst/>
+          </a:prstGeom>
+          <a:noFill/>
+          <a:ln/>
+        </p:spPr>
+        <p:txBody>
+          <a:bodyPr wrap="square" lIns="0" tIns="0" rIns="0" bIns="0" rtlCol="0" anchor="ctr"/>
+          <a:lstStyle/>
+          <a:p>
+            <a:pPr indent="0" marL="0">
+              <a:buNone/>
+            </a:pPr>
+            <a:r>
+              <a:rPr lang="en-US" sz="1450" i="1" dirty="0">
                 <a:solidFill>
                   <a:srgbClr val="FF8A3D"/>
                 </a:solidFill>
-                <a:latin typeface="Cambria" pitchFamily="34" charset="0"/>
-                <a:ea typeface="Cambria" pitchFamily="34" charset="-122"/>
-                <a:cs typeface="Cambria" pitchFamily="34" charset="-120"/>
-              </a:rPr>
-              <a:t>Bounded</a:t>
-            </a:r>
-            <a:endParaRPr lang="en-US" sz="2600" dirty="0"/>
-          </a:p>
-        </p:txBody>
-      </p:sp>
-      <p:sp>
-        <p:nvSpPr>
-          <p:cNvPr id="19" name="Text 17"/>
-          <p:cNvSpPr/>
-          <p:nvPr/>
-        </p:nvSpPr>
-        <p:spPr>
-          <a:xfrm>
-            <a:off x="6537960" y="4608576"/>
-            <a:ext cx="4617720" cy="292608"/>
-          </a:xfrm>
-          <a:prstGeom prst="rect">
-            <a:avLst/>
-          </a:prstGeom>
-          <a:noFill/>
-          <a:ln/>
-        </p:spPr>
-        <p:txBody>
-          <a:bodyPr wrap="square" lIns="0" tIns="0" rIns="0" bIns="0" rtlCol="0" anchor="ctr"/>
-          <a:lstStyle/>
-          <a:p>
-            <a:pPr indent="0" marL="0">
-              <a:buNone/>
-            </a:pPr>
-            <a:r>
-              <a:rPr lang="en-US" sz="1200" b="1" spc="150" kern="0" dirty="0">
-                <a:solidFill>
-                  <a:srgbClr val="E9EEF3"/>
-                </a:solidFill>
-                <a:latin typeface="Calibri" pitchFamily="34" charset="0"/>
-                <a:ea typeface="Calibri" pitchFamily="34" charset="-122"/>
-                <a:cs typeface="Calibri" pitchFamily="34" charset="-120"/>
-              </a:rPr>
-              <a:t>TOTAL COST OF OWNERSHIP</a:t>
-            </a:r>
-            <a:endParaRPr lang="en-US" sz="1200" dirty="0"/>
-          </a:p>
-        </p:txBody>
-      </p:sp>
-      <p:sp>
-        <p:nvSpPr>
-          <p:cNvPr id="20" name="Text 18"/>
-          <p:cNvSpPr/>
-          <p:nvPr/>
-        </p:nvSpPr>
-        <p:spPr>
-          <a:xfrm>
-            <a:off x="6537960" y="4901184"/>
-            <a:ext cx="4709160" cy="658368"/>
-          </a:xfrm>
-          <a:prstGeom prst="rect">
-            <a:avLst/>
-          </a:prstGeom>
-          <a:noFill/>
-          <a:ln/>
-        </p:spPr>
-        <p:txBody>
-          <a:bodyPr wrap="square" lIns="0" tIns="0" rIns="0" bIns="0" rtlCol="0" anchor="ctr"/>
-          <a:lstStyle/>
-          <a:p>
-            <a:pPr indent="0" marL="0">
-              <a:lnSpc>
-                <a:spcPct val="108000"/>
-              </a:lnSpc>
-              <a:buNone/>
-            </a:pPr>
-            <a:r>
-              <a:rPr lang="en-US" sz="1250" dirty="0">
-                <a:solidFill>
-                  <a:srgbClr val="93A1AF"/>
-                </a:solidFill>
-                <a:latin typeface="Calibri" pitchFamily="34" charset="0"/>
-                <a:ea typeface="Calibri" pitchFamily="34" charset="-122"/>
-                <a:cs typeface="Calibri" pitchFamily="34" charset="-120"/>
-              </a:rPr>
-              <a:t>No egress, no duplicate copies, no third-party inference on proprietary data. Cost scales with data scanned, not data stored.</a:t>
-            </a:r>
-            <a:endParaRPr lang="en-US" sz="1250" dirty="0"/>
-          </a:p>
-        </p:txBody>
-      </p:sp>
-      <p:sp>
-        <p:nvSpPr>
-          <p:cNvPr id="21" name="Text 19"/>
+                <a:latin typeface="Calibri" pitchFamily="34" charset="0"/>
+                <a:ea typeface="Calibri" pitchFamily="34" charset="-122"/>
+                <a:cs typeface="Calibri" pitchFamily="34" charset="-120"/>
+              </a:rPr>
+              <a:t>Verified by a 29-test suite covering real computation, governance enforcement, injection resistance, retrieval quality, and abstention — all passing.</a:t>
+            </a:r>
+            <a:endParaRPr lang="en-US" sz="1450" dirty="0"/>
+          </a:p>
+        </p:txBody>
+      </p:sp>
+      <p:sp>
+        <p:nvSpPr>
+          <p:cNvPr id="16" name="Text 13"/>
           <p:cNvSpPr/>
           <p:nvPr/>
         </p:nvSpPr>
@@ -11306,7 +12863,7 @@
       </p:sp>
       <p:sp>
         <p:nvSpPr>
-          <p:cNvPr id="22" name="Text 20"/>
+          <p:cNvPr id="17" name="Text 14"/>
           <p:cNvSpPr/>
           <p:nvPr/>
         </p:nvSpPr>
@@ -11325,7 +12882,7 @@
           <a:bodyPr wrap="square" lIns="0" tIns="0" rIns="0" bIns="0" rtlCol="0" anchor="ctr"/>
           <a:lstStyle/>
           <a:p>
-            <a:pPr algn="l" indent="0" marL="0">
+            <a:pPr indent="0" marL="0">
               <a:buNone/>
             </a:pPr>
             <a:r>
